--- a/outputs/見積もり解説スライド/AI活用開発の見積もりの考え方.pptx
+++ b/outputs/見積もり解説スライド/AI活用開発の見積もりの考え方.pptx
@@ -4,6 +4,9 @@
   <p:sldMasterIdLst>
     <p:sldMasterId id="2147483648" r:id="rId1"/>
   </p:sldMasterIdLst>
+  <p:notesMasterIdLst>
+    <p:notesMasterId r:id="rId15"/>
+  </p:notesMasterIdLst>
   <p:sldIdLst>
     <p:sldId id="256" r:id="rId2"/>
     <p:sldId id="257" r:id="rId3"/>
@@ -18,12 +21,8 @@
     <p:sldId id="266" r:id="rId12"/>
     <p:sldId id="267" r:id="rId13"/>
     <p:sldId id="268" r:id="rId14"/>
-    <p:sldId id="269" r:id="rId15"/>
   </p:sldIdLst>
-  <p:notesMasterIdLst>
-    <p:notesMasterId r:id="rId16"/>
-  </p:notesMasterIdLst>
-  <p:sldSz cx="9144000" cy="5143500"/>
+  <p:sldSz cx="9144000" cy="5143500" type="screen16x9"/>
   <p:notesSz cx="5143500" cy="9144000"/>
   <p:defaultTextStyle>
     <a:lvl1pPr marL="0" algn="l" defTabSz="914400" rtl="0" eaLnBrk="1" latinLnBrk="0" hangingPunct="1">
@@ -117,6 +116,11 @@
       </a:defRPr>
     </a:lvl9pPr>
   </p:defaultTextStyle>
+  <p:extLst>
+    <p:ext uri="{EFAFB233-063F-42B5-8137-9DF3F51BA10A}">
+      <p15:sldGuideLst xmlns:p15="http://schemas.microsoft.com/office/powerpoint/2012/main"/>
+    </p:ext>
+  </p:extLst>
 </p:presentation>
 </file>
 
@@ -142,241 +146,17 @@
           <a:chExt cx="0" cy="0"/>
         </a:xfrm>
       </p:grpSpPr>
-      <p:sp>
-        <p:nvSpPr>
-          <p:cNvPr id="2" name="Header Placeholder 1"/>
-          <p:cNvSpPr>
-            <a:spLocks noGrp="1"/>
-          </p:cNvSpPr>
-          <p:nvPr>
-            <p:ph type="hdr" sz="quarter"/>
-          </p:nvPr>
-        </p:nvSpPr>
-        <p:spPr>
-          <a:xfrm>
-            <a:off x="0" y="0"/>
-            <a:ext cx="2971800" cy="458788"/>
-          </a:xfrm>
-          <a:prstGeom prst="rect">
-            <a:avLst/>
-          </a:prstGeom>
-        </p:spPr>
-        <p:txBody>
-          <a:bodyPr vert="horz" lIns="91440" tIns="45720" rIns="91440" bIns="45720" rtlCol="0"/>
-          <a:lstStyle>
-            <a:lvl1pPr algn="l">
-              <a:defRPr sz="1200"/>
-            </a:lvl1pPr>
-          </a:lstStyle>
-          <a:p>
-            <a:endParaRPr lang="en-US"/>
-          </a:p>
-        </p:txBody>
-      </p:sp>
-      <p:sp>
-        <p:nvSpPr>
-          <p:cNvPr id="3" name="Date Placeholder 2"/>
-          <p:cNvSpPr>
-            <a:spLocks noGrp="1"/>
-          </p:cNvSpPr>
-          <p:nvPr>
-            <p:ph type="dt" idx="1"/>
-          </p:nvPr>
-        </p:nvSpPr>
-        <p:spPr>
-          <a:xfrm>
-            <a:off x="3884613" y="0"/>
-            <a:ext cx="2971800" cy="458788"/>
-          </a:xfrm>
-          <a:prstGeom prst="rect">
-            <a:avLst/>
-          </a:prstGeom>
-        </p:spPr>
-        <p:txBody>
-          <a:bodyPr vert="horz" lIns="91440" tIns="45720" rIns="91440" bIns="45720" rtlCol="0"/>
-          <a:lstStyle>
-            <a:lvl1pPr algn="r">
-              <a:defRPr sz="1200"/>
-            </a:lvl1pPr>
-          </a:lstStyle>
-          <a:p>
-            <a:fld id="{5282F153-3F37-0F45-9E97-73ACFA13230C}" type="datetimeFigureOut">
-              <a:rPr lang="en-US"/>
-              <a:t>7/23/19</a:t>
-            </a:fld>
-            <a:endParaRPr lang="en-US"/>
-          </a:p>
-        </p:txBody>
-      </p:sp>
-      <p:sp>
-        <p:nvSpPr>
-          <p:cNvPr id="4" name="Slide Image Placeholder 3"/>
-          <p:cNvSpPr>
-            <a:spLocks noGrp="1" noRot="1" noChangeAspect="1"/>
-          </p:cNvSpPr>
-          <p:nvPr>
-            <p:ph type="sldImg" idx="2"/>
-          </p:nvPr>
-        </p:nvSpPr>
-        <p:spPr>
-          <a:xfrm>
-            <a:off x="685800" y="1143000"/>
-            <a:ext cx="5486400" cy="3086100"/>
-          </a:xfrm>
-          <a:prstGeom prst="rect">
-            <a:avLst/>
-          </a:prstGeom>
-          <a:noFill/>
-          <a:ln w="12700">
-            <a:solidFill>
-              <a:prstClr val="black"/>
-            </a:solidFill>
-          </a:ln>
-        </p:spPr>
-        <p:txBody>
-          <a:bodyPr vert="horz" lIns="91440" tIns="45720" rIns="91440" bIns="45720" rtlCol="0" anchor="ctr"/>
-          <a:lstStyle/>
-          <a:p>
-            <a:endParaRPr lang="en-US"/>
-          </a:p>
-        </p:txBody>
-      </p:sp>
-      <p:sp>
-        <p:nvSpPr>
-          <p:cNvPr id="5" name="Notes Placeholder 4"/>
-          <p:cNvSpPr>
-            <a:spLocks noGrp="1"/>
-          </p:cNvSpPr>
-          <p:nvPr>
-            <p:ph type="body" sz="quarter" idx="3"/>
-          </p:nvPr>
-        </p:nvSpPr>
-        <p:spPr>
-          <a:xfrm>
-            <a:off x="685800" y="4400550"/>
-            <a:ext cx="5486400" cy="3600450"/>
-          </a:xfrm>
-          <a:prstGeom prst="rect">
-            <a:avLst/>
-          </a:prstGeom>
-        </p:spPr>
-        <p:txBody>
-          <a:bodyPr vert="horz" lIns="91440" tIns="45720" rIns="91440" bIns="45720" rtlCol="0"/>
-          <a:lstStyle/>
-          <a:p>
-            <a:pPr lvl="0"/>
-            <a:r>
-              <a:rPr lang="en-US"/>
-              <a:t>Click to edit Master text styles</a:t>
-            </a:r>
-          </a:p>
-          <a:p>
-            <a:pPr lvl="1"/>
-            <a:r>
-              <a:rPr lang="en-US"/>
-              <a:t>Second level</a:t>
-            </a:r>
-          </a:p>
-          <a:p>
-            <a:pPr lvl="2"/>
-            <a:r>
-              <a:rPr lang="en-US"/>
-              <a:t>Third level</a:t>
-            </a:r>
-          </a:p>
-          <a:p>
-            <a:pPr lvl="3"/>
-            <a:r>
-              <a:rPr lang="en-US"/>
-              <a:t>Fourth level</a:t>
-            </a:r>
-          </a:p>
-          <a:p>
-            <a:pPr lvl="4"/>
-            <a:r>
-              <a:rPr lang="en-US"/>
-              <a:t>Fifth level</a:t>
-            </a:r>
-          </a:p>
-        </p:txBody>
-      </p:sp>
-      <p:sp>
-        <p:nvSpPr>
-          <p:cNvPr id="6" name="Footer Placeholder 5"/>
-          <p:cNvSpPr>
-            <a:spLocks noGrp="1"/>
-          </p:cNvSpPr>
-          <p:nvPr>
-            <p:ph type="ftr" sz="quarter" idx="4"/>
-          </p:nvPr>
-        </p:nvSpPr>
-        <p:spPr>
-          <a:xfrm>
-            <a:off x="0" y="8685213"/>
-            <a:ext cx="2971800" cy="458787"/>
-          </a:xfrm>
-          <a:prstGeom prst="rect">
-            <a:avLst/>
-          </a:prstGeom>
-        </p:spPr>
-        <p:txBody>
-          <a:bodyPr vert="horz" lIns="91440" tIns="45720" rIns="91440" bIns="45720" rtlCol="0" anchor="b"/>
-          <a:lstStyle>
-            <a:lvl1pPr algn="l">
-              <a:defRPr sz="1200"/>
-            </a:lvl1pPr>
-          </a:lstStyle>
-          <a:p>
-            <a:endParaRPr lang="en-US"/>
-          </a:p>
-        </p:txBody>
-      </p:sp>
-      <p:sp>
-        <p:nvSpPr>
-          <p:cNvPr id="7" name="Slide Number Placeholder 6"/>
-          <p:cNvSpPr>
-            <a:spLocks noGrp="1"/>
-          </p:cNvSpPr>
-          <p:nvPr>
-            <p:ph type="sldNum" sz="quarter" idx="5"/>
-          </p:nvPr>
-        </p:nvSpPr>
-        <p:spPr>
-          <a:xfrm>
-            <a:off x="3884613" y="8685213"/>
-            <a:ext cx="2971800" cy="458787"/>
-          </a:xfrm>
-          <a:prstGeom prst="rect">
-            <a:avLst/>
-          </a:prstGeom>
-        </p:spPr>
-        <p:txBody>
-          <a:bodyPr vert="horz" lIns="91440" tIns="45720" rIns="91440" bIns="45720" rtlCol="0" anchor="b"/>
-          <a:lstStyle>
-            <a:lvl1pPr algn="r">
-              <a:defRPr sz="1200"/>
-            </a:lvl1pPr>
-          </a:lstStyle>
-          <a:p>
-            <a:fld id="{CE5E9CC1-C706-0F49-92D6-E571CC5EEA8F}" type="slidenum">
-              <a:rPr lang="en-US"/>
-              <a:t>‹#›</a:t>
-            </a:fld>
-            <a:endParaRPr lang="en-US"/>
-          </a:p>
-        </p:txBody>
-      </p:sp>
     </p:spTree>
     <p:extLst>
       <p:ext uri="{BB962C8B-B14F-4D97-AF65-F5344CB8AC3E}">
-        <p14:creationId xmlns:p14="http://schemas.microsoft.com/office/powerpoint/2010/main" val="1024086991"/>
+        <p14:creationId xmlns:p14="http://schemas.microsoft.com/office/powerpoint/2010/main" val="2736271887"/>
       </p:ext>
     </p:extLst>
   </p:cSld>
   <p:clrMap bg1="lt1" tx1="dk1" bg2="lt2" tx2="dk2" accent1="accent1" accent2="accent2" accent3="accent3" accent4="accent4" accent5="accent5" accent6="accent6" hlink="hlink" folHlink="folHlink"/>
   <p:notesStyle>
     <a:lvl1pPr marL="0" algn="l" defTabSz="914400" rtl="0" eaLnBrk="1" latinLnBrk="0" hangingPunct="1">
-      <a:defRPr sz="1200" kern="1200">
+      <a:defRPr kumimoji="1" sz="1200" kern="1200">
         <a:solidFill>
           <a:schemeClr val="tx1"/>
         </a:solidFill>
@@ -386,7 +166,7 @@
       </a:defRPr>
     </a:lvl1pPr>
     <a:lvl2pPr marL="457200" algn="l" defTabSz="914400" rtl="0" eaLnBrk="1" latinLnBrk="0" hangingPunct="1">
-      <a:defRPr sz="1200" kern="1200">
+      <a:defRPr kumimoji="1" sz="1200" kern="1200">
         <a:solidFill>
           <a:schemeClr val="tx1"/>
         </a:solidFill>
@@ -396,7 +176,7 @@
       </a:defRPr>
     </a:lvl2pPr>
     <a:lvl3pPr marL="914400" algn="l" defTabSz="914400" rtl="0" eaLnBrk="1" latinLnBrk="0" hangingPunct="1">
-      <a:defRPr sz="1200" kern="1200">
+      <a:defRPr kumimoji="1" sz="1200" kern="1200">
         <a:solidFill>
           <a:schemeClr val="tx1"/>
         </a:solidFill>
@@ -406,7 +186,7 @@
       </a:defRPr>
     </a:lvl3pPr>
     <a:lvl4pPr marL="1371600" algn="l" defTabSz="914400" rtl="0" eaLnBrk="1" latinLnBrk="0" hangingPunct="1">
-      <a:defRPr sz="1200" kern="1200">
+      <a:defRPr kumimoji="1" sz="1200" kern="1200">
         <a:solidFill>
           <a:schemeClr val="tx1"/>
         </a:solidFill>
@@ -416,7 +196,7 @@
       </a:defRPr>
     </a:lvl4pPr>
     <a:lvl5pPr marL="1828800" algn="l" defTabSz="914400" rtl="0" eaLnBrk="1" latinLnBrk="0" hangingPunct="1">
-      <a:defRPr sz="1200" kern="1200">
+      <a:defRPr kumimoji="1" sz="1200" kern="1200">
         <a:solidFill>
           <a:schemeClr val="tx1"/>
         </a:solidFill>
@@ -426,7 +206,7 @@
       </a:defRPr>
     </a:lvl5pPr>
     <a:lvl6pPr marL="2286000" algn="l" defTabSz="914400" rtl="0" eaLnBrk="1" latinLnBrk="0" hangingPunct="1">
-      <a:defRPr sz="1200" kern="1200">
+      <a:defRPr kumimoji="1" sz="1200" kern="1200">
         <a:solidFill>
           <a:schemeClr val="tx1"/>
         </a:solidFill>
@@ -436,7 +216,7 @@
       </a:defRPr>
     </a:lvl6pPr>
     <a:lvl7pPr marL="2743200" algn="l" defTabSz="914400" rtl="0" eaLnBrk="1" latinLnBrk="0" hangingPunct="1">
-      <a:defRPr sz="1200" kern="1200">
+      <a:defRPr kumimoji="1" sz="1200" kern="1200">
         <a:solidFill>
           <a:schemeClr val="tx1"/>
         </a:solidFill>
@@ -446,7 +226,7 @@
       </a:defRPr>
     </a:lvl7pPr>
     <a:lvl8pPr marL="3200400" algn="l" defTabSz="914400" rtl="0" eaLnBrk="1" latinLnBrk="0" hangingPunct="1">
-      <a:defRPr sz="1200" kern="1200">
+      <a:defRPr kumimoji="1" sz="1200" kern="1200">
         <a:solidFill>
           <a:schemeClr val="tx1"/>
         </a:solidFill>
@@ -456,7 +236,7 @@
       </a:defRPr>
     </a:lvl8pPr>
     <a:lvl9pPr marL="3657600" algn="l" defTabSz="914400" rtl="0" eaLnBrk="1" latinLnBrk="0" hangingPunct="1">
-      <a:defRPr sz="1200" kern="1200">
+      <a:defRPr kumimoji="1" sz="1200" kern="1200">
         <a:solidFill>
           <a:schemeClr val="tx1"/>
         </a:solidFill>
@@ -513,10 +293,6 @@
           <a:bodyPr/>
           <a:lstStyle/>
           <a:p>
-            <a:r>
-              <a:rPr lang="en-US" dirty="0"/>
-              <a:t/>
-            </a:r>
             <a:endParaRPr lang="en-US" dirty="0"/>
           </a:p>
         </p:txBody>
@@ -601,10 +377,6 @@
           <a:bodyPr/>
           <a:lstStyle/>
           <a:p>
-            <a:r>
-              <a:rPr lang="en-US" dirty="0"/>
-              <a:t/>
-            </a:r>
             <a:endParaRPr lang="en-US" dirty="0"/>
           </a:p>
         </p:txBody>
@@ -689,10 +461,6 @@
           <a:bodyPr/>
           <a:lstStyle/>
           <a:p>
-            <a:r>
-              <a:rPr lang="en-US" dirty="0"/>
-              <a:t/>
-            </a:r>
             <a:endParaRPr lang="en-US" dirty="0"/>
           </a:p>
         </p:txBody>
@@ -777,10 +545,6 @@
           <a:bodyPr/>
           <a:lstStyle/>
           <a:p>
-            <a:r>
-              <a:rPr lang="en-US" dirty="0"/>
-              <a:t/>
-            </a:r>
             <a:endParaRPr lang="en-US" dirty="0"/>
           </a:p>
         </p:txBody>
@@ -865,10 +629,6 @@
           <a:bodyPr/>
           <a:lstStyle/>
           <a:p>
-            <a:r>
-              <a:rPr lang="en-US" dirty="0"/>
-              <a:t/>
-            </a:r>
             <a:endParaRPr lang="en-US" dirty="0"/>
           </a:p>
         </p:txBody>
@@ -891,94 +651,6 @@
             <a:fld id="{F7021451-1387-4CA6-816F-3879F97B5CBC}" type="slidenum">
               <a:rPr lang="en-US"/>
               <a:t>13</a:t>
-            </a:fld>
-            <a:endParaRPr lang="en-US"/>
-          </a:p>
-        </p:txBody>
-      </p:sp>
-    </p:spTree>
-    <p:extLst>
-      <p:ext uri="{BB962C8B-B14F-4D97-AF65-F5344CB8AC3E}">
-        <p14:creationId xmlns:p14="http://schemas.microsoft.com/office/powerpoint/2010/main" val="1024086991"/>
-      </p:ext>
-    </p:extLst>
-  </p:cSld>
-  <p:clrMapOvr>
-    <a:masterClrMapping/>
-  </p:clrMapOvr>
-</p:notes>
-</file>
-
-<file path=ppt/notesSlides/notesSlide14.xml><?xml version="1.0" encoding="utf-8"?>
-<p:notes xmlns:a="http://schemas.openxmlformats.org/drawingml/2006/main" xmlns:r="http://schemas.openxmlformats.org/officeDocument/2006/relationships" xmlns:p="http://schemas.openxmlformats.org/presentationml/2006/main">
-  <p:cSld>
-    <p:spTree>
-      <p:nvGrpSpPr>
-        <p:cNvPr id="1" name=""/>
-        <p:cNvGrpSpPr/>
-        <p:nvPr/>
-      </p:nvGrpSpPr>
-      <p:grpSpPr>
-        <a:xfrm>
-          <a:off x="0" y="0"/>
-          <a:ext cx="0" cy="0"/>
-          <a:chOff x="0" y="0"/>
-          <a:chExt cx="0" cy="0"/>
-        </a:xfrm>
-      </p:grpSpPr>
-      <p:sp>
-        <p:nvSpPr>
-          <p:cNvPr id="2" name="Slide Image Placeholder 1"/>
-          <p:cNvSpPr>
-            <a:spLocks noGrp="1" noRot="1" noChangeAspect="1"/>
-          </p:cNvSpPr>
-          <p:nvPr>
-            <p:ph type="sldImg"/>
-          </p:nvPr>
-        </p:nvSpPr>
-        <p:spPr/>
-      </p:sp>
-      <p:sp>
-        <p:nvSpPr>
-          <p:cNvPr id="3" name="Notes Placeholder 2"/>
-          <p:cNvSpPr>
-            <a:spLocks noGrp="1"/>
-          </p:cNvSpPr>
-          <p:nvPr>
-            <p:ph type="body" idx="1"/>
-          </p:nvPr>
-        </p:nvSpPr>
-        <p:spPr/>
-        <p:txBody>
-          <a:bodyPr/>
-          <a:lstStyle/>
-          <a:p>
-            <a:r>
-              <a:rPr lang="en-US" dirty="0"/>
-              <a:t/>
-            </a:r>
-            <a:endParaRPr lang="en-US" dirty="0"/>
-          </a:p>
-        </p:txBody>
-      </p:sp>
-      <p:sp>
-        <p:nvSpPr>
-          <p:cNvPr id="4" name="Slide Number Placeholder 3"/>
-          <p:cNvSpPr>
-            <a:spLocks noGrp="1"/>
-          </p:cNvSpPr>
-          <p:nvPr>
-            <p:ph type="sldNum" sz="quarter" idx="10"/>
-          </p:nvPr>
-        </p:nvSpPr>
-        <p:spPr/>
-        <p:txBody>
-          <a:bodyPr/>
-          <a:lstStyle/>
-          <a:p>
-            <a:fld id="{F7021451-1387-4CA6-816F-3879F97B5CBC}" type="slidenum">
-              <a:rPr lang="en-US"/>
-              <a:t>14</a:t>
             </a:fld>
             <a:endParaRPr lang="en-US"/>
           </a:p>
@@ -1041,10 +713,6 @@
           <a:bodyPr/>
           <a:lstStyle/>
           <a:p>
-            <a:r>
-              <a:rPr lang="en-US" dirty="0"/>
-              <a:t/>
-            </a:r>
             <a:endParaRPr lang="en-US" dirty="0"/>
           </a:p>
         </p:txBody>
@@ -1129,10 +797,6 @@
           <a:bodyPr/>
           <a:lstStyle/>
           <a:p>
-            <a:r>
-              <a:rPr lang="en-US" dirty="0"/>
-              <a:t/>
-            </a:r>
             <a:endParaRPr lang="en-US" dirty="0"/>
           </a:p>
         </p:txBody>
@@ -1217,10 +881,6 @@
           <a:bodyPr/>
           <a:lstStyle/>
           <a:p>
-            <a:r>
-              <a:rPr lang="en-US" dirty="0"/>
-              <a:t/>
-            </a:r>
             <a:endParaRPr lang="en-US" dirty="0"/>
           </a:p>
         </p:txBody>
@@ -1305,10 +965,6 @@
           <a:bodyPr/>
           <a:lstStyle/>
           <a:p>
-            <a:r>
-              <a:rPr lang="en-US" dirty="0"/>
-              <a:t/>
-            </a:r>
             <a:endParaRPr lang="en-US" dirty="0"/>
           </a:p>
         </p:txBody>
@@ -1393,10 +1049,6 @@
           <a:bodyPr/>
           <a:lstStyle/>
           <a:p>
-            <a:r>
-              <a:rPr lang="en-US" dirty="0"/>
-              <a:t/>
-            </a:r>
             <a:endParaRPr lang="en-US" dirty="0"/>
           </a:p>
         </p:txBody>
@@ -1481,10 +1133,6 @@
           <a:bodyPr/>
           <a:lstStyle/>
           <a:p>
-            <a:r>
-              <a:rPr lang="en-US" dirty="0"/>
-              <a:t/>
-            </a:r>
             <a:endParaRPr lang="en-US" dirty="0"/>
           </a:p>
         </p:txBody>
@@ -1569,10 +1217,6 @@
           <a:bodyPr/>
           <a:lstStyle/>
           <a:p>
-            <a:r>
-              <a:rPr lang="en-US" dirty="0"/>
-              <a:t/>
-            </a:r>
             <a:endParaRPr lang="en-US" dirty="0"/>
           </a:p>
         </p:txBody>
@@ -1657,10 +1301,6 @@
           <a:bodyPr/>
           <a:lstStyle/>
           <a:p>
-            <a:r>
-              <a:rPr lang="en-US" dirty="0"/>
-              <a:t/>
-            </a:r>
             <a:endParaRPr lang="en-US" dirty="0"/>
           </a:p>
         </p:txBody>
@@ -1734,6 +1374,11 @@
 <file path=ppt/slideMasters/slideMaster1.xml><?xml version="1.0" encoding="utf-8"?>
 <p:sldMaster xmlns:a="http://schemas.openxmlformats.org/drawingml/2006/main" xmlns:r="http://schemas.openxmlformats.org/officeDocument/2006/relationships" xmlns:p="http://schemas.openxmlformats.org/presentationml/2006/main">
   <p:cSld>
+    <p:bg>
+      <p:bgRef idx="1001">
+        <a:schemeClr val="bg1"/>
+      </p:bgRef>
+    </p:bg>
     <p:spTree>
       <p:nvGrpSpPr>
         <p:cNvPr id="1" name=""/>
@@ -2016,6 +1661,7 @@
         <a:solidFill>
           <a:srgbClr val="1B2A4A"/>
         </a:solidFill>
+        <a:effectLst/>
       </p:bgPr>
     </p:bg>
     <p:spTree>
@@ -2053,6 +1699,13 @@
           </a:solidFill>
           <a:ln/>
         </p:spPr>
+        <p:txBody>
+          <a:bodyPr/>
+          <a:lstStyle/>
+          <a:p>
+            <a:endParaRPr lang="ja-JP" altLang="en-US"/>
+          </a:p>
+        </p:txBody>
       </p:sp>
       <p:sp>
         <p:nvSpPr>
@@ -2075,11 +1728,11 @@
           <a:bodyPr wrap="square" rtlCol="0" anchor="ctr"/>
           <a:lstStyle/>
           <a:p>
-            <a:pPr algn="ctr" indent="0" marL="0">
+            <a:pPr marL="0" indent="0" algn="ctr">
               <a:buNone/>
             </a:pPr>
             <a:r>
-              <a:rPr lang="en-US" sz="5200" b="1" spc="800" kern="0" dirty="0">
+              <a:rPr lang="en-US" sz="5200" b="1" kern="0" spc="800" dirty="0">
                 <a:solidFill>
                   <a:srgbClr val="FFFFFF"/>
                 </a:solidFill>
@@ -2095,29 +1748,6 @@
       </p:sp>
       <p:sp>
         <p:nvSpPr>
-          <p:cNvPr id="4" name="Shape 2"/>
-          <p:cNvSpPr/>
-          <p:nvPr/>
-        </p:nvSpPr>
-        <p:spPr>
-          <a:xfrm>
-            <a:off x="3200400" y="2194560"/>
-            <a:ext cx="2743200" cy="0"/>
-          </a:xfrm>
-          <a:prstGeom prst="line">
-            <a:avLst/>
-          </a:prstGeom>
-          <a:noFill/>
-          <a:ln w="38100">
-            <a:solidFill>
-              <a:srgbClr val="2563EB"/>
-            </a:solidFill>
-            <a:prstDash val="solid"/>
-          </a:ln>
-        </p:spPr>
-      </p:sp>
-      <p:sp>
-        <p:nvSpPr>
           <p:cNvPr id="5" name="Text 3"/>
           <p:cNvSpPr/>
           <p:nvPr/>
@@ -2137,7 +1767,7 @@
           <a:bodyPr wrap="square" rtlCol="0" anchor="ctr"/>
           <a:lstStyle/>
           <a:p>
-            <a:pPr algn="ctr" indent="0" marL="0">
+            <a:pPr marL="0" indent="0" algn="ctr">
               <a:buNone/>
             </a:pPr>
             <a:r>
@@ -2176,7 +1806,7 @@
           <a:bodyPr wrap="square" rtlCol="0" anchor="ctr"/>
           <a:lstStyle/>
           <a:p>
-            <a:pPr algn="ctr" indent="0" marL="0">
+            <a:pPr marL="0" indent="0" algn="ctr">
               <a:buNone/>
             </a:pPr>
             <a:r>
@@ -2215,7 +1845,7 @@
           <a:bodyPr wrap="square" rtlCol="0" anchor="ctr"/>
           <a:lstStyle/>
           <a:p>
-            <a:pPr algn="ctr" indent="0" marL="0">
+            <a:pPr marL="0" indent="0" algn="ctr">
               <a:buNone/>
             </a:pPr>
             <a:r>
@@ -2249,6 +1879,7 @@
         <a:solidFill>
           <a:srgbClr val="FFFFFF"/>
         </a:solidFill>
+        <a:effectLst/>
       </p:bgPr>
     </p:bg>
     <p:spTree>
@@ -2284,6 +1915,13 @@
           </a:solidFill>
           <a:ln/>
         </p:spPr>
+        <p:txBody>
+          <a:bodyPr/>
+          <a:lstStyle/>
+          <a:p>
+            <a:endParaRPr lang="ja-JP" altLang="en-US"/>
+          </a:p>
+        </p:txBody>
       </p:sp>
       <p:sp>
         <p:nvSpPr>
@@ -2306,11 +1944,11 @@
           <a:bodyPr wrap="square" rtlCol="0" anchor="ctr"/>
           <a:lstStyle/>
           <a:p>
-            <a:pPr algn="ctr" indent="0" marL="0">
+            <a:pPr marL="0" indent="0" algn="ctr">
               <a:buNone/>
             </a:pPr>
             <a:r>
-              <a:rPr lang="en-US" sz="1800" b="1" spc="600" kern="0" dirty="0">
+              <a:rPr lang="en-US" sz="1800" b="1" kern="0" spc="600" dirty="0">
                 <a:solidFill>
                   <a:srgbClr val="FFFFFF"/>
                 </a:solidFill>
@@ -2345,7 +1983,7 @@
           <a:bodyPr wrap="square" rtlCol="0" anchor="ctr"/>
           <a:lstStyle/>
           <a:p>
-            <a:pPr algn="ctr" indent="0" marL="0">
+            <a:pPr marL="0" indent="0" algn="ctr">
               <a:buNone/>
             </a:pPr>
             <a:r>
@@ -2385,6 +2023,13 @@
             <a:prstDash val="solid"/>
           </a:ln>
         </p:spPr>
+        <p:txBody>
+          <a:bodyPr/>
+          <a:lstStyle/>
+          <a:p>
+            <a:endParaRPr lang="ja-JP" altLang="en-US"/>
+          </a:p>
+        </p:txBody>
       </p:sp>
       <p:sp>
         <p:nvSpPr>
@@ -2405,6 +2050,13 @@
           </a:solidFill>
           <a:ln/>
         </p:spPr>
+        <p:txBody>
+          <a:bodyPr/>
+          <a:lstStyle/>
+          <a:p>
+            <a:endParaRPr lang="ja-JP" altLang="en-US"/>
+          </a:p>
+        </p:txBody>
       </p:sp>
       <p:sp>
         <p:nvSpPr>
@@ -2427,11 +2079,11 @@
           <a:bodyPr wrap="square" rtlCol="0" anchor="ctr"/>
           <a:lstStyle/>
           <a:p>
-            <a:pPr algn="ctr" indent="0" marL="0">
+            <a:pPr marL="0" indent="0" algn="ctr">
               <a:buNone/>
             </a:pPr>
             <a:r>
-              <a:rPr lang="en-US" sz="900" spc="200" kern="0" dirty="0">
+              <a:rPr lang="en-US" sz="900" kern="0" spc="200" dirty="0">
                 <a:solidFill>
                   <a:srgbClr val="475569"/>
                 </a:solidFill>
@@ -2466,7 +2118,7 @@
           <a:bodyPr wrap="square" lIns="0" tIns="0" rIns="0" bIns="0" rtlCol="0" anchor="ctr"/>
           <a:lstStyle/>
           <a:p>
-            <a:pPr indent="0" marL="0">
+            <a:pPr marL="0" indent="0">
               <a:buNone/>
             </a:pPr>
             <a:r>
@@ -2503,6 +2155,13 @@
           </a:solidFill>
           <a:ln/>
         </p:spPr>
+        <p:txBody>
+          <a:bodyPr/>
+          <a:lstStyle/>
+          <a:p>
+            <a:endParaRPr lang="ja-JP" altLang="en-US"/>
+          </a:p>
+        </p:txBody>
       </p:sp>
       <p:sp>
         <p:nvSpPr>
@@ -2525,7 +2184,7 @@
           <a:bodyPr wrap="square" lIns="0" tIns="0" rIns="0" bIns="0" rtlCol="0" anchor="ctr"/>
           <a:lstStyle/>
           <a:p>
-            <a:pPr indent="0" marL="0">
+            <a:pPr marL="0" indent="0">
               <a:buNone/>
             </a:pPr>
             <a:r>
@@ -2559,6 +2218,7 @@
         <a:solidFill>
           <a:srgbClr val="FFFFFF"/>
         </a:solidFill>
+        <a:effectLst/>
       </p:bgPr>
     </p:bg>
     <p:spTree>
@@ -2594,6 +2254,13 @@
           </a:solidFill>
           <a:ln/>
         </p:spPr>
+        <p:txBody>
+          <a:bodyPr/>
+          <a:lstStyle/>
+          <a:p>
+            <a:endParaRPr lang="ja-JP" altLang="en-US"/>
+          </a:p>
+        </p:txBody>
       </p:sp>
       <p:sp>
         <p:nvSpPr>
@@ -2616,7 +2283,7 @@
           <a:bodyPr wrap="square" lIns="0" tIns="0" rIns="0" bIns="0" rtlCol="0" anchor="ctr"/>
           <a:lstStyle/>
           <a:p>
-            <a:pPr indent="0" marL="0">
+            <a:pPr marL="0" indent="0">
               <a:buNone/>
             </a:pPr>
             <a:r>
@@ -2653,6 +2320,13 @@
           </a:solidFill>
           <a:ln/>
         </p:spPr>
+        <p:txBody>
+          <a:bodyPr/>
+          <a:lstStyle/>
+          <a:p>
+            <a:endParaRPr lang="ja-JP" altLang="en-US"/>
+          </a:p>
+        </p:txBody>
       </p:sp>
       <p:sp>
         <p:nvSpPr>
@@ -2675,7 +2349,7 @@
           <a:bodyPr wrap="square" rtlCol="0" anchor="ctr"/>
           <a:lstStyle/>
           <a:p>
-            <a:pPr algn="ctr" indent="0" marL="0">
+            <a:pPr marL="0" indent="0" algn="ctr">
               <a:buNone/>
             </a:pPr>
             <a:r>
@@ -2712,17 +2386,24 @@
           </a:solidFill>
           <a:ln/>
         </p:spPr>
+        <p:txBody>
+          <a:bodyPr/>
+          <a:lstStyle/>
+          <a:p>
+            <a:endParaRPr lang="ja-JP" altLang="en-US"/>
+          </a:p>
+        </p:txBody>
       </p:sp>
       <p:pic>
         <p:nvPicPr>
-          <p:cNvPr id="7" name="Image 0" descr="preencoded.png">    </p:cNvPr>
+          <p:cNvPr id="7" name="Image 0" descr="preencoded.png"/>
           <p:cNvPicPr>
             <a:picLocks noChangeAspect="1"/>
           </p:cNvPicPr>
           <p:nvPr/>
         </p:nvPicPr>
         <p:blipFill>
-          <a:blip r:embed="rId1"/>
+          <a:blip r:embed="rId3"/>
           <a:stretch>
             <a:fillRect/>
           </a:stretch>
@@ -2756,13 +2437,20 @@
           </a:solidFill>
           <a:ln/>
           <a:effectLst>
-            <a:outerShdw sx="100000" sy="100000" kx="0" ky="0" algn="bl" rotWithShape="0" blurRad="50800" dist="12700" dir="8100000">
+            <a:outerShdw blurRad="50800" dist="12700" dir="8100000" algn="bl" rotWithShape="0">
               <a:srgbClr val="000000">
                 <a:alpha val="8000"/>
               </a:srgbClr>
             </a:outerShdw>
           </a:effectLst>
         </p:spPr>
+        <p:txBody>
+          <a:bodyPr/>
+          <a:lstStyle/>
+          <a:p>
+            <a:endParaRPr lang="ja-JP" altLang="en-US"/>
+          </a:p>
+        </p:txBody>
       </p:sp>
       <p:sp>
         <p:nvSpPr>
@@ -2783,6 +2471,13 @@
           </a:solidFill>
           <a:ln/>
         </p:spPr>
+        <p:txBody>
+          <a:bodyPr/>
+          <a:lstStyle/>
+          <a:p>
+            <a:endParaRPr lang="ja-JP" altLang="en-US"/>
+          </a:p>
+        </p:txBody>
       </p:sp>
       <p:sp>
         <p:nvSpPr>
@@ -2898,7 +2593,7 @@
         </p:nvSpPr>
         <p:spPr>
           <a:xfrm>
-            <a:off x="1005840" y="3246120"/>
+            <a:off x="1005840" y="4005072"/>
             <a:ext cx="5486400" cy="457200"/>
           </a:xfrm>
           <a:prstGeom prst="rect">
@@ -2911,7 +2606,7 @@
           <a:bodyPr wrap="square" lIns="0" tIns="0" rIns="0" bIns="0" rtlCol="0" anchor="ctr"/>
           <a:lstStyle/>
           <a:p>
-            <a:pPr indent="0" marL="0">
+            <a:pPr marL="0" indent="0">
               <a:buNone/>
             </a:pPr>
             <a:r>
@@ -2931,26 +2626,6 @@
       </p:sp>
       <p:sp>
         <p:nvSpPr>
-          <p:cNvPr id="12" name="Shape 9"/>
-          <p:cNvSpPr/>
-          <p:nvPr/>
-        </p:nvSpPr>
-        <p:spPr>
-          <a:xfrm>
-            <a:off x="457200" y="3977640"/>
-            <a:ext cx="8229600" cy="347472"/>
-          </a:xfrm>
-          <a:prstGeom prst="rect">
-            <a:avLst/>
-          </a:prstGeom>
-          <a:solidFill>
-            <a:srgbClr val="F1F5F9"/>
-          </a:solidFill>
-          <a:ln/>
-        </p:spPr>
-      </p:sp>
-      <p:sp>
-        <p:nvSpPr>
           <p:cNvPr id="13" name="Text 10"/>
           <p:cNvSpPr/>
           <p:nvPr/>
@@ -2970,7 +2645,7 @@
           <a:bodyPr wrap="square" rtlCol="0" anchor="ctr"/>
           <a:lstStyle/>
           <a:p>
-            <a:pPr indent="0" marL="0">
+            <a:pPr marL="0" indent="0">
               <a:buNone/>
             </a:pPr>
             <a:endParaRPr lang="en-US" sz="1000" dirty="0"/>
@@ -2998,7 +2673,7 @@
           <a:bodyPr wrap="square" rtlCol="0" anchor="ctr"/>
           <a:lstStyle/>
           <a:p>
-            <a:pPr algn="r" indent="0" marL="0">
+            <a:pPr marL="0" indent="0" algn="r">
               <a:buNone/>
             </a:pPr>
             <a:r>
@@ -3032,6 +2707,7 @@
         <a:solidFill>
           <a:srgbClr val="FFFFFF"/>
         </a:solidFill>
+        <a:effectLst/>
       </p:bgPr>
     </p:bg>
     <p:spTree>
@@ -3067,6 +2743,13 @@
           </a:solidFill>
           <a:ln/>
         </p:spPr>
+        <p:txBody>
+          <a:bodyPr/>
+          <a:lstStyle/>
+          <a:p>
+            <a:endParaRPr lang="ja-JP" altLang="en-US"/>
+          </a:p>
+        </p:txBody>
       </p:sp>
       <p:sp>
         <p:nvSpPr>
@@ -3089,7 +2772,7 @@
           <a:bodyPr wrap="square" lIns="0" tIns="0" rIns="0" bIns="0" rtlCol="0" anchor="ctr"/>
           <a:lstStyle/>
           <a:p>
-            <a:pPr indent="0" marL="0">
+            <a:pPr marL="0" indent="0">
               <a:buNone/>
             </a:pPr>
             <a:r>
@@ -3126,6 +2809,13 @@
           </a:solidFill>
           <a:ln/>
         </p:spPr>
+        <p:txBody>
+          <a:bodyPr/>
+          <a:lstStyle/>
+          <a:p>
+            <a:endParaRPr lang="ja-JP" altLang="en-US"/>
+          </a:p>
+        </p:txBody>
       </p:sp>
       <p:sp>
         <p:nvSpPr>
@@ -3148,7 +2838,7 @@
           <a:bodyPr wrap="square" rtlCol="0" anchor="ctr"/>
           <a:lstStyle/>
           <a:p>
-            <a:pPr algn="ctr" indent="0" marL="0">
+            <a:pPr marL="0" indent="0" algn="ctr">
               <a:buNone/>
             </a:pPr>
             <a:r>
@@ -3185,17 +2875,24 @@
           </a:solidFill>
           <a:ln/>
         </p:spPr>
+        <p:txBody>
+          <a:bodyPr/>
+          <a:lstStyle/>
+          <a:p>
+            <a:endParaRPr lang="ja-JP" altLang="en-US"/>
+          </a:p>
+        </p:txBody>
       </p:sp>
       <p:pic>
         <p:nvPicPr>
-          <p:cNvPr id="7" name="Image 0" descr="preencoded.png">    </p:cNvPr>
+          <p:cNvPr id="7" name="Image 0" descr="preencoded.png"/>
           <p:cNvPicPr>
             <a:picLocks noChangeAspect="1"/>
           </p:cNvPicPr>
           <p:nvPr/>
         </p:nvPicPr>
         <p:blipFill>
-          <a:blip r:embed="rId1"/>
+          <a:blip r:embed="rId3"/>
           <a:stretch>
             <a:fillRect/>
           </a:stretch>
@@ -3229,13 +2926,20 @@
           </a:solidFill>
           <a:ln/>
           <a:effectLst>
-            <a:outerShdw sx="100000" sy="100000" kx="0" ky="0" algn="bl" rotWithShape="0" blurRad="50800" dist="12700" dir="8100000">
+            <a:outerShdw blurRad="50800" dist="12700" dir="8100000" algn="bl" rotWithShape="0">
               <a:srgbClr val="000000">
                 <a:alpha val="8000"/>
               </a:srgbClr>
             </a:outerShdw>
           </a:effectLst>
         </p:spPr>
+        <p:txBody>
+          <a:bodyPr/>
+          <a:lstStyle/>
+          <a:p>
+            <a:endParaRPr lang="ja-JP" altLang="en-US"/>
+          </a:p>
+        </p:txBody>
       </p:sp>
       <p:sp>
         <p:nvSpPr>
@@ -3256,6 +2960,13 @@
           </a:solidFill>
           <a:ln/>
         </p:spPr>
+        <p:txBody>
+          <a:bodyPr/>
+          <a:lstStyle/>
+          <a:p>
+            <a:endParaRPr lang="ja-JP" altLang="en-US"/>
+          </a:p>
+        </p:txBody>
       </p:sp>
       <p:sp>
         <p:nvSpPr>
@@ -3371,7 +3082,7 @@
         </p:nvSpPr>
         <p:spPr>
           <a:xfrm>
-            <a:off x="1005840" y="3246120"/>
+            <a:off x="1005840" y="4023360"/>
             <a:ext cx="5486400" cy="457200"/>
           </a:xfrm>
           <a:prstGeom prst="rect">
@@ -3384,7 +3095,7 @@
           <a:bodyPr wrap="square" lIns="0" tIns="0" rIns="0" bIns="0" rtlCol="0" anchor="ctr"/>
           <a:lstStyle/>
           <a:p>
-            <a:pPr indent="0" marL="0">
+            <a:pPr marL="0" indent="0">
               <a:buNone/>
             </a:pPr>
             <a:r>
@@ -3404,54 +3115,6 @@
       </p:sp>
       <p:sp>
         <p:nvSpPr>
-          <p:cNvPr id="12" name="Shape 9"/>
-          <p:cNvSpPr/>
-          <p:nvPr/>
-        </p:nvSpPr>
-        <p:spPr>
-          <a:xfrm>
-            <a:off x="457200" y="3977640"/>
-            <a:ext cx="8229600" cy="347472"/>
-          </a:xfrm>
-          <a:prstGeom prst="rect">
-            <a:avLst/>
-          </a:prstGeom>
-          <a:solidFill>
-            <a:srgbClr val="F1F5F9"/>
-          </a:solidFill>
-          <a:ln/>
-        </p:spPr>
-      </p:sp>
-      <p:sp>
-        <p:nvSpPr>
-          <p:cNvPr id="13" name="Text 10"/>
-          <p:cNvSpPr/>
-          <p:nvPr/>
-        </p:nvSpPr>
-        <p:spPr>
-          <a:xfrm>
-            <a:off x="640080" y="3977640"/>
-            <a:ext cx="7863840" cy="347472"/>
-          </a:xfrm>
-          <a:prstGeom prst="rect">
-            <a:avLst/>
-          </a:prstGeom>
-          <a:noFill/>
-          <a:ln/>
-        </p:spPr>
-        <p:txBody>
-          <a:bodyPr wrap="square" rtlCol="0" anchor="ctr"/>
-          <a:lstStyle/>
-          <a:p>
-            <a:pPr indent="0" marL="0">
-              <a:buNone/>
-            </a:pPr>
-            <a:endParaRPr lang="en-US" sz="1000" dirty="0"/>
-          </a:p>
-        </p:txBody>
-      </p:sp>
-      <p:sp>
-        <p:nvSpPr>
           <p:cNvPr id="14" name="Text 11"/>
           <p:cNvSpPr/>
           <p:nvPr/>
@@ -3471,7 +3134,7 @@
           <a:bodyPr wrap="square" rtlCol="0" anchor="ctr"/>
           <a:lstStyle/>
           <a:p>
-            <a:pPr algn="r" indent="0" marL="0">
+            <a:pPr marL="0" indent="0" algn="r">
               <a:buNone/>
             </a:pPr>
             <a:r>
@@ -3505,6 +3168,7 @@
         <a:solidFill>
           <a:srgbClr val="FFFFFF"/>
         </a:solidFill>
+        <a:effectLst/>
       </p:bgPr>
     </p:bg>
     <p:spTree>
@@ -3540,6 +3204,13 @@
           </a:solidFill>
           <a:ln/>
         </p:spPr>
+        <p:txBody>
+          <a:bodyPr/>
+          <a:lstStyle/>
+          <a:p>
+            <a:endParaRPr lang="ja-JP" altLang="en-US"/>
+          </a:p>
+        </p:txBody>
       </p:sp>
       <p:sp>
         <p:nvSpPr>
@@ -3562,7 +3233,7 @@
           <a:bodyPr wrap="square" lIns="0" tIns="0" rIns="0" bIns="0" rtlCol="0" anchor="ctr"/>
           <a:lstStyle/>
           <a:p>
-            <a:pPr indent="0" marL="0">
+            <a:pPr marL="0" indent="0">
               <a:buNone/>
             </a:pPr>
             <a:r>
@@ -3599,13 +3270,20 @@
           </a:solidFill>
           <a:ln/>
           <a:effectLst>
-            <a:outerShdw sx="100000" sy="100000" kx="0" ky="0" algn="bl" rotWithShape="0" blurRad="50800" dist="12700" dir="8100000">
+            <a:outerShdw blurRad="50800" dist="12700" dir="8100000" algn="bl" rotWithShape="0">
               <a:srgbClr val="000000">
                 <a:alpha val="8000"/>
               </a:srgbClr>
             </a:outerShdw>
           </a:effectLst>
         </p:spPr>
+        <p:txBody>
+          <a:bodyPr/>
+          <a:lstStyle/>
+          <a:p>
+            <a:endParaRPr lang="ja-JP" altLang="en-US"/>
+          </a:p>
+        </p:txBody>
       </p:sp>
       <p:sp>
         <p:nvSpPr>
@@ -3626,6 +3304,13 @@
           </a:solidFill>
           <a:ln/>
         </p:spPr>
+        <p:txBody>
+          <a:bodyPr/>
+          <a:lstStyle/>
+          <a:p>
+            <a:endParaRPr lang="ja-JP" altLang="en-US"/>
+          </a:p>
+        </p:txBody>
       </p:sp>
       <p:sp>
         <p:nvSpPr>
@@ -3646,6 +3331,13 @@
           </a:solidFill>
           <a:ln/>
         </p:spPr>
+        <p:txBody>
+          <a:bodyPr/>
+          <a:lstStyle/>
+          <a:p>
+            <a:endParaRPr lang="ja-JP" altLang="en-US"/>
+          </a:p>
+        </p:txBody>
       </p:sp>
       <p:sp>
         <p:nvSpPr>
@@ -3668,7 +3360,7 @@
           <a:bodyPr wrap="square" rtlCol="0" anchor="ctr"/>
           <a:lstStyle/>
           <a:p>
-            <a:pPr algn="ctr" indent="0" marL="0">
+            <a:pPr marL="0" indent="0" algn="ctr">
               <a:buNone/>
             </a:pPr>
             <a:r>
@@ -3707,7 +3399,7 @@
           <a:bodyPr wrap="square" lIns="0" tIns="0" rIns="0" bIns="0" rtlCol="0" anchor="ctr"/>
           <a:lstStyle/>
           <a:p>
-            <a:pPr indent="0" marL="0">
+            <a:pPr marL="0" indent="0">
               <a:buNone/>
             </a:pPr>
             <a:r>
@@ -3733,7 +3425,7 @@
         </p:nvSpPr>
         <p:spPr>
           <a:xfrm>
-            <a:off x="3291840" y="1234440"/>
+            <a:off x="3566160" y="1234440"/>
             <a:ext cx="4846320" cy="777240"/>
           </a:xfrm>
           <a:prstGeom prst="rect">
@@ -3746,7 +3438,7 @@
           <a:bodyPr wrap="square" lIns="0" tIns="0" rIns="0" bIns="0" rtlCol="0" anchor="ctr"/>
           <a:lstStyle/>
           <a:p>
-            <a:pPr indent="0" marL="0">
+            <a:pPr marL="0" indent="0">
               <a:buNone/>
             </a:pPr>
             <a:r>
@@ -3783,13 +3475,20 @@
           </a:solidFill>
           <a:ln/>
           <a:effectLst>
-            <a:outerShdw sx="100000" sy="100000" kx="0" ky="0" algn="bl" rotWithShape="0" blurRad="50800" dist="12700" dir="8100000">
+            <a:outerShdw blurRad="50800" dist="12700" dir="8100000" algn="bl" rotWithShape="0">
               <a:srgbClr val="000000">
                 <a:alpha val="8000"/>
               </a:srgbClr>
             </a:outerShdw>
           </a:effectLst>
         </p:spPr>
+        <p:txBody>
+          <a:bodyPr/>
+          <a:lstStyle/>
+          <a:p>
+            <a:endParaRPr lang="ja-JP" altLang="en-US"/>
+          </a:p>
+        </p:txBody>
       </p:sp>
       <p:sp>
         <p:nvSpPr>
@@ -3810,6 +3509,13 @@
           </a:solidFill>
           <a:ln/>
         </p:spPr>
+        <p:txBody>
+          <a:bodyPr/>
+          <a:lstStyle/>
+          <a:p>
+            <a:endParaRPr lang="ja-JP" altLang="en-US"/>
+          </a:p>
+        </p:txBody>
       </p:sp>
       <p:sp>
         <p:nvSpPr>
@@ -3830,6 +3536,13 @@
           </a:solidFill>
           <a:ln/>
         </p:spPr>
+        <p:txBody>
+          <a:bodyPr/>
+          <a:lstStyle/>
+          <a:p>
+            <a:endParaRPr lang="ja-JP" altLang="en-US"/>
+          </a:p>
+        </p:txBody>
       </p:sp>
       <p:sp>
         <p:nvSpPr>
@@ -3852,7 +3565,7 @@
           <a:bodyPr wrap="square" rtlCol="0" anchor="ctr"/>
           <a:lstStyle/>
           <a:p>
-            <a:pPr algn="ctr" indent="0" marL="0">
+            <a:pPr marL="0" indent="0" algn="ctr">
               <a:buNone/>
             </a:pPr>
             <a:r>
@@ -3891,7 +3604,7 @@
           <a:bodyPr wrap="square" lIns="0" tIns="0" rIns="0" bIns="0" rtlCol="0" anchor="ctr"/>
           <a:lstStyle/>
           <a:p>
-            <a:pPr indent="0" marL="0">
+            <a:pPr marL="0" indent="0">
               <a:buNone/>
             </a:pPr>
             <a:r>
@@ -3917,7 +3630,7 @@
         </p:nvSpPr>
         <p:spPr>
           <a:xfrm>
-            <a:off x="3291840" y="2286000"/>
+            <a:off x="3566160" y="2286000"/>
             <a:ext cx="4846320" cy="777240"/>
           </a:xfrm>
           <a:prstGeom prst="rect">
@@ -3930,7 +3643,7 @@
           <a:bodyPr wrap="square" lIns="0" tIns="0" rIns="0" bIns="0" rtlCol="0" anchor="ctr"/>
           <a:lstStyle/>
           <a:p>
-            <a:pPr indent="0" marL="0">
+            <a:pPr marL="0" indent="0">
               <a:buNone/>
             </a:pPr>
             <a:r>
@@ -3967,13 +3680,20 @@
           </a:solidFill>
           <a:ln/>
           <a:effectLst>
-            <a:outerShdw sx="100000" sy="100000" kx="0" ky="0" algn="bl" rotWithShape="0" blurRad="50800" dist="12700" dir="8100000">
+            <a:outerShdw blurRad="50800" dist="12700" dir="8100000" algn="bl" rotWithShape="0">
               <a:srgbClr val="000000">
                 <a:alpha val="8000"/>
               </a:srgbClr>
             </a:outerShdw>
           </a:effectLst>
         </p:spPr>
+        <p:txBody>
+          <a:bodyPr/>
+          <a:lstStyle/>
+          <a:p>
+            <a:endParaRPr lang="ja-JP" altLang="en-US"/>
+          </a:p>
+        </p:txBody>
       </p:sp>
       <p:sp>
         <p:nvSpPr>
@@ -3994,6 +3714,13 @@
           </a:solidFill>
           <a:ln/>
         </p:spPr>
+        <p:txBody>
+          <a:bodyPr/>
+          <a:lstStyle/>
+          <a:p>
+            <a:endParaRPr lang="ja-JP" altLang="en-US"/>
+          </a:p>
+        </p:txBody>
       </p:sp>
       <p:sp>
         <p:nvSpPr>
@@ -4014,6 +3741,13 @@
           </a:solidFill>
           <a:ln/>
         </p:spPr>
+        <p:txBody>
+          <a:bodyPr/>
+          <a:lstStyle/>
+          <a:p>
+            <a:endParaRPr lang="ja-JP" altLang="en-US"/>
+          </a:p>
+        </p:txBody>
       </p:sp>
       <p:sp>
         <p:nvSpPr>
@@ -4036,7 +3770,7 @@
           <a:bodyPr wrap="square" rtlCol="0" anchor="ctr"/>
           <a:lstStyle/>
           <a:p>
-            <a:pPr algn="ctr" indent="0" marL="0">
+            <a:pPr marL="0" indent="0" algn="ctr">
               <a:buNone/>
             </a:pPr>
             <a:r>
@@ -4075,7 +3809,7 @@
           <a:bodyPr wrap="square" lIns="0" tIns="0" rIns="0" bIns="0" rtlCol="0" anchor="ctr"/>
           <a:lstStyle/>
           <a:p>
-            <a:pPr indent="0" marL="0">
+            <a:pPr marL="0" indent="0">
               <a:buNone/>
             </a:pPr>
             <a:r>
@@ -4101,7 +3835,7 @@
         </p:nvSpPr>
         <p:spPr>
           <a:xfrm>
-            <a:off x="3291840" y="3337560"/>
+            <a:off x="3566160" y="3337560"/>
             <a:ext cx="4846320" cy="777240"/>
           </a:xfrm>
           <a:prstGeom prst="rect">
@@ -4114,7 +3848,7 @@
           <a:bodyPr wrap="square" lIns="0" tIns="0" rIns="0" bIns="0" rtlCol="0" anchor="ctr"/>
           <a:lstStyle/>
           <a:p>
-            <a:pPr indent="0" marL="0">
+            <a:pPr marL="0" indent="0">
               <a:buNone/>
             </a:pPr>
             <a:r>
@@ -4153,7 +3887,7 @@
           <a:bodyPr wrap="square" rtlCol="0" anchor="ctr"/>
           <a:lstStyle/>
           <a:p>
-            <a:pPr algn="ctr" indent="0" marL="0">
+            <a:pPr marL="0" indent="0" algn="ctr">
               <a:buNone/>
             </a:pPr>
             <a:r>
@@ -4192,7 +3926,7 @@
           <a:bodyPr wrap="square" rtlCol="0" anchor="ctr"/>
           <a:lstStyle/>
           <a:p>
-            <a:pPr algn="r" indent="0" marL="0">
+            <a:pPr marL="0" indent="0" algn="r">
               <a:buNone/>
             </a:pPr>
             <a:r>
@@ -4218,14 +3952,15 @@
 </p:sld>
 </file>
 
-<file path=ppt/slides/slide14.xml><?xml version="1.0" encoding="utf-8"?>
+<file path=ppt/slides/slide2.xml><?xml version="1.0" encoding="utf-8"?>
 <p:sld xmlns:a="http://schemas.openxmlformats.org/drawingml/2006/main" xmlns:r="http://schemas.openxmlformats.org/officeDocument/2006/relationships" xmlns:p="http://schemas.openxmlformats.org/presentationml/2006/main">
-  <p:cSld name="Slide 14">
+  <p:cSld name="Slide 2">
     <p:bg>
       <p:bgPr>
         <a:solidFill>
-          <a:srgbClr val="1B2A4A"/>
+          <a:srgbClr val="FFFFFF"/>
         </a:solidFill>
+        <a:effectLst/>
       </p:bgPr>
     </p:bg>
     <p:spTree>
@@ -4244,14 +3979,141 @@
       </p:grpSpPr>
       <p:sp>
         <p:nvSpPr>
-          <p:cNvPr id="2" name="Text 0"/>
-          <p:cNvSpPr/>
-          <p:nvPr/>
-        </p:nvSpPr>
-        <p:spPr>
-          <a:xfrm>
-            <a:off x="1371600" y="1371600"/>
-            <a:ext cx="6400800" cy="914400"/>
+          <p:cNvPr id="2" name="Shape 0"/>
+          <p:cNvSpPr/>
+          <p:nvPr/>
+        </p:nvSpPr>
+        <p:spPr>
+          <a:xfrm>
+            <a:off x="457200" y="411480"/>
+            <a:ext cx="54864" cy="411480"/>
+          </a:xfrm>
+          <a:prstGeom prst="rect">
+            <a:avLst/>
+          </a:prstGeom>
+          <a:solidFill>
+            <a:srgbClr val="1B2A4A"/>
+          </a:solidFill>
+          <a:ln/>
+        </p:spPr>
+        <p:txBody>
+          <a:bodyPr/>
+          <a:lstStyle/>
+          <a:p>
+            <a:endParaRPr lang="ja-JP" altLang="en-US"/>
+          </a:p>
+        </p:txBody>
+      </p:sp>
+      <p:sp>
+        <p:nvSpPr>
+          <p:cNvPr id="3" name="Text 1"/>
+          <p:cNvSpPr/>
+          <p:nvPr/>
+        </p:nvSpPr>
+        <p:spPr>
+          <a:xfrm>
+            <a:off x="685800" y="320040"/>
+            <a:ext cx="7315200" cy="548640"/>
+          </a:xfrm>
+          <a:prstGeom prst="rect">
+            <a:avLst/>
+          </a:prstGeom>
+          <a:noFill/>
+          <a:ln/>
+        </p:spPr>
+        <p:txBody>
+          <a:bodyPr wrap="square" lIns="0" tIns="0" rIns="0" bIns="0" rtlCol="0" anchor="ctr"/>
+          <a:lstStyle/>
+          <a:p>
+            <a:pPr marL="0" indent="0">
+              <a:buNone/>
+            </a:pPr>
+            <a:r>
+              <a:rPr lang="en-US" sz="2800" b="1" dirty="0">
+                <a:solidFill>
+                  <a:srgbClr val="1E293B"/>
+                </a:solidFill>
+                <a:latin typeface="Meiryo" pitchFamily="34" charset="0"/>
+                <a:ea typeface="Meiryo" pitchFamily="34" charset="-122"/>
+                <a:cs typeface="Meiryo" pitchFamily="34" charset="-120"/>
+              </a:rPr>
+              <a:t>本日お話しすること</a:t>
+            </a:r>
+            <a:endParaRPr lang="en-US" sz="2800" dirty="0"/>
+          </a:p>
+        </p:txBody>
+      </p:sp>
+      <p:sp>
+        <p:nvSpPr>
+          <p:cNvPr id="4" name="Shape 2"/>
+          <p:cNvSpPr/>
+          <p:nvPr/>
+        </p:nvSpPr>
+        <p:spPr>
+          <a:xfrm>
+            <a:off x="731520" y="1280160"/>
+            <a:ext cx="7680960" cy="960120"/>
+          </a:xfrm>
+          <a:prstGeom prst="rect">
+            <a:avLst/>
+          </a:prstGeom>
+          <a:solidFill>
+            <a:srgbClr val="EBF0FA"/>
+          </a:solidFill>
+          <a:ln/>
+          <a:effectLst>
+            <a:outerShdw blurRad="50800" dist="12700" dir="8100000" algn="bl" rotWithShape="0">
+              <a:srgbClr val="000000">
+                <a:alpha val="8000"/>
+              </a:srgbClr>
+            </a:outerShdw>
+          </a:effectLst>
+        </p:spPr>
+        <p:txBody>
+          <a:bodyPr/>
+          <a:lstStyle/>
+          <a:p>
+            <a:endParaRPr lang="ja-JP" altLang="en-US"/>
+          </a:p>
+        </p:txBody>
+      </p:sp>
+      <p:sp>
+        <p:nvSpPr>
+          <p:cNvPr id="5" name="Shape 3"/>
+          <p:cNvSpPr/>
+          <p:nvPr/>
+        </p:nvSpPr>
+        <p:spPr>
+          <a:xfrm>
+            <a:off x="1005840" y="1463040"/>
+            <a:ext cx="548640" cy="548640"/>
+          </a:xfrm>
+          <a:prstGeom prst="ellipse">
+            <a:avLst/>
+          </a:prstGeom>
+          <a:solidFill>
+            <a:srgbClr val="1B2A4A"/>
+          </a:solidFill>
+          <a:ln/>
+        </p:spPr>
+        <p:txBody>
+          <a:bodyPr/>
+          <a:lstStyle/>
+          <a:p>
+            <a:endParaRPr lang="ja-JP" altLang="en-US"/>
+          </a:p>
+        </p:txBody>
+      </p:sp>
+      <p:sp>
+        <p:nvSpPr>
+          <p:cNvPr id="6" name="Text 4"/>
+          <p:cNvSpPr/>
+          <p:nvPr/>
+        </p:nvSpPr>
+        <p:spPr>
+          <a:xfrm>
+            <a:off x="1005840" y="1463040"/>
+            <a:ext cx="548640" cy="548640"/>
           </a:xfrm>
           <a:prstGeom prst="rect">
             <a:avLst/>
@@ -4263,11 +4125,11 @@
           <a:bodyPr wrap="square" rtlCol="0" anchor="ctr"/>
           <a:lstStyle/>
           <a:p>
-            <a:pPr algn="ctr" indent="0" marL="0">
+            <a:pPr marL="0" indent="0" algn="ctr">
               <a:buNone/>
             </a:pPr>
             <a:r>
-              <a:rPr lang="en-US" sz="4800" b="1" spc="800" kern="0" dirty="0">
+              <a:rPr lang="en-US" sz="2000" b="1" dirty="0">
                 <a:solidFill>
                   <a:srgbClr val="FFFFFF"/>
                 </a:solidFill>
@@ -4275,127 +4137,482 @@
                 <a:ea typeface="Arial" pitchFamily="34" charset="-122"/>
                 <a:cs typeface="Arial" pitchFamily="34" charset="-120"/>
               </a:rPr>
-              <a:t>AI活用開発の見積もりの考え方</a:t>
-            </a:r>
-            <a:endParaRPr lang="en-US" sz="4800" dirty="0"/>
-          </a:p>
-        </p:txBody>
-      </p:sp>
-      <p:sp>
-        <p:nvSpPr>
-          <p:cNvPr id="3" name="Shape 1"/>
-          <p:cNvSpPr/>
-          <p:nvPr/>
-        </p:nvSpPr>
-        <p:spPr>
-          <a:xfrm>
-            <a:off x="3200400" y="2286000"/>
-            <a:ext cx="2743200" cy="0"/>
-          </a:xfrm>
-          <a:prstGeom prst="line">
-            <a:avLst/>
-          </a:prstGeom>
-          <a:noFill/>
-          <a:ln w="38100">
-            <a:solidFill>
-              <a:srgbClr val="2563EB"/>
-            </a:solidFill>
-            <a:prstDash val="solid"/>
-          </a:ln>
-        </p:spPr>
-      </p:sp>
-      <p:sp>
-        <p:nvSpPr>
-          <p:cNvPr id="4" name="Text 2"/>
-          <p:cNvSpPr/>
-          <p:nvPr/>
-        </p:nvSpPr>
-        <p:spPr>
-          <a:xfrm>
-            <a:off x="1371600" y="2560320"/>
-            <a:ext cx="6400800" cy="640080"/>
-          </a:xfrm>
-          <a:prstGeom prst="rect">
-            <a:avLst/>
-          </a:prstGeom>
-          <a:noFill/>
-          <a:ln/>
-        </p:spPr>
-        <p:txBody>
-          <a:bodyPr wrap="square" rtlCol="0" anchor="ctr"/>
-          <a:lstStyle/>
-          <a:p>
-            <a:pPr algn="ctr" indent="0" marL="0">
+              <a:t>1</a:t>
+            </a:r>
+            <a:endParaRPr lang="en-US" sz="2000" dirty="0"/>
+          </a:p>
+        </p:txBody>
+      </p:sp>
+      <p:sp>
+        <p:nvSpPr>
+          <p:cNvPr id="7" name="Text 5"/>
+          <p:cNvSpPr/>
+          <p:nvPr/>
+        </p:nvSpPr>
+        <p:spPr>
+          <a:xfrm>
+            <a:off x="1828800" y="1371600"/>
+            <a:ext cx="5943600" cy="411480"/>
+          </a:xfrm>
+          <a:prstGeom prst="rect">
+            <a:avLst/>
+          </a:prstGeom>
+          <a:noFill/>
+          <a:ln/>
+        </p:spPr>
+        <p:txBody>
+          <a:bodyPr wrap="square" lIns="0" tIns="0" rIns="0" bIns="0" rtlCol="0" anchor="ctr"/>
+          <a:lstStyle/>
+          <a:p>
+            <a:pPr marL="0" indent="0">
               <a:buNone/>
             </a:pPr>
             <a:r>
-              <a:rPr lang="en-US" sz="2200" dirty="0">
-                <a:solidFill>
-                  <a:srgbClr val="FFFFFF"/>
+              <a:rPr lang="en-US" sz="1800" b="1" dirty="0">
+                <a:solidFill>
+                  <a:srgbClr val="1E293B"/>
                 </a:solidFill>
                 <a:latin typeface="Meiryo" pitchFamily="34" charset="0"/>
                 <a:ea typeface="Meiryo" pitchFamily="34" charset="-122"/>
                 <a:cs typeface="Meiryo" pitchFamily="34" charset="-120"/>
               </a:rPr>
-              <a:t>ご清聴ありがとうございました</a:t>
-            </a:r>
-            <a:endParaRPr lang="en-US" sz="2200" dirty="0"/>
-          </a:p>
-        </p:txBody>
-      </p:sp>
-      <p:sp>
-        <p:nvSpPr>
-          <p:cNvPr id="5" name="Text 3"/>
-          <p:cNvSpPr/>
-          <p:nvPr/>
-        </p:nvSpPr>
-        <p:spPr>
-          <a:xfrm>
-            <a:off x="1371600" y="3474720"/>
-            <a:ext cx="6400800" cy="731520"/>
-          </a:xfrm>
-          <a:prstGeom prst="rect">
-            <a:avLst/>
-          </a:prstGeom>
-          <a:noFill/>
-          <a:ln/>
-        </p:spPr>
-        <p:txBody>
-          <a:bodyPr wrap="square" rtlCol="0" anchor="ctr"/>
-          <a:lstStyle/>
-          <a:p>
-            <a:pPr algn="ctr" indent="0" marL="0">
+              <a:t>前提の変化</a:t>
+            </a:r>
+            <a:endParaRPr lang="en-US" sz="1800" dirty="0"/>
+          </a:p>
+        </p:txBody>
+      </p:sp>
+      <p:sp>
+        <p:nvSpPr>
+          <p:cNvPr id="8" name="Text 6"/>
+          <p:cNvSpPr/>
+          <p:nvPr/>
+        </p:nvSpPr>
+        <p:spPr>
+          <a:xfrm>
+            <a:off x="1828800" y="1783080"/>
+            <a:ext cx="5943600" cy="320040"/>
+          </a:xfrm>
+          <a:prstGeom prst="rect">
+            <a:avLst/>
+          </a:prstGeom>
+          <a:noFill/>
+          <a:ln/>
+        </p:spPr>
+        <p:txBody>
+          <a:bodyPr wrap="square" lIns="0" tIns="0" rIns="0" bIns="0" rtlCol="0" anchor="ctr"/>
+          <a:lstStyle/>
+          <a:p>
+            <a:pPr marL="0" indent="0">
               <a:buNone/>
             </a:pPr>
             <a:r>
-              <a:rPr lang="en-US" sz="1200" dirty="0">
-                <a:solidFill>
-                  <a:srgbClr val="94A3B8"/>
+              <a:rPr lang="en-US" sz="1300" dirty="0">
+                <a:solidFill>
+                  <a:srgbClr val="475569"/>
                 </a:solidFill>
                 <a:latin typeface="Meiryo" pitchFamily="34" charset="0"/>
                 <a:ea typeface="Meiryo" pitchFamily="34" charset="-122"/>
                 <a:cs typeface="Meiryo" pitchFamily="34" charset="-120"/>
               </a:rPr>
-              <a:t>AI活用開発 見積もりの考え方</a:t>
-            </a:r>
-            <a:endParaRPr lang="en-US" sz="1200" dirty="0"/>
-          </a:p>
-          <a:p>
-            <a:pPr algn="ctr" indent="0" marL="0">
+              <a:t>AI開発で見積もりの何が変わったのか</a:t>
+            </a:r>
+            <a:endParaRPr lang="en-US" sz="1300" dirty="0"/>
+          </a:p>
+        </p:txBody>
+      </p:sp>
+      <p:sp>
+        <p:nvSpPr>
+          <p:cNvPr id="9" name="Shape 7"/>
+          <p:cNvSpPr/>
+          <p:nvPr/>
+        </p:nvSpPr>
+        <p:spPr>
+          <a:xfrm>
+            <a:off x="731520" y="2468880"/>
+            <a:ext cx="7680960" cy="960120"/>
+          </a:xfrm>
+          <a:prstGeom prst="rect">
+            <a:avLst/>
+          </a:prstGeom>
+          <a:solidFill>
+            <a:srgbClr val="EBF0FA"/>
+          </a:solidFill>
+          <a:ln/>
+          <a:effectLst>
+            <a:outerShdw blurRad="50800" dist="12700" dir="8100000" algn="bl" rotWithShape="0">
+              <a:srgbClr val="000000">
+                <a:alpha val="8000"/>
+              </a:srgbClr>
+            </a:outerShdw>
+          </a:effectLst>
+        </p:spPr>
+        <p:txBody>
+          <a:bodyPr/>
+          <a:lstStyle/>
+          <a:p>
+            <a:endParaRPr lang="ja-JP" altLang="en-US"/>
+          </a:p>
+        </p:txBody>
+      </p:sp>
+      <p:sp>
+        <p:nvSpPr>
+          <p:cNvPr id="10" name="Shape 8"/>
+          <p:cNvSpPr/>
+          <p:nvPr/>
+        </p:nvSpPr>
+        <p:spPr>
+          <a:xfrm>
+            <a:off x="1005840" y="2651760"/>
+            <a:ext cx="548640" cy="548640"/>
+          </a:xfrm>
+          <a:prstGeom prst="ellipse">
+            <a:avLst/>
+          </a:prstGeom>
+          <a:solidFill>
+            <a:srgbClr val="1B2A4A"/>
+          </a:solidFill>
+          <a:ln/>
+        </p:spPr>
+        <p:txBody>
+          <a:bodyPr/>
+          <a:lstStyle/>
+          <a:p>
+            <a:endParaRPr lang="ja-JP" altLang="en-US"/>
+          </a:p>
+        </p:txBody>
+      </p:sp>
+      <p:sp>
+        <p:nvSpPr>
+          <p:cNvPr id="11" name="Text 9"/>
+          <p:cNvSpPr/>
+          <p:nvPr/>
+        </p:nvSpPr>
+        <p:spPr>
+          <a:xfrm>
+            <a:off x="1005840" y="2651760"/>
+            <a:ext cx="548640" cy="548640"/>
+          </a:xfrm>
+          <a:prstGeom prst="rect">
+            <a:avLst/>
+          </a:prstGeom>
+          <a:noFill/>
+          <a:ln/>
+        </p:spPr>
+        <p:txBody>
+          <a:bodyPr wrap="square" rtlCol="0" anchor="ctr"/>
+          <a:lstStyle/>
+          <a:p>
+            <a:pPr marL="0" indent="0" algn="ctr">
               <a:buNone/>
             </a:pPr>
             <a:r>
-              <a:rPr lang="en-US" sz="1200" dirty="0">
-                <a:solidFill>
-                  <a:srgbClr val="94A3B8"/>
+              <a:rPr lang="en-US" sz="2000" b="1" dirty="0">
+                <a:solidFill>
+                  <a:srgbClr val="FFFFFF"/>
+                </a:solidFill>
+                <a:latin typeface="Arial" pitchFamily="34" charset="0"/>
+                <a:ea typeface="Arial" pitchFamily="34" charset="-122"/>
+                <a:cs typeface="Arial" pitchFamily="34" charset="-120"/>
+              </a:rPr>
+              <a:t>2</a:t>
+            </a:r>
+            <a:endParaRPr lang="en-US" sz="2000" dirty="0"/>
+          </a:p>
+        </p:txBody>
+      </p:sp>
+      <p:sp>
+        <p:nvSpPr>
+          <p:cNvPr id="12" name="Text 10"/>
+          <p:cNvSpPr/>
+          <p:nvPr/>
+        </p:nvSpPr>
+        <p:spPr>
+          <a:xfrm>
+            <a:off x="1828800" y="2560320"/>
+            <a:ext cx="5943600" cy="411480"/>
+          </a:xfrm>
+          <a:prstGeom prst="rect">
+            <a:avLst/>
+          </a:prstGeom>
+          <a:noFill/>
+          <a:ln/>
+        </p:spPr>
+        <p:txBody>
+          <a:bodyPr wrap="square" lIns="0" tIns="0" rIns="0" bIns="0" rtlCol="0" anchor="ctr"/>
+          <a:lstStyle/>
+          <a:p>
+            <a:pPr marL="0" indent="0">
+              <a:buNone/>
+            </a:pPr>
+            <a:r>
+              <a:rPr lang="en-US" sz="1800" b="1" dirty="0">
+                <a:solidFill>
+                  <a:srgbClr val="1E293B"/>
                 </a:solidFill>
                 <a:latin typeface="Meiryo" pitchFamily="34" charset="0"/>
                 <a:ea typeface="Meiryo" pitchFamily="34" charset="-122"/>
                 <a:cs typeface="Meiryo" pitchFamily="34" charset="-120"/>
               </a:rPr>
-              <a:t>2026年5月</a:t>
-            </a:r>
-            <a:endParaRPr lang="en-US" sz="1200" dirty="0"/>
+              <a:t>見積もりの考え方</a:t>
+            </a:r>
+            <a:endParaRPr lang="en-US" sz="1800" dirty="0"/>
+          </a:p>
+        </p:txBody>
+      </p:sp>
+      <p:sp>
+        <p:nvSpPr>
+          <p:cNvPr id="13" name="Text 11"/>
+          <p:cNvSpPr/>
+          <p:nvPr/>
+        </p:nvSpPr>
+        <p:spPr>
+          <a:xfrm>
+            <a:off x="1828800" y="2971800"/>
+            <a:ext cx="5943600" cy="320040"/>
+          </a:xfrm>
+          <a:prstGeom prst="rect">
+            <a:avLst/>
+          </a:prstGeom>
+          <a:noFill/>
+          <a:ln/>
+        </p:spPr>
+        <p:txBody>
+          <a:bodyPr wrap="square" lIns="0" tIns="0" rIns="0" bIns="0" rtlCol="0" anchor="ctr"/>
+          <a:lstStyle/>
+          <a:p>
+            <a:pPr marL="0" indent="0">
+              <a:buNone/>
+            </a:pPr>
+            <a:r>
+              <a:rPr lang="en-US" sz="1300" dirty="0">
+                <a:solidFill>
+                  <a:srgbClr val="475569"/>
+                </a:solidFill>
+                <a:latin typeface="Meiryo" pitchFamily="34" charset="0"/>
+                <a:ea typeface="Meiryo" pitchFamily="34" charset="-122"/>
+                <a:cs typeface="Meiryo" pitchFamily="34" charset="-120"/>
+              </a:rPr>
+              <a:t>工数の捉え方とフェーズ分解</a:t>
+            </a:r>
+            <a:endParaRPr lang="en-US" sz="1300" dirty="0"/>
+          </a:p>
+        </p:txBody>
+      </p:sp>
+      <p:sp>
+        <p:nvSpPr>
+          <p:cNvPr id="14" name="Shape 12"/>
+          <p:cNvSpPr/>
+          <p:nvPr/>
+        </p:nvSpPr>
+        <p:spPr>
+          <a:xfrm>
+            <a:off x="731520" y="3657600"/>
+            <a:ext cx="7680960" cy="960120"/>
+          </a:xfrm>
+          <a:prstGeom prst="rect">
+            <a:avLst/>
+          </a:prstGeom>
+          <a:solidFill>
+            <a:srgbClr val="EBF0FA"/>
+          </a:solidFill>
+          <a:ln/>
+          <a:effectLst>
+            <a:outerShdw blurRad="50800" dist="12700" dir="8100000" algn="bl" rotWithShape="0">
+              <a:srgbClr val="000000">
+                <a:alpha val="8000"/>
+              </a:srgbClr>
+            </a:outerShdw>
+          </a:effectLst>
+        </p:spPr>
+        <p:txBody>
+          <a:bodyPr/>
+          <a:lstStyle/>
+          <a:p>
+            <a:endParaRPr lang="ja-JP" altLang="en-US"/>
+          </a:p>
+        </p:txBody>
+      </p:sp>
+      <p:sp>
+        <p:nvSpPr>
+          <p:cNvPr id="15" name="Shape 13"/>
+          <p:cNvSpPr/>
+          <p:nvPr/>
+        </p:nvSpPr>
+        <p:spPr>
+          <a:xfrm>
+            <a:off x="1005840" y="3840480"/>
+            <a:ext cx="548640" cy="548640"/>
+          </a:xfrm>
+          <a:prstGeom prst="ellipse">
+            <a:avLst/>
+          </a:prstGeom>
+          <a:solidFill>
+            <a:srgbClr val="1B2A4A"/>
+          </a:solidFill>
+          <a:ln/>
+        </p:spPr>
+        <p:txBody>
+          <a:bodyPr/>
+          <a:lstStyle/>
+          <a:p>
+            <a:endParaRPr lang="ja-JP" altLang="en-US"/>
+          </a:p>
+        </p:txBody>
+      </p:sp>
+      <p:sp>
+        <p:nvSpPr>
+          <p:cNvPr id="16" name="Text 14"/>
+          <p:cNvSpPr/>
+          <p:nvPr/>
+        </p:nvSpPr>
+        <p:spPr>
+          <a:xfrm>
+            <a:off x="1005840" y="3840480"/>
+            <a:ext cx="548640" cy="548640"/>
+          </a:xfrm>
+          <a:prstGeom prst="rect">
+            <a:avLst/>
+          </a:prstGeom>
+          <a:noFill/>
+          <a:ln/>
+        </p:spPr>
+        <p:txBody>
+          <a:bodyPr wrap="square" rtlCol="0" anchor="ctr"/>
+          <a:lstStyle/>
+          <a:p>
+            <a:pPr marL="0" indent="0" algn="ctr">
+              <a:buNone/>
+            </a:pPr>
+            <a:r>
+              <a:rPr lang="en-US" sz="2000" b="1" dirty="0">
+                <a:solidFill>
+                  <a:srgbClr val="FFFFFF"/>
+                </a:solidFill>
+                <a:latin typeface="Arial" pitchFamily="34" charset="0"/>
+                <a:ea typeface="Arial" pitchFamily="34" charset="-122"/>
+                <a:cs typeface="Arial" pitchFamily="34" charset="-120"/>
+              </a:rPr>
+              <a:t>3</a:t>
+            </a:r>
+            <a:endParaRPr lang="en-US" sz="2000" dirty="0"/>
+          </a:p>
+        </p:txBody>
+      </p:sp>
+      <p:sp>
+        <p:nvSpPr>
+          <p:cNvPr id="17" name="Text 15"/>
+          <p:cNvSpPr/>
+          <p:nvPr/>
+        </p:nvSpPr>
+        <p:spPr>
+          <a:xfrm>
+            <a:off x="1828800" y="3749040"/>
+            <a:ext cx="5943600" cy="411480"/>
+          </a:xfrm>
+          <a:prstGeom prst="rect">
+            <a:avLst/>
+          </a:prstGeom>
+          <a:noFill/>
+          <a:ln/>
+        </p:spPr>
+        <p:txBody>
+          <a:bodyPr wrap="square" lIns="0" tIns="0" rIns="0" bIns="0" rtlCol="0" anchor="ctr"/>
+          <a:lstStyle/>
+          <a:p>
+            <a:pPr marL="0" indent="0">
+              <a:buNone/>
+            </a:pPr>
+            <a:r>
+              <a:rPr lang="en-US" sz="1800" b="1" dirty="0">
+                <a:solidFill>
+                  <a:srgbClr val="1E293B"/>
+                </a:solidFill>
+                <a:latin typeface="Meiryo" pitchFamily="34" charset="0"/>
+                <a:ea typeface="Meiryo" pitchFamily="34" charset="-122"/>
+                <a:cs typeface="Meiryo" pitchFamily="34" charset="-120"/>
+              </a:rPr>
+              <a:t>透明性のための工夫</a:t>
+            </a:r>
+            <a:endParaRPr lang="en-US" sz="1800" dirty="0"/>
+          </a:p>
+        </p:txBody>
+      </p:sp>
+      <p:sp>
+        <p:nvSpPr>
+          <p:cNvPr id="18" name="Text 16"/>
+          <p:cNvSpPr/>
+          <p:nvPr/>
+        </p:nvSpPr>
+        <p:spPr>
+          <a:xfrm>
+            <a:off x="1828800" y="4160520"/>
+            <a:ext cx="5943600" cy="320040"/>
+          </a:xfrm>
+          <a:prstGeom prst="rect">
+            <a:avLst/>
+          </a:prstGeom>
+          <a:noFill/>
+          <a:ln/>
+        </p:spPr>
+        <p:txBody>
+          <a:bodyPr wrap="square" lIns="0" tIns="0" rIns="0" bIns="0" rtlCol="0" anchor="ctr"/>
+          <a:lstStyle/>
+          <a:p>
+            <a:pPr marL="0" indent="0">
+              <a:buNone/>
+            </a:pPr>
+            <a:r>
+              <a:rPr lang="en-US" sz="1300" dirty="0">
+                <a:solidFill>
+                  <a:srgbClr val="475569"/>
+                </a:solidFill>
+                <a:latin typeface="Meiryo" pitchFamily="34" charset="0"/>
+                <a:ea typeface="Meiryo" pitchFamily="34" charset="-122"/>
+                <a:cs typeface="Meiryo" pitchFamily="34" charset="-120"/>
+              </a:rPr>
+              <a:t>リスクと費用を事前に共有する</a:t>
+            </a:r>
+            <a:endParaRPr lang="en-US" sz="1300" dirty="0"/>
+          </a:p>
+        </p:txBody>
+      </p:sp>
+      <p:sp>
+        <p:nvSpPr>
+          <p:cNvPr id="19" name="Text 17"/>
+          <p:cNvSpPr/>
+          <p:nvPr/>
+        </p:nvSpPr>
+        <p:spPr>
+          <a:xfrm>
+            <a:off x="457200" y="4754880"/>
+            <a:ext cx="8229600" cy="274320"/>
+          </a:xfrm>
+          <a:prstGeom prst="rect">
+            <a:avLst/>
+          </a:prstGeom>
+          <a:noFill/>
+          <a:ln/>
+        </p:spPr>
+        <p:txBody>
+          <a:bodyPr wrap="square" rtlCol="0" anchor="ctr"/>
+          <a:lstStyle/>
+          <a:p>
+            <a:pPr marL="0" indent="0" algn="r">
+              <a:buNone/>
+            </a:pPr>
+            <a:r>
+              <a:rPr lang="en-US" sz="800" dirty="0">
+                <a:solidFill>
+                  <a:srgbClr val="CBD5E1"/>
+                </a:solidFill>
+                <a:latin typeface="Arial" pitchFamily="34" charset="0"/>
+                <a:ea typeface="Arial" pitchFamily="34" charset="-122"/>
+                <a:cs typeface="Arial" pitchFamily="34" charset="-120"/>
+              </a:rPr>
+              <a:t>AI活用開発 見積もりの考え方 | 2</a:t>
+            </a:r>
+            <a:endParaRPr lang="en-US" sz="800" dirty="0"/>
           </a:p>
         </p:txBody>
       </p:sp>
@@ -4407,14 +4624,15 @@
 </p:sld>
 </file>
 
-<file path=ppt/slides/slide2.xml><?xml version="1.0" encoding="utf-8"?>
+<file path=ppt/slides/slide3.xml><?xml version="1.0" encoding="utf-8"?>
 <p:sld xmlns:a="http://schemas.openxmlformats.org/drawingml/2006/main" xmlns:r="http://schemas.openxmlformats.org/officeDocument/2006/relationships" xmlns:p="http://schemas.openxmlformats.org/presentationml/2006/main">
-  <p:cSld name="Slide 2">
+  <p:cSld name="Slide 3">
     <p:bg>
       <p:bgPr>
         <a:solidFill>
           <a:srgbClr val="FFFFFF"/>
         </a:solidFill>
+        <a:effectLst/>
       </p:bgPr>
     </p:bg>
     <p:spTree>
@@ -4439,8 +4657,8 @@
         </p:nvSpPr>
         <p:spPr>
           <a:xfrm>
-            <a:off x="457200" y="411480"/>
-            <a:ext cx="54864" cy="411480"/>
+            <a:off x="0" y="0"/>
+            <a:ext cx="3474720" cy="5143500"/>
           </a:xfrm>
           <a:prstGeom prst="rect">
             <a:avLst/>
@@ -4450,6 +4668,13 @@
           </a:solidFill>
           <a:ln/>
         </p:spPr>
+        <p:txBody>
+          <a:bodyPr/>
+          <a:lstStyle/>
+          <a:p>
+            <a:endParaRPr lang="ja-JP" altLang="en-US"/>
+          </a:p>
+        </p:txBody>
       </p:sp>
       <p:sp>
         <p:nvSpPr>
@@ -4459,8 +4684,182 @@
         </p:nvSpPr>
         <p:spPr>
           <a:xfrm>
-            <a:off x="685800" y="320040"/>
-            <a:ext cx="7315200" cy="548640"/>
+            <a:off x="0" y="1828800"/>
+            <a:ext cx="3474720" cy="457200"/>
+          </a:xfrm>
+          <a:prstGeom prst="rect">
+            <a:avLst/>
+          </a:prstGeom>
+          <a:noFill/>
+          <a:ln/>
+        </p:spPr>
+        <p:txBody>
+          <a:bodyPr wrap="square" rtlCol="0" anchor="ctr"/>
+          <a:lstStyle/>
+          <a:p>
+            <a:pPr marL="0" indent="0" algn="ctr">
+              <a:buNone/>
+            </a:pPr>
+            <a:r>
+              <a:rPr lang="en-US" sz="1800" b="1" kern="0" spc="600" dirty="0">
+                <a:solidFill>
+                  <a:srgbClr val="FFFFFF"/>
+                </a:solidFill>
+                <a:latin typeface="Arial" pitchFamily="34" charset="0"/>
+                <a:ea typeface="Arial" pitchFamily="34" charset="-122"/>
+                <a:cs typeface="Arial" pitchFamily="34" charset="-120"/>
+              </a:rPr>
+              <a:t>PART</a:t>
+            </a:r>
+            <a:endParaRPr lang="en-US" sz="1800" dirty="0"/>
+          </a:p>
+        </p:txBody>
+      </p:sp>
+      <p:sp>
+        <p:nvSpPr>
+          <p:cNvPr id="4" name="Text 2"/>
+          <p:cNvSpPr/>
+          <p:nvPr/>
+        </p:nvSpPr>
+        <p:spPr>
+          <a:xfrm>
+            <a:off x="0" y="2240280"/>
+            <a:ext cx="3474720" cy="548640"/>
+          </a:xfrm>
+          <a:prstGeom prst="rect">
+            <a:avLst/>
+          </a:prstGeom>
+          <a:noFill/>
+          <a:ln/>
+        </p:spPr>
+        <p:txBody>
+          <a:bodyPr wrap="square" rtlCol="0" anchor="ctr"/>
+          <a:lstStyle/>
+          <a:p>
+            <a:pPr marL="0" indent="0" algn="ctr">
+              <a:buNone/>
+            </a:pPr>
+            <a:r>
+              <a:rPr lang="en-US" sz="3200" b="1" dirty="0">
+                <a:solidFill>
+                  <a:srgbClr val="FFFFFF"/>
+                </a:solidFill>
+                <a:latin typeface="Arial" pitchFamily="34" charset="0"/>
+                <a:ea typeface="Arial" pitchFamily="34" charset="-122"/>
+                <a:cs typeface="Arial" pitchFamily="34" charset="-120"/>
+              </a:rPr>
+              <a:t>01</a:t>
+            </a:r>
+            <a:endParaRPr lang="en-US" sz="3200" dirty="0"/>
+          </a:p>
+        </p:txBody>
+      </p:sp>
+      <p:sp>
+        <p:nvSpPr>
+          <p:cNvPr id="5" name="Shape 3"/>
+          <p:cNvSpPr/>
+          <p:nvPr/>
+        </p:nvSpPr>
+        <p:spPr>
+          <a:xfrm>
+            <a:off x="1371600" y="2880360"/>
+            <a:ext cx="731520" cy="0"/>
+          </a:xfrm>
+          <a:prstGeom prst="line">
+            <a:avLst/>
+          </a:prstGeom>
+          <a:noFill/>
+          <a:ln w="38100">
+            <a:solidFill>
+              <a:srgbClr val="FFFFFF"/>
+            </a:solidFill>
+            <a:prstDash val="solid"/>
+          </a:ln>
+        </p:spPr>
+        <p:txBody>
+          <a:bodyPr/>
+          <a:lstStyle/>
+          <a:p>
+            <a:endParaRPr lang="ja-JP" altLang="en-US"/>
+          </a:p>
+        </p:txBody>
+      </p:sp>
+      <p:sp>
+        <p:nvSpPr>
+          <p:cNvPr id="6" name="Shape 4"/>
+          <p:cNvSpPr/>
+          <p:nvPr/>
+        </p:nvSpPr>
+        <p:spPr>
+          <a:xfrm>
+            <a:off x="4206240" y="1371600"/>
+            <a:ext cx="3200400" cy="320040"/>
+          </a:xfrm>
+          <a:prstGeom prst="rect">
+            <a:avLst/>
+          </a:prstGeom>
+          <a:solidFill>
+            <a:srgbClr val="F1F5F9"/>
+          </a:solidFill>
+          <a:ln/>
+        </p:spPr>
+        <p:txBody>
+          <a:bodyPr/>
+          <a:lstStyle/>
+          <a:p>
+            <a:endParaRPr lang="ja-JP" altLang="en-US"/>
+          </a:p>
+        </p:txBody>
+      </p:sp>
+      <p:sp>
+        <p:nvSpPr>
+          <p:cNvPr id="7" name="Text 5"/>
+          <p:cNvSpPr/>
+          <p:nvPr/>
+        </p:nvSpPr>
+        <p:spPr>
+          <a:xfrm>
+            <a:off x="4206240" y="1371600"/>
+            <a:ext cx="3200400" cy="320040"/>
+          </a:xfrm>
+          <a:prstGeom prst="rect">
+            <a:avLst/>
+          </a:prstGeom>
+          <a:noFill/>
+          <a:ln/>
+        </p:spPr>
+        <p:txBody>
+          <a:bodyPr wrap="square" rtlCol="0" anchor="ctr"/>
+          <a:lstStyle/>
+          <a:p>
+            <a:pPr marL="0" indent="0" algn="ctr">
+              <a:buNone/>
+            </a:pPr>
+            <a:r>
+              <a:rPr lang="en-US" sz="900" kern="0" spc="200" dirty="0">
+                <a:solidFill>
+                  <a:srgbClr val="475569"/>
+                </a:solidFill>
+                <a:latin typeface="Arial" pitchFamily="34" charset="0"/>
+                <a:ea typeface="Arial" pitchFamily="34" charset="-122"/>
+                <a:cs typeface="Arial" pitchFamily="34" charset="-120"/>
+              </a:rPr>
+              <a:t>SECTION 1</a:t>
+            </a:r>
+            <a:endParaRPr lang="en-US" sz="900" dirty="0"/>
+          </a:p>
+        </p:txBody>
+      </p:sp>
+      <p:sp>
+        <p:nvSpPr>
+          <p:cNvPr id="8" name="Text 6"/>
+          <p:cNvSpPr/>
+          <p:nvPr/>
+        </p:nvSpPr>
+        <p:spPr>
+          <a:xfrm>
+            <a:off x="4114800" y="1920240"/>
+            <a:ext cx="4572000" cy="822960"/>
           </a:xfrm>
           <a:prstGeom prst="rect">
             <a:avLst/>
@@ -4472,11 +4871,11 @@
           <a:bodyPr wrap="square" lIns="0" tIns="0" rIns="0" bIns="0" rtlCol="0" anchor="ctr"/>
           <a:lstStyle/>
           <a:p>
-            <a:pPr indent="0" marL="0">
+            <a:pPr marL="0" indent="0">
               <a:buNone/>
             </a:pPr>
             <a:r>
-              <a:rPr lang="en-US" sz="2800" b="1" dirty="0">
+              <a:rPr lang="en-US" sz="3800" b="1" dirty="0">
                 <a:solidFill>
                   <a:srgbClr val="1E293B"/>
                 </a:solidFill>
@@ -4484,51 +4883,24 @@
                 <a:ea typeface="Meiryo" pitchFamily="34" charset="-122"/>
                 <a:cs typeface="Meiryo" pitchFamily="34" charset="-120"/>
               </a:rPr>
-              <a:t>本日お話しすること</a:t>
-            </a:r>
-            <a:endParaRPr lang="en-US" sz="2800" dirty="0"/>
-          </a:p>
-        </p:txBody>
-      </p:sp>
-      <p:sp>
-        <p:nvSpPr>
-          <p:cNvPr id="4" name="Shape 2"/>
-          <p:cNvSpPr/>
-          <p:nvPr/>
-        </p:nvSpPr>
-        <p:spPr>
-          <a:xfrm>
-            <a:off x="731520" y="1280160"/>
-            <a:ext cx="7680960" cy="960120"/>
-          </a:xfrm>
-          <a:prstGeom prst="rect">
-            <a:avLst/>
-          </a:prstGeom>
-          <a:solidFill>
-            <a:srgbClr val="EBF0FA"/>
-          </a:solidFill>
-          <a:ln/>
-          <a:effectLst>
-            <a:outerShdw sx="100000" sy="100000" kx="0" ky="0" algn="bl" rotWithShape="0" blurRad="50800" dist="12700" dir="8100000">
-              <a:srgbClr val="000000">
-                <a:alpha val="8000"/>
-              </a:srgbClr>
-            </a:outerShdw>
-          </a:effectLst>
-        </p:spPr>
-      </p:sp>
-      <p:sp>
-        <p:nvSpPr>
-          <p:cNvPr id="5" name="Shape 3"/>
-          <p:cNvSpPr/>
-          <p:nvPr/>
-        </p:nvSpPr>
-        <p:spPr>
-          <a:xfrm>
-            <a:off x="1005840" y="1463040"/>
-            <a:ext cx="548640" cy="548640"/>
-          </a:xfrm>
-          <a:prstGeom prst="ellipse">
+              <a:t>前提の変化</a:t>
+            </a:r>
+            <a:endParaRPr lang="en-US" sz="3800" dirty="0"/>
+          </a:p>
+        </p:txBody>
+      </p:sp>
+      <p:sp>
+        <p:nvSpPr>
+          <p:cNvPr id="9" name="Shape 7"/>
+          <p:cNvSpPr/>
+          <p:nvPr/>
+        </p:nvSpPr>
+        <p:spPr>
+          <a:xfrm>
+            <a:off x="4114800" y="2926080"/>
+            <a:ext cx="54864" cy="822960"/>
+          </a:xfrm>
+          <a:prstGeom prst="rect">
             <a:avLst/>
           </a:prstGeom>
           <a:solidFill>
@@ -4536,488 +4908,50 @@
           </a:solidFill>
           <a:ln/>
         </p:spPr>
-      </p:sp>
-      <p:sp>
-        <p:nvSpPr>
-          <p:cNvPr id="6" name="Text 4"/>
-          <p:cNvSpPr/>
-          <p:nvPr/>
-        </p:nvSpPr>
-        <p:spPr>
-          <a:xfrm>
-            <a:off x="1005840" y="1463040"/>
-            <a:ext cx="548640" cy="548640"/>
-          </a:xfrm>
-          <a:prstGeom prst="rect">
-            <a:avLst/>
-          </a:prstGeom>
-          <a:noFill/>
-          <a:ln/>
-        </p:spPr>
-        <p:txBody>
-          <a:bodyPr wrap="square" rtlCol="0" anchor="ctr"/>
-          <a:lstStyle/>
-          <a:p>
-            <a:pPr algn="ctr" indent="0" marL="0">
+        <p:txBody>
+          <a:bodyPr/>
+          <a:lstStyle/>
+          <a:p>
+            <a:endParaRPr lang="ja-JP" altLang="en-US"/>
+          </a:p>
+        </p:txBody>
+      </p:sp>
+      <p:sp>
+        <p:nvSpPr>
+          <p:cNvPr id="10" name="Text 8"/>
+          <p:cNvSpPr/>
+          <p:nvPr/>
+        </p:nvSpPr>
+        <p:spPr>
+          <a:xfrm>
+            <a:off x="4389120" y="2926080"/>
+            <a:ext cx="4114800" cy="822960"/>
+          </a:xfrm>
+          <a:prstGeom prst="rect">
+            <a:avLst/>
+          </a:prstGeom>
+          <a:noFill/>
+          <a:ln/>
+        </p:spPr>
+        <p:txBody>
+          <a:bodyPr wrap="square" lIns="0" tIns="0" rIns="0" bIns="0" rtlCol="0" anchor="ctr"/>
+          <a:lstStyle/>
+          <a:p>
+            <a:pPr marL="0" indent="0">
               <a:buNone/>
             </a:pPr>
             <a:r>
-              <a:rPr lang="en-US" sz="2000" b="1" dirty="0">
-                <a:solidFill>
-                  <a:srgbClr val="FFFFFF"/>
-                </a:solidFill>
-                <a:latin typeface="Arial" pitchFamily="34" charset="0"/>
-                <a:ea typeface="Arial" pitchFamily="34" charset="-122"/>
-                <a:cs typeface="Arial" pitchFamily="34" charset="-120"/>
-              </a:rPr>
-              <a:t>1</a:t>
-            </a:r>
-            <a:endParaRPr lang="en-US" sz="2000" dirty="0"/>
-          </a:p>
-        </p:txBody>
-      </p:sp>
-      <p:sp>
-        <p:nvSpPr>
-          <p:cNvPr id="7" name="Text 5"/>
-          <p:cNvSpPr/>
-          <p:nvPr/>
-        </p:nvSpPr>
-        <p:spPr>
-          <a:xfrm>
-            <a:off x="1828800" y="1371600"/>
-            <a:ext cx="5943600" cy="411480"/>
-          </a:xfrm>
-          <a:prstGeom prst="rect">
-            <a:avLst/>
-          </a:prstGeom>
-          <a:noFill/>
-          <a:ln/>
-        </p:spPr>
-        <p:txBody>
-          <a:bodyPr wrap="square" lIns="0" tIns="0" rIns="0" bIns="0" rtlCol="0" anchor="ctr"/>
-          <a:lstStyle/>
-          <a:p>
-            <a:pPr indent="0" marL="0">
-              <a:buNone/>
-            </a:pPr>
-            <a:r>
-              <a:rPr lang="en-US" sz="1800" b="1" dirty="0">
-                <a:solidFill>
-                  <a:srgbClr val="1E293B"/>
+              <a:rPr lang="en-US" sz="1600" dirty="0">
+                <a:solidFill>
+                  <a:srgbClr val="475569"/>
                 </a:solidFill>
                 <a:latin typeface="Meiryo" pitchFamily="34" charset="0"/>
                 <a:ea typeface="Meiryo" pitchFamily="34" charset="-122"/>
                 <a:cs typeface="Meiryo" pitchFamily="34" charset="-120"/>
               </a:rPr>
-              <a:t>前提の変化</a:t>
-            </a:r>
-            <a:endParaRPr lang="en-US" sz="1800" dirty="0"/>
-          </a:p>
-        </p:txBody>
-      </p:sp>
-      <p:sp>
-        <p:nvSpPr>
-          <p:cNvPr id="8" name="Text 6"/>
-          <p:cNvSpPr/>
-          <p:nvPr/>
-        </p:nvSpPr>
-        <p:spPr>
-          <a:xfrm>
-            <a:off x="1828800" y="1783080"/>
-            <a:ext cx="5943600" cy="320040"/>
-          </a:xfrm>
-          <a:prstGeom prst="rect">
-            <a:avLst/>
-          </a:prstGeom>
-          <a:noFill/>
-          <a:ln/>
-        </p:spPr>
-        <p:txBody>
-          <a:bodyPr wrap="square" lIns="0" tIns="0" rIns="0" bIns="0" rtlCol="0" anchor="ctr"/>
-          <a:lstStyle/>
-          <a:p>
-            <a:pPr indent="0" marL="0">
-              <a:buNone/>
-            </a:pPr>
-            <a:r>
-              <a:rPr lang="en-US" sz="1300" dirty="0">
-                <a:solidFill>
-                  <a:srgbClr val="475569"/>
-                </a:solidFill>
-                <a:latin typeface="Meiryo" pitchFamily="34" charset="0"/>
-                <a:ea typeface="Meiryo" pitchFamily="34" charset="-122"/>
-                <a:cs typeface="Meiryo" pitchFamily="34" charset="-120"/>
-              </a:rPr>
               <a:t>AI開発で見積もりの何が変わったのか</a:t>
             </a:r>
-            <a:endParaRPr lang="en-US" sz="1300" dirty="0"/>
-          </a:p>
-        </p:txBody>
-      </p:sp>
-      <p:sp>
-        <p:nvSpPr>
-          <p:cNvPr id="9" name="Shape 7"/>
-          <p:cNvSpPr/>
-          <p:nvPr/>
-        </p:nvSpPr>
-        <p:spPr>
-          <a:xfrm>
-            <a:off x="731520" y="2468880"/>
-            <a:ext cx="7680960" cy="960120"/>
-          </a:xfrm>
-          <a:prstGeom prst="rect">
-            <a:avLst/>
-          </a:prstGeom>
-          <a:solidFill>
-            <a:srgbClr val="EBF0FA"/>
-          </a:solidFill>
-          <a:ln/>
-          <a:effectLst>
-            <a:outerShdw sx="100000" sy="100000" kx="0" ky="0" algn="bl" rotWithShape="0" blurRad="50800" dist="12700" dir="8100000">
-              <a:srgbClr val="000000">
-                <a:alpha val="8000"/>
-              </a:srgbClr>
-            </a:outerShdw>
-          </a:effectLst>
-        </p:spPr>
-      </p:sp>
-      <p:sp>
-        <p:nvSpPr>
-          <p:cNvPr id="10" name="Shape 8"/>
-          <p:cNvSpPr/>
-          <p:nvPr/>
-        </p:nvSpPr>
-        <p:spPr>
-          <a:xfrm>
-            <a:off x="1005840" y="2651760"/>
-            <a:ext cx="548640" cy="548640"/>
-          </a:xfrm>
-          <a:prstGeom prst="ellipse">
-            <a:avLst/>
-          </a:prstGeom>
-          <a:solidFill>
-            <a:srgbClr val="1B2A4A"/>
-          </a:solidFill>
-          <a:ln/>
-        </p:spPr>
-      </p:sp>
-      <p:sp>
-        <p:nvSpPr>
-          <p:cNvPr id="11" name="Text 9"/>
-          <p:cNvSpPr/>
-          <p:nvPr/>
-        </p:nvSpPr>
-        <p:spPr>
-          <a:xfrm>
-            <a:off x="1005840" y="2651760"/>
-            <a:ext cx="548640" cy="548640"/>
-          </a:xfrm>
-          <a:prstGeom prst="rect">
-            <a:avLst/>
-          </a:prstGeom>
-          <a:noFill/>
-          <a:ln/>
-        </p:spPr>
-        <p:txBody>
-          <a:bodyPr wrap="square" rtlCol="0" anchor="ctr"/>
-          <a:lstStyle/>
-          <a:p>
-            <a:pPr algn="ctr" indent="0" marL="0">
-              <a:buNone/>
-            </a:pPr>
-            <a:r>
-              <a:rPr lang="en-US" sz="2000" b="1" dirty="0">
-                <a:solidFill>
-                  <a:srgbClr val="FFFFFF"/>
-                </a:solidFill>
-                <a:latin typeface="Arial" pitchFamily="34" charset="0"/>
-                <a:ea typeface="Arial" pitchFamily="34" charset="-122"/>
-                <a:cs typeface="Arial" pitchFamily="34" charset="-120"/>
-              </a:rPr>
-              <a:t>2</a:t>
-            </a:r>
-            <a:endParaRPr lang="en-US" sz="2000" dirty="0"/>
-          </a:p>
-        </p:txBody>
-      </p:sp>
-      <p:sp>
-        <p:nvSpPr>
-          <p:cNvPr id="12" name="Text 10"/>
-          <p:cNvSpPr/>
-          <p:nvPr/>
-        </p:nvSpPr>
-        <p:spPr>
-          <a:xfrm>
-            <a:off x="1828800" y="2560320"/>
-            <a:ext cx="5943600" cy="411480"/>
-          </a:xfrm>
-          <a:prstGeom prst="rect">
-            <a:avLst/>
-          </a:prstGeom>
-          <a:noFill/>
-          <a:ln/>
-        </p:spPr>
-        <p:txBody>
-          <a:bodyPr wrap="square" lIns="0" tIns="0" rIns="0" bIns="0" rtlCol="0" anchor="ctr"/>
-          <a:lstStyle/>
-          <a:p>
-            <a:pPr indent="0" marL="0">
-              <a:buNone/>
-            </a:pPr>
-            <a:r>
-              <a:rPr lang="en-US" sz="1800" b="1" dirty="0">
-                <a:solidFill>
-                  <a:srgbClr val="1E293B"/>
-                </a:solidFill>
-                <a:latin typeface="Meiryo" pitchFamily="34" charset="0"/>
-                <a:ea typeface="Meiryo" pitchFamily="34" charset="-122"/>
-                <a:cs typeface="Meiryo" pitchFamily="34" charset="-120"/>
-              </a:rPr>
-              <a:t>見積もりの考え方</a:t>
-            </a:r>
-            <a:endParaRPr lang="en-US" sz="1800" dirty="0"/>
-          </a:p>
-        </p:txBody>
-      </p:sp>
-      <p:sp>
-        <p:nvSpPr>
-          <p:cNvPr id="13" name="Text 11"/>
-          <p:cNvSpPr/>
-          <p:nvPr/>
-        </p:nvSpPr>
-        <p:spPr>
-          <a:xfrm>
-            <a:off x="1828800" y="2971800"/>
-            <a:ext cx="5943600" cy="320040"/>
-          </a:xfrm>
-          <a:prstGeom prst="rect">
-            <a:avLst/>
-          </a:prstGeom>
-          <a:noFill/>
-          <a:ln/>
-        </p:spPr>
-        <p:txBody>
-          <a:bodyPr wrap="square" lIns="0" tIns="0" rIns="0" bIns="0" rtlCol="0" anchor="ctr"/>
-          <a:lstStyle/>
-          <a:p>
-            <a:pPr indent="0" marL="0">
-              <a:buNone/>
-            </a:pPr>
-            <a:r>
-              <a:rPr lang="en-US" sz="1300" dirty="0">
-                <a:solidFill>
-                  <a:srgbClr val="475569"/>
-                </a:solidFill>
-                <a:latin typeface="Meiryo" pitchFamily="34" charset="0"/>
-                <a:ea typeface="Meiryo" pitchFamily="34" charset="-122"/>
-                <a:cs typeface="Meiryo" pitchFamily="34" charset="-120"/>
-              </a:rPr>
-              <a:t>工数の捉え方とフェーズ分解</a:t>
-            </a:r>
-            <a:endParaRPr lang="en-US" sz="1300" dirty="0"/>
-          </a:p>
-        </p:txBody>
-      </p:sp>
-      <p:sp>
-        <p:nvSpPr>
-          <p:cNvPr id="14" name="Shape 12"/>
-          <p:cNvSpPr/>
-          <p:nvPr/>
-        </p:nvSpPr>
-        <p:spPr>
-          <a:xfrm>
-            <a:off x="731520" y="3657600"/>
-            <a:ext cx="7680960" cy="960120"/>
-          </a:xfrm>
-          <a:prstGeom prst="rect">
-            <a:avLst/>
-          </a:prstGeom>
-          <a:solidFill>
-            <a:srgbClr val="EBF0FA"/>
-          </a:solidFill>
-          <a:ln/>
-          <a:effectLst>
-            <a:outerShdw sx="100000" sy="100000" kx="0" ky="0" algn="bl" rotWithShape="0" blurRad="50800" dist="12700" dir="8100000">
-              <a:srgbClr val="000000">
-                <a:alpha val="8000"/>
-              </a:srgbClr>
-            </a:outerShdw>
-          </a:effectLst>
-        </p:spPr>
-      </p:sp>
-      <p:sp>
-        <p:nvSpPr>
-          <p:cNvPr id="15" name="Shape 13"/>
-          <p:cNvSpPr/>
-          <p:nvPr/>
-        </p:nvSpPr>
-        <p:spPr>
-          <a:xfrm>
-            <a:off x="1005840" y="3840480"/>
-            <a:ext cx="548640" cy="548640"/>
-          </a:xfrm>
-          <a:prstGeom prst="ellipse">
-            <a:avLst/>
-          </a:prstGeom>
-          <a:solidFill>
-            <a:srgbClr val="1B2A4A"/>
-          </a:solidFill>
-          <a:ln/>
-        </p:spPr>
-      </p:sp>
-      <p:sp>
-        <p:nvSpPr>
-          <p:cNvPr id="16" name="Text 14"/>
-          <p:cNvSpPr/>
-          <p:nvPr/>
-        </p:nvSpPr>
-        <p:spPr>
-          <a:xfrm>
-            <a:off x="1005840" y="3840480"/>
-            <a:ext cx="548640" cy="548640"/>
-          </a:xfrm>
-          <a:prstGeom prst="rect">
-            <a:avLst/>
-          </a:prstGeom>
-          <a:noFill/>
-          <a:ln/>
-        </p:spPr>
-        <p:txBody>
-          <a:bodyPr wrap="square" rtlCol="0" anchor="ctr"/>
-          <a:lstStyle/>
-          <a:p>
-            <a:pPr algn="ctr" indent="0" marL="0">
-              <a:buNone/>
-            </a:pPr>
-            <a:r>
-              <a:rPr lang="en-US" sz="2000" b="1" dirty="0">
-                <a:solidFill>
-                  <a:srgbClr val="FFFFFF"/>
-                </a:solidFill>
-                <a:latin typeface="Arial" pitchFamily="34" charset="0"/>
-                <a:ea typeface="Arial" pitchFamily="34" charset="-122"/>
-                <a:cs typeface="Arial" pitchFamily="34" charset="-120"/>
-              </a:rPr>
-              <a:t>3</a:t>
-            </a:r>
-            <a:endParaRPr lang="en-US" sz="2000" dirty="0"/>
-          </a:p>
-        </p:txBody>
-      </p:sp>
-      <p:sp>
-        <p:nvSpPr>
-          <p:cNvPr id="17" name="Text 15"/>
-          <p:cNvSpPr/>
-          <p:nvPr/>
-        </p:nvSpPr>
-        <p:spPr>
-          <a:xfrm>
-            <a:off x="1828800" y="3749040"/>
-            <a:ext cx="5943600" cy="411480"/>
-          </a:xfrm>
-          <a:prstGeom prst="rect">
-            <a:avLst/>
-          </a:prstGeom>
-          <a:noFill/>
-          <a:ln/>
-        </p:spPr>
-        <p:txBody>
-          <a:bodyPr wrap="square" lIns="0" tIns="0" rIns="0" bIns="0" rtlCol="0" anchor="ctr"/>
-          <a:lstStyle/>
-          <a:p>
-            <a:pPr indent="0" marL="0">
-              <a:buNone/>
-            </a:pPr>
-            <a:r>
-              <a:rPr lang="en-US" sz="1800" b="1" dirty="0">
-                <a:solidFill>
-                  <a:srgbClr val="1E293B"/>
-                </a:solidFill>
-                <a:latin typeface="Meiryo" pitchFamily="34" charset="0"/>
-                <a:ea typeface="Meiryo" pitchFamily="34" charset="-122"/>
-                <a:cs typeface="Meiryo" pitchFamily="34" charset="-120"/>
-              </a:rPr>
-              <a:t>透明性のための工夫</a:t>
-            </a:r>
-            <a:endParaRPr lang="en-US" sz="1800" dirty="0"/>
-          </a:p>
-        </p:txBody>
-      </p:sp>
-      <p:sp>
-        <p:nvSpPr>
-          <p:cNvPr id="18" name="Text 16"/>
-          <p:cNvSpPr/>
-          <p:nvPr/>
-        </p:nvSpPr>
-        <p:spPr>
-          <a:xfrm>
-            <a:off x="1828800" y="4160520"/>
-            <a:ext cx="5943600" cy="320040"/>
-          </a:xfrm>
-          <a:prstGeom prst="rect">
-            <a:avLst/>
-          </a:prstGeom>
-          <a:noFill/>
-          <a:ln/>
-        </p:spPr>
-        <p:txBody>
-          <a:bodyPr wrap="square" lIns="0" tIns="0" rIns="0" bIns="0" rtlCol="0" anchor="ctr"/>
-          <a:lstStyle/>
-          <a:p>
-            <a:pPr indent="0" marL="0">
-              <a:buNone/>
-            </a:pPr>
-            <a:r>
-              <a:rPr lang="en-US" sz="1300" dirty="0">
-                <a:solidFill>
-                  <a:srgbClr val="475569"/>
-                </a:solidFill>
-                <a:latin typeface="Meiryo" pitchFamily="34" charset="0"/>
-                <a:ea typeface="Meiryo" pitchFamily="34" charset="-122"/>
-                <a:cs typeface="Meiryo" pitchFamily="34" charset="-120"/>
-              </a:rPr>
-              <a:t>リスクと費用を事前に共有する</a:t>
-            </a:r>
-            <a:endParaRPr lang="en-US" sz="1300" dirty="0"/>
-          </a:p>
-        </p:txBody>
-      </p:sp>
-      <p:sp>
-        <p:nvSpPr>
-          <p:cNvPr id="19" name="Text 17"/>
-          <p:cNvSpPr/>
-          <p:nvPr/>
-        </p:nvSpPr>
-        <p:spPr>
-          <a:xfrm>
-            <a:off x="457200" y="4754880"/>
-            <a:ext cx="8229600" cy="274320"/>
-          </a:xfrm>
-          <a:prstGeom prst="rect">
-            <a:avLst/>
-          </a:prstGeom>
-          <a:noFill/>
-          <a:ln/>
-        </p:spPr>
-        <p:txBody>
-          <a:bodyPr wrap="square" rtlCol="0" anchor="ctr"/>
-          <a:lstStyle/>
-          <a:p>
-            <a:pPr algn="r" indent="0" marL="0">
-              <a:buNone/>
-            </a:pPr>
-            <a:r>
-              <a:rPr lang="en-US" sz="800" dirty="0">
-                <a:solidFill>
-                  <a:srgbClr val="CBD5E1"/>
-                </a:solidFill>
-                <a:latin typeface="Arial" pitchFamily="34" charset="0"/>
-                <a:ea typeface="Arial" pitchFamily="34" charset="-122"/>
-                <a:cs typeface="Arial" pitchFamily="34" charset="-120"/>
-              </a:rPr>
-              <a:t>AI活用開発 見積もりの考え方 | 2</a:t>
-            </a:r>
-            <a:endParaRPr lang="en-US" sz="800" dirty="0"/>
+            <a:endParaRPr lang="en-US" sz="1600" dirty="0"/>
           </a:p>
         </p:txBody>
       </p:sp>
@@ -5029,14 +4963,15 @@
 </p:sld>
 </file>
 
-<file path=ppt/slides/slide3.xml><?xml version="1.0" encoding="utf-8"?>
+<file path=ppt/slides/slide4.xml><?xml version="1.0" encoding="utf-8"?>
 <p:sld xmlns:a="http://schemas.openxmlformats.org/drawingml/2006/main" xmlns:r="http://schemas.openxmlformats.org/officeDocument/2006/relationships" xmlns:p="http://schemas.openxmlformats.org/presentationml/2006/main">
-  <p:cSld name="Slide 3">
+  <p:cSld name="Slide 4">
     <p:bg>
       <p:bgPr>
         <a:solidFill>
           <a:srgbClr val="FFFFFF"/>
         </a:solidFill>
+        <a:effectLst/>
       </p:bgPr>
     </p:bg>
     <p:spTree>
@@ -5061,8 +4996,8 @@
         </p:nvSpPr>
         <p:spPr>
           <a:xfrm>
-            <a:off x="0" y="0"/>
-            <a:ext cx="3474720" cy="5143500"/>
+            <a:off x="457200" y="320040"/>
+            <a:ext cx="54864" cy="457200"/>
           </a:xfrm>
           <a:prstGeom prst="rect">
             <a:avLst/>
@@ -5072,6 +5007,13 @@
           </a:solidFill>
           <a:ln/>
         </p:spPr>
+        <p:txBody>
+          <a:bodyPr/>
+          <a:lstStyle/>
+          <a:p>
+            <a:endParaRPr lang="ja-JP" altLang="en-US"/>
+          </a:p>
+        </p:txBody>
       </p:sp>
       <p:sp>
         <p:nvSpPr>
@@ -5081,8 +5023,74 @@
         </p:nvSpPr>
         <p:spPr>
           <a:xfrm>
-            <a:off x="0" y="1828800"/>
-            <a:ext cx="3474720" cy="457200"/>
+            <a:off x="685800" y="228600"/>
+            <a:ext cx="7772400" cy="594360"/>
+          </a:xfrm>
+          <a:prstGeom prst="rect">
+            <a:avLst/>
+          </a:prstGeom>
+          <a:noFill/>
+          <a:ln/>
+        </p:spPr>
+        <p:txBody>
+          <a:bodyPr wrap="square" lIns="0" tIns="0" rIns="0" bIns="0" rtlCol="0" anchor="ctr"/>
+          <a:lstStyle/>
+          <a:p>
+            <a:pPr marL="0" indent="0">
+              <a:buNone/>
+            </a:pPr>
+            <a:r>
+              <a:rPr lang="en-US" sz="2200" b="1" dirty="0">
+                <a:solidFill>
+                  <a:srgbClr val="1E293B"/>
+                </a:solidFill>
+                <a:latin typeface="Meiryo" pitchFamily="34" charset="0"/>
+                <a:ea typeface="Meiryo" pitchFamily="34" charset="-122"/>
+                <a:cs typeface="Meiryo" pitchFamily="34" charset="-120"/>
+              </a:rPr>
+              <a:t>1. AIが「コードを書く時間」を肩代わりした</a:t>
+            </a:r>
+            <a:endParaRPr lang="en-US" sz="2200" dirty="0"/>
+          </a:p>
+        </p:txBody>
+      </p:sp>
+      <p:sp>
+        <p:nvSpPr>
+          <p:cNvPr id="4" name="Shape 2"/>
+          <p:cNvSpPr/>
+          <p:nvPr/>
+        </p:nvSpPr>
+        <p:spPr>
+          <a:xfrm>
+            <a:off x="685800" y="914400"/>
+            <a:ext cx="1371600" cy="320040"/>
+          </a:xfrm>
+          <a:prstGeom prst="rect">
+            <a:avLst/>
+          </a:prstGeom>
+          <a:solidFill>
+            <a:srgbClr val="1B2A4A"/>
+          </a:solidFill>
+          <a:ln/>
+        </p:spPr>
+        <p:txBody>
+          <a:bodyPr/>
+          <a:lstStyle/>
+          <a:p>
+            <a:endParaRPr lang="ja-JP" altLang="en-US"/>
+          </a:p>
+        </p:txBody>
+      </p:sp>
+      <p:sp>
+        <p:nvSpPr>
+          <p:cNvPr id="5" name="Text 3"/>
+          <p:cNvSpPr/>
+          <p:nvPr/>
+        </p:nvSpPr>
+        <p:spPr>
+          <a:xfrm>
+            <a:off x="685800" y="914400"/>
+            <a:ext cx="1371600" cy="320040"/>
           </a:xfrm>
           <a:prstGeom prst="rect">
             <a:avLst/>
@@ -5094,240 +5102,345 @@
           <a:bodyPr wrap="square" rtlCol="0" anchor="ctr"/>
           <a:lstStyle/>
           <a:p>
-            <a:pPr algn="ctr" indent="0" marL="0">
+            <a:pPr marL="0" indent="0" algn="ctr">
               <a:buNone/>
             </a:pPr>
             <a:r>
-              <a:rPr lang="en-US" sz="1800" b="1" spc="600" kern="0" dirty="0">
+              <a:rPr lang="en-US" sz="1100" b="1" dirty="0">
                 <a:solidFill>
                   <a:srgbClr val="FFFFFF"/>
+                </a:solidFill>
+                <a:latin typeface="Meiryo" pitchFamily="34" charset="0"/>
+                <a:ea typeface="Meiryo" pitchFamily="34" charset="-122"/>
+                <a:cs typeface="Meiryo" pitchFamily="34" charset="-120"/>
+              </a:rPr>
+              <a:t>前提の変化</a:t>
+            </a:r>
+            <a:endParaRPr lang="en-US" sz="1100" dirty="0"/>
+          </a:p>
+        </p:txBody>
+      </p:sp>
+      <p:sp>
+        <p:nvSpPr>
+          <p:cNvPr id="6" name="Shape 4"/>
+          <p:cNvSpPr/>
+          <p:nvPr/>
+        </p:nvSpPr>
+        <p:spPr>
+          <a:xfrm>
+            <a:off x="7132320" y="822960"/>
+            <a:ext cx="1188720" cy="1188720"/>
+          </a:xfrm>
+          <a:prstGeom prst="ellipse">
+            <a:avLst/>
+          </a:prstGeom>
+          <a:solidFill>
+            <a:srgbClr val="EBF0FA"/>
+          </a:solidFill>
+          <a:ln/>
+        </p:spPr>
+        <p:txBody>
+          <a:bodyPr/>
+          <a:lstStyle/>
+          <a:p>
+            <a:endParaRPr lang="ja-JP" altLang="en-US"/>
+          </a:p>
+        </p:txBody>
+      </p:sp>
+      <p:pic>
+        <p:nvPicPr>
+          <p:cNvPr id="7" name="Image 0" descr="preencoded.png"/>
+          <p:cNvPicPr>
+            <a:picLocks noChangeAspect="1"/>
+          </p:cNvPicPr>
+          <p:nvPr/>
+        </p:nvPicPr>
+        <p:blipFill>
+          <a:blip r:embed="rId3"/>
+          <a:stretch>
+            <a:fillRect/>
+          </a:stretch>
+        </p:blipFill>
+        <p:spPr>
+          <a:xfrm>
+            <a:off x="7406640" y="1097280"/>
+            <a:ext cx="640080" cy="640080"/>
+          </a:xfrm>
+          <a:prstGeom prst="rect">
+            <a:avLst/>
+          </a:prstGeom>
+        </p:spPr>
+      </p:pic>
+      <p:sp>
+        <p:nvSpPr>
+          <p:cNvPr id="8" name="Shape 5"/>
+          <p:cNvSpPr/>
+          <p:nvPr/>
+        </p:nvSpPr>
+        <p:spPr>
+          <a:xfrm>
+            <a:off x="685800" y="1463040"/>
+            <a:ext cx="6126480" cy="2377440"/>
+          </a:xfrm>
+          <a:prstGeom prst="rect">
+            <a:avLst/>
+          </a:prstGeom>
+          <a:solidFill>
+            <a:srgbClr val="EBF0FA"/>
+          </a:solidFill>
+          <a:ln/>
+          <a:effectLst>
+            <a:outerShdw blurRad="50800" dist="12700" dir="8100000" algn="bl" rotWithShape="0">
+              <a:srgbClr val="000000">
+                <a:alpha val="8000"/>
+              </a:srgbClr>
+            </a:outerShdw>
+          </a:effectLst>
+        </p:spPr>
+        <p:txBody>
+          <a:bodyPr/>
+          <a:lstStyle/>
+          <a:p>
+            <a:endParaRPr lang="ja-JP" altLang="en-US"/>
+          </a:p>
+        </p:txBody>
+      </p:sp>
+      <p:sp>
+        <p:nvSpPr>
+          <p:cNvPr id="9" name="Shape 6"/>
+          <p:cNvSpPr/>
+          <p:nvPr/>
+        </p:nvSpPr>
+        <p:spPr>
+          <a:xfrm>
+            <a:off x="685800" y="1463040"/>
+            <a:ext cx="54864" cy="2377440"/>
+          </a:xfrm>
+          <a:prstGeom prst="rect">
+            <a:avLst/>
+          </a:prstGeom>
+          <a:solidFill>
+            <a:srgbClr val="2563EB"/>
+          </a:solidFill>
+          <a:ln/>
+        </p:spPr>
+        <p:txBody>
+          <a:bodyPr/>
+          <a:lstStyle/>
+          <a:p>
+            <a:endParaRPr lang="ja-JP" altLang="en-US"/>
+          </a:p>
+        </p:txBody>
+      </p:sp>
+      <p:sp>
+        <p:nvSpPr>
+          <p:cNvPr id="10" name="Text 7"/>
+          <p:cNvSpPr/>
+          <p:nvPr/>
+        </p:nvSpPr>
+        <p:spPr>
+          <a:xfrm>
+            <a:off x="1005840" y="1600200"/>
+            <a:ext cx="5486400" cy="2011680"/>
+          </a:xfrm>
+          <a:prstGeom prst="rect">
+            <a:avLst/>
+          </a:prstGeom>
+          <a:noFill/>
+          <a:ln/>
+        </p:spPr>
+        <p:txBody>
+          <a:bodyPr wrap="square" rtlCol="0" anchor="t"/>
+          <a:lstStyle/>
+          <a:p>
+            <a:pPr marL="342900" indent="-342900">
+              <a:spcAft>
+                <a:spcPts val="800"/>
+              </a:spcAft>
+              <a:buSzPct val="100000"/>
+              <a:buChar char="•"/>
+            </a:pPr>
+            <a:r>
+              <a:rPr lang="en-US" sz="1400" dirty="0">
+                <a:solidFill>
+                  <a:srgbClr val="1E293B"/>
+                </a:solidFill>
+                <a:latin typeface="Meiryo" pitchFamily="34" charset="0"/>
+                <a:ea typeface="Meiryo" pitchFamily="34" charset="-122"/>
+                <a:cs typeface="Meiryo" pitchFamily="34" charset="-120"/>
+              </a:rPr>
+              <a:t>従来の見積もりは、コードを書く時間が工数の6〜7割を占めていた</a:t>
+            </a:r>
+            <a:endParaRPr lang="en-US" sz="1400" dirty="0"/>
+          </a:p>
+          <a:p>
+            <a:pPr marL="342900" indent="-342900">
+              <a:spcAft>
+                <a:spcPts val="800"/>
+              </a:spcAft>
+              <a:buSzPct val="100000"/>
+              <a:buChar char="•"/>
+            </a:pPr>
+            <a:r>
+              <a:rPr lang="en-US" sz="1400" dirty="0">
+                <a:solidFill>
+                  <a:srgbClr val="1E293B"/>
+                </a:solidFill>
+                <a:latin typeface="Meiryo" pitchFamily="34" charset="0"/>
+                <a:ea typeface="Meiryo" pitchFamily="34" charset="-122"/>
+                <a:cs typeface="Meiryo" pitchFamily="34" charset="-120"/>
+              </a:rPr>
+              <a:t>AIがコーディングを担うことで、その時間はほぼゼロに近づいた</a:t>
+            </a:r>
+            <a:endParaRPr lang="en-US" sz="1400" dirty="0"/>
+          </a:p>
+          <a:p>
+            <a:pPr marL="342900" indent="-342900">
+              <a:spcAft>
+                <a:spcPts val="800"/>
+              </a:spcAft>
+              <a:buSzPct val="100000"/>
+              <a:buChar char="•"/>
+            </a:pPr>
+            <a:r>
+              <a:rPr lang="en-US" sz="1400" dirty="0">
+                <a:solidFill>
+                  <a:srgbClr val="1E293B"/>
+                </a:solidFill>
+                <a:latin typeface="Meiryo" pitchFamily="34" charset="0"/>
+                <a:ea typeface="Meiryo" pitchFamily="34" charset="-122"/>
+                <a:cs typeface="Meiryo" pitchFamily="34" charset="-120"/>
+              </a:rPr>
+              <a:t>一方で設計・検証・環境設定の重要性は、むしろ高まっている</a:t>
+            </a:r>
+            <a:endParaRPr lang="en-US" sz="1400" dirty="0"/>
+          </a:p>
+          <a:p>
+            <a:pPr marL="342900" indent="-342900">
+              <a:spcAft>
+                <a:spcPts val="800"/>
+              </a:spcAft>
+              <a:buSzPct val="100000"/>
+              <a:buChar char="•"/>
+            </a:pPr>
+            <a:r>
+              <a:rPr lang="en-US" sz="1400" dirty="0">
+                <a:solidFill>
+                  <a:srgbClr val="1E293B"/>
+                </a:solidFill>
+                <a:latin typeface="Meiryo" pitchFamily="34" charset="0"/>
+                <a:ea typeface="Meiryo" pitchFamily="34" charset="-122"/>
+                <a:cs typeface="Meiryo" pitchFamily="34" charset="-120"/>
+              </a:rPr>
+              <a:t>人が担うのは「正しく動かすための判断と確認」へとシフトした</a:t>
+            </a:r>
+            <a:endParaRPr lang="en-US" sz="1400" dirty="0"/>
+          </a:p>
+        </p:txBody>
+      </p:sp>
+      <p:sp>
+        <p:nvSpPr>
+          <p:cNvPr id="11" name="Text 8"/>
+          <p:cNvSpPr/>
+          <p:nvPr/>
+        </p:nvSpPr>
+        <p:spPr>
+          <a:xfrm>
+            <a:off x="1005840" y="4096512"/>
+            <a:ext cx="5486400" cy="457200"/>
+          </a:xfrm>
+          <a:prstGeom prst="rect">
+            <a:avLst/>
+          </a:prstGeom>
+          <a:noFill/>
+          <a:ln/>
+        </p:spPr>
+        <p:txBody>
+          <a:bodyPr wrap="square" lIns="0" tIns="0" rIns="0" bIns="0" rtlCol="0" anchor="ctr"/>
+          <a:lstStyle/>
+          <a:p>
+            <a:pPr marL="0" indent="0">
+              <a:buNone/>
+            </a:pPr>
+            <a:r>
+              <a:rPr lang="en-US" sz="1400" b="1" dirty="0">
+                <a:solidFill>
+                  <a:srgbClr val="1B2A4A"/>
+                </a:solidFill>
+                <a:latin typeface="Meiryo" pitchFamily="34" charset="0"/>
+                <a:ea typeface="Meiryo" pitchFamily="34" charset="-122"/>
+                <a:cs typeface="Meiryo" pitchFamily="34" charset="-120"/>
+              </a:rPr>
+              <a:t>→ エンジニアの価値は実装量ではなく、判断・検証・設計の質へ移行している</a:t>
+            </a:r>
+            <a:endParaRPr lang="en-US" sz="1400" dirty="0"/>
+          </a:p>
+        </p:txBody>
+      </p:sp>
+      <p:sp>
+        <p:nvSpPr>
+          <p:cNvPr id="13" name="Text 10"/>
+          <p:cNvSpPr/>
+          <p:nvPr/>
+        </p:nvSpPr>
+        <p:spPr>
+          <a:xfrm>
+            <a:off x="640080" y="3977640"/>
+            <a:ext cx="7863840" cy="347472"/>
+          </a:xfrm>
+          <a:prstGeom prst="rect">
+            <a:avLst/>
+          </a:prstGeom>
+          <a:noFill/>
+          <a:ln/>
+        </p:spPr>
+        <p:txBody>
+          <a:bodyPr wrap="square" rtlCol="0" anchor="ctr"/>
+          <a:lstStyle/>
+          <a:p>
+            <a:pPr marL="0" indent="0">
+              <a:buNone/>
+            </a:pPr>
+            <a:endParaRPr lang="en-US" sz="1000" dirty="0"/>
+          </a:p>
+        </p:txBody>
+      </p:sp>
+      <p:sp>
+        <p:nvSpPr>
+          <p:cNvPr id="14" name="Text 11"/>
+          <p:cNvSpPr/>
+          <p:nvPr/>
+        </p:nvSpPr>
+        <p:spPr>
+          <a:xfrm>
+            <a:off x="457200" y="4754880"/>
+            <a:ext cx="8229600" cy="274320"/>
+          </a:xfrm>
+          <a:prstGeom prst="rect">
+            <a:avLst/>
+          </a:prstGeom>
+          <a:noFill/>
+          <a:ln/>
+        </p:spPr>
+        <p:txBody>
+          <a:bodyPr wrap="square" rtlCol="0" anchor="ctr"/>
+          <a:lstStyle/>
+          <a:p>
+            <a:pPr marL="0" indent="0" algn="r">
+              <a:buNone/>
+            </a:pPr>
+            <a:r>
+              <a:rPr lang="en-US" sz="800" dirty="0">
+                <a:solidFill>
+                  <a:srgbClr val="CBD5E1"/>
                 </a:solidFill>
                 <a:latin typeface="Arial" pitchFamily="34" charset="0"/>
                 <a:ea typeface="Arial" pitchFamily="34" charset="-122"/>
                 <a:cs typeface="Arial" pitchFamily="34" charset="-120"/>
               </a:rPr>
-              <a:t>PART</a:t>
-            </a:r>
-            <a:endParaRPr lang="en-US" sz="1800" dirty="0"/>
-          </a:p>
-        </p:txBody>
-      </p:sp>
-      <p:sp>
-        <p:nvSpPr>
-          <p:cNvPr id="4" name="Text 2"/>
-          <p:cNvSpPr/>
-          <p:nvPr/>
-        </p:nvSpPr>
-        <p:spPr>
-          <a:xfrm>
-            <a:off x="0" y="2240280"/>
-            <a:ext cx="3474720" cy="548640"/>
-          </a:xfrm>
-          <a:prstGeom prst="rect">
-            <a:avLst/>
-          </a:prstGeom>
-          <a:noFill/>
-          <a:ln/>
-        </p:spPr>
-        <p:txBody>
-          <a:bodyPr wrap="square" rtlCol="0" anchor="ctr"/>
-          <a:lstStyle/>
-          <a:p>
-            <a:pPr algn="ctr" indent="0" marL="0">
-              <a:buNone/>
-            </a:pPr>
-            <a:r>
-              <a:rPr lang="en-US" sz="3200" b="1" dirty="0">
-                <a:solidFill>
-                  <a:srgbClr val="FFFFFF"/>
-                </a:solidFill>
-                <a:latin typeface="Arial" pitchFamily="34" charset="0"/>
-                <a:ea typeface="Arial" pitchFamily="34" charset="-122"/>
-                <a:cs typeface="Arial" pitchFamily="34" charset="-120"/>
-              </a:rPr>
-              <a:t>01</a:t>
-            </a:r>
-            <a:endParaRPr lang="en-US" sz="3200" dirty="0"/>
-          </a:p>
-        </p:txBody>
-      </p:sp>
-      <p:sp>
-        <p:nvSpPr>
-          <p:cNvPr id="5" name="Shape 3"/>
-          <p:cNvSpPr/>
-          <p:nvPr/>
-        </p:nvSpPr>
-        <p:spPr>
-          <a:xfrm>
-            <a:off x="1371600" y="2880360"/>
-            <a:ext cx="731520" cy="0"/>
-          </a:xfrm>
-          <a:prstGeom prst="line">
-            <a:avLst/>
-          </a:prstGeom>
-          <a:noFill/>
-          <a:ln w="38100">
-            <a:solidFill>
-              <a:srgbClr val="FFFFFF"/>
-            </a:solidFill>
-            <a:prstDash val="solid"/>
-          </a:ln>
-        </p:spPr>
-      </p:sp>
-      <p:sp>
-        <p:nvSpPr>
-          <p:cNvPr id="6" name="Shape 4"/>
-          <p:cNvSpPr/>
-          <p:nvPr/>
-        </p:nvSpPr>
-        <p:spPr>
-          <a:xfrm>
-            <a:off x="4206240" y="1371600"/>
-            <a:ext cx="3200400" cy="320040"/>
-          </a:xfrm>
-          <a:prstGeom prst="rect">
-            <a:avLst/>
-          </a:prstGeom>
-          <a:solidFill>
-            <a:srgbClr val="F1F5F9"/>
-          </a:solidFill>
-          <a:ln/>
-        </p:spPr>
-      </p:sp>
-      <p:sp>
-        <p:nvSpPr>
-          <p:cNvPr id="7" name="Text 5"/>
-          <p:cNvSpPr/>
-          <p:nvPr/>
-        </p:nvSpPr>
-        <p:spPr>
-          <a:xfrm>
-            <a:off x="4206240" y="1371600"/>
-            <a:ext cx="3200400" cy="320040"/>
-          </a:xfrm>
-          <a:prstGeom prst="rect">
-            <a:avLst/>
-          </a:prstGeom>
-          <a:noFill/>
-          <a:ln/>
-        </p:spPr>
-        <p:txBody>
-          <a:bodyPr wrap="square" rtlCol="0" anchor="ctr"/>
-          <a:lstStyle/>
-          <a:p>
-            <a:pPr algn="ctr" indent="0" marL="0">
-              <a:buNone/>
-            </a:pPr>
-            <a:r>
-              <a:rPr lang="en-US" sz="900" spc="200" kern="0" dirty="0">
-                <a:solidFill>
-                  <a:srgbClr val="475569"/>
-                </a:solidFill>
-                <a:latin typeface="Arial" pitchFamily="34" charset="0"/>
-                <a:ea typeface="Arial" pitchFamily="34" charset="-122"/>
-                <a:cs typeface="Arial" pitchFamily="34" charset="-120"/>
-              </a:rPr>
-              <a:t>SECTION 1</a:t>
-            </a:r>
-            <a:endParaRPr lang="en-US" sz="900" dirty="0"/>
-          </a:p>
-        </p:txBody>
-      </p:sp>
-      <p:sp>
-        <p:nvSpPr>
-          <p:cNvPr id="8" name="Text 6"/>
-          <p:cNvSpPr/>
-          <p:nvPr/>
-        </p:nvSpPr>
-        <p:spPr>
-          <a:xfrm>
-            <a:off x="4114800" y="1920240"/>
-            <a:ext cx="4572000" cy="822960"/>
-          </a:xfrm>
-          <a:prstGeom prst="rect">
-            <a:avLst/>
-          </a:prstGeom>
-          <a:noFill/>
-          <a:ln/>
-        </p:spPr>
-        <p:txBody>
-          <a:bodyPr wrap="square" lIns="0" tIns="0" rIns="0" bIns="0" rtlCol="0" anchor="ctr"/>
-          <a:lstStyle/>
-          <a:p>
-            <a:pPr indent="0" marL="0">
-              <a:buNone/>
-            </a:pPr>
-            <a:r>
-              <a:rPr lang="en-US" sz="3800" b="1" dirty="0">
-                <a:solidFill>
-                  <a:srgbClr val="1E293B"/>
-                </a:solidFill>
-                <a:latin typeface="Meiryo" pitchFamily="34" charset="0"/>
-                <a:ea typeface="Meiryo" pitchFamily="34" charset="-122"/>
-                <a:cs typeface="Meiryo" pitchFamily="34" charset="-120"/>
-              </a:rPr>
-              <a:t>前提の変化</a:t>
-            </a:r>
-            <a:endParaRPr lang="en-US" sz="3800" dirty="0"/>
-          </a:p>
-        </p:txBody>
-      </p:sp>
-      <p:sp>
-        <p:nvSpPr>
-          <p:cNvPr id="9" name="Shape 7"/>
-          <p:cNvSpPr/>
-          <p:nvPr/>
-        </p:nvSpPr>
-        <p:spPr>
-          <a:xfrm>
-            <a:off x="4114800" y="2926080"/>
-            <a:ext cx="54864" cy="822960"/>
-          </a:xfrm>
-          <a:prstGeom prst="rect">
-            <a:avLst/>
-          </a:prstGeom>
-          <a:solidFill>
-            <a:srgbClr val="1B2A4A"/>
-          </a:solidFill>
-          <a:ln/>
-        </p:spPr>
-      </p:sp>
-      <p:sp>
-        <p:nvSpPr>
-          <p:cNvPr id="10" name="Text 8"/>
-          <p:cNvSpPr/>
-          <p:nvPr/>
-        </p:nvSpPr>
-        <p:spPr>
-          <a:xfrm>
-            <a:off x="4389120" y="2926080"/>
-            <a:ext cx="4114800" cy="822960"/>
-          </a:xfrm>
-          <a:prstGeom prst="rect">
-            <a:avLst/>
-          </a:prstGeom>
-          <a:noFill/>
-          <a:ln/>
-        </p:spPr>
-        <p:txBody>
-          <a:bodyPr wrap="square" lIns="0" tIns="0" rIns="0" bIns="0" rtlCol="0" anchor="ctr"/>
-          <a:lstStyle/>
-          <a:p>
-            <a:pPr indent="0" marL="0">
-              <a:buNone/>
-            </a:pPr>
-            <a:r>
-              <a:rPr lang="en-US" sz="1600" dirty="0">
-                <a:solidFill>
-                  <a:srgbClr val="475569"/>
-                </a:solidFill>
-                <a:latin typeface="Meiryo" pitchFamily="34" charset="0"/>
-                <a:ea typeface="Meiryo" pitchFamily="34" charset="-122"/>
-                <a:cs typeface="Meiryo" pitchFamily="34" charset="-120"/>
-              </a:rPr>
-              <a:t>AI開発で見積もりの何が変わったのか</a:t>
-            </a:r>
-            <a:endParaRPr lang="en-US" sz="1600" dirty="0"/>
+              <a:t>AI活用開発 見積もりの考え方 | 4</a:t>
+            </a:r>
+            <a:endParaRPr lang="en-US" sz="800" dirty="0"/>
           </a:p>
         </p:txBody>
       </p:sp>
@@ -5339,14 +5452,15 @@
 </p:sld>
 </file>
 
-<file path=ppt/slides/slide4.xml><?xml version="1.0" encoding="utf-8"?>
+<file path=ppt/slides/slide5.xml><?xml version="1.0" encoding="utf-8"?>
 <p:sld xmlns:a="http://schemas.openxmlformats.org/drawingml/2006/main" xmlns:r="http://schemas.openxmlformats.org/officeDocument/2006/relationships" xmlns:p="http://schemas.openxmlformats.org/presentationml/2006/main">
-  <p:cSld name="Slide 4">
+  <p:cSld name="Slide 5">
     <p:bg>
       <p:bgPr>
         <a:solidFill>
           <a:srgbClr val="FFFFFF"/>
         </a:solidFill>
+        <a:effectLst/>
       </p:bgPr>
     </p:bg>
     <p:spTree>
@@ -5371,8 +5485,8 @@
         </p:nvSpPr>
         <p:spPr>
           <a:xfrm>
-            <a:off x="457200" y="320040"/>
-            <a:ext cx="54864" cy="457200"/>
+            <a:off x="0" y="0"/>
+            <a:ext cx="3474720" cy="5143500"/>
           </a:xfrm>
           <a:prstGeom prst="rect">
             <a:avLst/>
@@ -5382,6 +5496,13 @@
           </a:solidFill>
           <a:ln/>
         </p:spPr>
+        <p:txBody>
+          <a:bodyPr/>
+          <a:lstStyle/>
+          <a:p>
+            <a:endParaRPr lang="ja-JP" altLang="en-US"/>
+          </a:p>
+        </p:txBody>
       </p:sp>
       <p:sp>
         <p:nvSpPr>
@@ -5391,8 +5512,182 @@
         </p:nvSpPr>
         <p:spPr>
           <a:xfrm>
-            <a:off x="685800" y="228600"/>
-            <a:ext cx="7772400" cy="594360"/>
+            <a:off x="0" y="1828800"/>
+            <a:ext cx="3474720" cy="457200"/>
+          </a:xfrm>
+          <a:prstGeom prst="rect">
+            <a:avLst/>
+          </a:prstGeom>
+          <a:noFill/>
+          <a:ln/>
+        </p:spPr>
+        <p:txBody>
+          <a:bodyPr wrap="square" rtlCol="0" anchor="ctr"/>
+          <a:lstStyle/>
+          <a:p>
+            <a:pPr marL="0" indent="0" algn="ctr">
+              <a:buNone/>
+            </a:pPr>
+            <a:r>
+              <a:rPr lang="en-US" sz="1800" b="1" kern="0" spc="600" dirty="0">
+                <a:solidFill>
+                  <a:srgbClr val="FFFFFF"/>
+                </a:solidFill>
+                <a:latin typeface="Arial" pitchFamily="34" charset="0"/>
+                <a:ea typeface="Arial" pitchFamily="34" charset="-122"/>
+                <a:cs typeface="Arial" pitchFamily="34" charset="-120"/>
+              </a:rPr>
+              <a:t>PART</a:t>
+            </a:r>
+            <a:endParaRPr lang="en-US" sz="1800" dirty="0"/>
+          </a:p>
+        </p:txBody>
+      </p:sp>
+      <p:sp>
+        <p:nvSpPr>
+          <p:cNvPr id="4" name="Text 2"/>
+          <p:cNvSpPr/>
+          <p:nvPr/>
+        </p:nvSpPr>
+        <p:spPr>
+          <a:xfrm>
+            <a:off x="0" y="2240280"/>
+            <a:ext cx="3474720" cy="548640"/>
+          </a:xfrm>
+          <a:prstGeom prst="rect">
+            <a:avLst/>
+          </a:prstGeom>
+          <a:noFill/>
+          <a:ln/>
+        </p:spPr>
+        <p:txBody>
+          <a:bodyPr wrap="square" rtlCol="0" anchor="ctr"/>
+          <a:lstStyle/>
+          <a:p>
+            <a:pPr marL="0" indent="0" algn="ctr">
+              <a:buNone/>
+            </a:pPr>
+            <a:r>
+              <a:rPr lang="en-US" sz="3200" b="1" dirty="0">
+                <a:solidFill>
+                  <a:srgbClr val="FFFFFF"/>
+                </a:solidFill>
+                <a:latin typeface="Arial" pitchFamily="34" charset="0"/>
+                <a:ea typeface="Arial" pitchFamily="34" charset="-122"/>
+                <a:cs typeface="Arial" pitchFamily="34" charset="-120"/>
+              </a:rPr>
+              <a:t>02</a:t>
+            </a:r>
+            <a:endParaRPr lang="en-US" sz="3200" dirty="0"/>
+          </a:p>
+        </p:txBody>
+      </p:sp>
+      <p:sp>
+        <p:nvSpPr>
+          <p:cNvPr id="5" name="Shape 3"/>
+          <p:cNvSpPr/>
+          <p:nvPr/>
+        </p:nvSpPr>
+        <p:spPr>
+          <a:xfrm>
+            <a:off x="1371600" y="2880360"/>
+            <a:ext cx="731520" cy="0"/>
+          </a:xfrm>
+          <a:prstGeom prst="line">
+            <a:avLst/>
+          </a:prstGeom>
+          <a:noFill/>
+          <a:ln w="38100">
+            <a:solidFill>
+              <a:srgbClr val="FFFFFF"/>
+            </a:solidFill>
+            <a:prstDash val="solid"/>
+          </a:ln>
+        </p:spPr>
+        <p:txBody>
+          <a:bodyPr/>
+          <a:lstStyle/>
+          <a:p>
+            <a:endParaRPr lang="ja-JP" altLang="en-US"/>
+          </a:p>
+        </p:txBody>
+      </p:sp>
+      <p:sp>
+        <p:nvSpPr>
+          <p:cNvPr id="6" name="Shape 4"/>
+          <p:cNvSpPr/>
+          <p:nvPr/>
+        </p:nvSpPr>
+        <p:spPr>
+          <a:xfrm>
+            <a:off x="4206240" y="1371600"/>
+            <a:ext cx="3200400" cy="320040"/>
+          </a:xfrm>
+          <a:prstGeom prst="rect">
+            <a:avLst/>
+          </a:prstGeom>
+          <a:solidFill>
+            <a:srgbClr val="F1F5F9"/>
+          </a:solidFill>
+          <a:ln/>
+        </p:spPr>
+        <p:txBody>
+          <a:bodyPr/>
+          <a:lstStyle/>
+          <a:p>
+            <a:endParaRPr lang="ja-JP" altLang="en-US"/>
+          </a:p>
+        </p:txBody>
+      </p:sp>
+      <p:sp>
+        <p:nvSpPr>
+          <p:cNvPr id="7" name="Text 5"/>
+          <p:cNvSpPr/>
+          <p:nvPr/>
+        </p:nvSpPr>
+        <p:spPr>
+          <a:xfrm>
+            <a:off x="4206240" y="1371600"/>
+            <a:ext cx="3200400" cy="320040"/>
+          </a:xfrm>
+          <a:prstGeom prst="rect">
+            <a:avLst/>
+          </a:prstGeom>
+          <a:noFill/>
+          <a:ln/>
+        </p:spPr>
+        <p:txBody>
+          <a:bodyPr wrap="square" rtlCol="0" anchor="ctr"/>
+          <a:lstStyle/>
+          <a:p>
+            <a:pPr marL="0" indent="0" algn="ctr">
+              <a:buNone/>
+            </a:pPr>
+            <a:r>
+              <a:rPr lang="en-US" sz="900" kern="0" spc="200" dirty="0">
+                <a:solidFill>
+                  <a:srgbClr val="475569"/>
+                </a:solidFill>
+                <a:latin typeface="Arial" pitchFamily="34" charset="0"/>
+                <a:ea typeface="Arial" pitchFamily="34" charset="-122"/>
+                <a:cs typeface="Arial" pitchFamily="34" charset="-120"/>
+              </a:rPr>
+              <a:t>SECTION 2</a:t>
+            </a:r>
+            <a:endParaRPr lang="en-US" sz="900" dirty="0"/>
+          </a:p>
+        </p:txBody>
+      </p:sp>
+      <p:sp>
+        <p:nvSpPr>
+          <p:cNvPr id="8" name="Text 6"/>
+          <p:cNvSpPr/>
+          <p:nvPr/>
+        </p:nvSpPr>
+        <p:spPr>
+          <a:xfrm>
+            <a:off x="4114800" y="1920240"/>
+            <a:ext cx="4572000" cy="822960"/>
           </a:xfrm>
           <a:prstGeom prst="rect">
             <a:avLst/>
@@ -5404,11 +5699,11 @@
           <a:bodyPr wrap="square" lIns="0" tIns="0" rIns="0" bIns="0" rtlCol="0" anchor="ctr"/>
           <a:lstStyle/>
           <a:p>
-            <a:pPr indent="0" marL="0">
+            <a:pPr marL="0" indent="0">
               <a:buNone/>
             </a:pPr>
             <a:r>
-              <a:rPr lang="en-US" sz="2200" b="1" dirty="0">
+              <a:rPr lang="en-US" sz="3800" b="1" dirty="0">
                 <a:solidFill>
                   <a:srgbClr val="1E293B"/>
                 </a:solidFill>
@@ -5416,22 +5711,22 @@
                 <a:ea typeface="Meiryo" pitchFamily="34" charset="-122"/>
                 <a:cs typeface="Meiryo" pitchFamily="34" charset="-120"/>
               </a:rPr>
-              <a:t>1. AIが「コードを書く時間」を肩代わりした</a:t>
-            </a:r>
-            <a:endParaRPr lang="en-US" sz="2200" dirty="0"/>
-          </a:p>
-        </p:txBody>
-      </p:sp>
-      <p:sp>
-        <p:nvSpPr>
-          <p:cNvPr id="4" name="Shape 2"/>
-          <p:cNvSpPr/>
-          <p:nvPr/>
-        </p:nvSpPr>
-        <p:spPr>
-          <a:xfrm>
-            <a:off x="685800" y="914400"/>
-            <a:ext cx="1371600" cy="320040"/>
+              <a:t>見積もりの考え方</a:t>
+            </a:r>
+            <a:endParaRPr lang="en-US" sz="3800" dirty="0"/>
+          </a:p>
+        </p:txBody>
+      </p:sp>
+      <p:sp>
+        <p:nvSpPr>
+          <p:cNvPr id="9" name="Shape 7"/>
+          <p:cNvSpPr/>
+          <p:nvPr/>
+        </p:nvSpPr>
+        <p:spPr>
+          <a:xfrm>
+            <a:off x="4114800" y="2926080"/>
+            <a:ext cx="54864" cy="822960"/>
           </a:xfrm>
           <a:prstGeom prst="rect">
             <a:avLst/>
@@ -5441,366 +5736,50 @@
           </a:solidFill>
           <a:ln/>
         </p:spPr>
-      </p:sp>
-      <p:sp>
-        <p:nvSpPr>
-          <p:cNvPr id="5" name="Text 3"/>
-          <p:cNvSpPr/>
-          <p:nvPr/>
-        </p:nvSpPr>
-        <p:spPr>
-          <a:xfrm>
-            <a:off x="685800" y="914400"/>
-            <a:ext cx="1371600" cy="320040"/>
-          </a:xfrm>
-          <a:prstGeom prst="rect">
-            <a:avLst/>
-          </a:prstGeom>
-          <a:noFill/>
-          <a:ln/>
-        </p:spPr>
-        <p:txBody>
-          <a:bodyPr wrap="square" rtlCol="0" anchor="ctr"/>
-          <a:lstStyle/>
-          <a:p>
-            <a:pPr algn="ctr" indent="0" marL="0">
+        <p:txBody>
+          <a:bodyPr/>
+          <a:lstStyle/>
+          <a:p>
+            <a:endParaRPr lang="ja-JP" altLang="en-US"/>
+          </a:p>
+        </p:txBody>
+      </p:sp>
+      <p:sp>
+        <p:nvSpPr>
+          <p:cNvPr id="10" name="Text 8"/>
+          <p:cNvSpPr/>
+          <p:nvPr/>
+        </p:nvSpPr>
+        <p:spPr>
+          <a:xfrm>
+            <a:off x="4389120" y="2926080"/>
+            <a:ext cx="4114800" cy="822960"/>
+          </a:xfrm>
+          <a:prstGeom prst="rect">
+            <a:avLst/>
+          </a:prstGeom>
+          <a:noFill/>
+          <a:ln/>
+        </p:spPr>
+        <p:txBody>
+          <a:bodyPr wrap="square" lIns="0" tIns="0" rIns="0" bIns="0" rtlCol="0" anchor="ctr"/>
+          <a:lstStyle/>
+          <a:p>
+            <a:pPr marL="0" indent="0">
               <a:buNone/>
             </a:pPr>
             <a:r>
-              <a:rPr lang="en-US" sz="1100" b="1" dirty="0">
-                <a:solidFill>
-                  <a:srgbClr val="FFFFFF"/>
+              <a:rPr lang="en-US" sz="1600" dirty="0">
+                <a:solidFill>
+                  <a:srgbClr val="475569"/>
                 </a:solidFill>
                 <a:latin typeface="Meiryo" pitchFamily="34" charset="0"/>
                 <a:ea typeface="Meiryo" pitchFamily="34" charset="-122"/>
                 <a:cs typeface="Meiryo" pitchFamily="34" charset="-120"/>
               </a:rPr>
-              <a:t>前提の変化</a:t>
-            </a:r>
-            <a:endParaRPr lang="en-US" sz="1100" dirty="0"/>
-          </a:p>
-        </p:txBody>
-      </p:sp>
-      <p:sp>
-        <p:nvSpPr>
-          <p:cNvPr id="6" name="Shape 4"/>
-          <p:cNvSpPr/>
-          <p:nvPr/>
-        </p:nvSpPr>
-        <p:spPr>
-          <a:xfrm>
-            <a:off x="7132320" y="822960"/>
-            <a:ext cx="1188720" cy="1188720"/>
-          </a:xfrm>
-          <a:prstGeom prst="ellipse">
-            <a:avLst/>
-          </a:prstGeom>
-          <a:solidFill>
-            <a:srgbClr val="EBF0FA"/>
-          </a:solidFill>
-          <a:ln/>
-        </p:spPr>
-      </p:sp>
-      <p:pic>
-        <p:nvPicPr>
-          <p:cNvPr id="7" name="Image 0" descr="preencoded.png">    </p:cNvPr>
-          <p:cNvPicPr>
-            <a:picLocks noChangeAspect="1"/>
-          </p:cNvPicPr>
-          <p:nvPr/>
-        </p:nvPicPr>
-        <p:blipFill>
-          <a:blip r:embed="rId1"/>
-          <a:stretch>
-            <a:fillRect/>
-          </a:stretch>
-        </p:blipFill>
-        <p:spPr>
-          <a:xfrm>
-            <a:off x="7406640" y="1097280"/>
-            <a:ext cx="640080" cy="640080"/>
-          </a:xfrm>
-          <a:prstGeom prst="rect">
-            <a:avLst/>
-          </a:prstGeom>
-        </p:spPr>
-      </p:pic>
-      <p:sp>
-        <p:nvSpPr>
-          <p:cNvPr id="8" name="Shape 5"/>
-          <p:cNvSpPr/>
-          <p:nvPr/>
-        </p:nvSpPr>
-        <p:spPr>
-          <a:xfrm>
-            <a:off x="685800" y="1463040"/>
-            <a:ext cx="6126480" cy="2377440"/>
-          </a:xfrm>
-          <a:prstGeom prst="rect">
-            <a:avLst/>
-          </a:prstGeom>
-          <a:solidFill>
-            <a:srgbClr val="EBF0FA"/>
-          </a:solidFill>
-          <a:ln/>
-          <a:effectLst>
-            <a:outerShdw sx="100000" sy="100000" kx="0" ky="0" algn="bl" rotWithShape="0" blurRad="50800" dist="12700" dir="8100000">
-              <a:srgbClr val="000000">
-                <a:alpha val="8000"/>
-              </a:srgbClr>
-            </a:outerShdw>
-          </a:effectLst>
-        </p:spPr>
-      </p:sp>
-      <p:sp>
-        <p:nvSpPr>
-          <p:cNvPr id="9" name="Shape 6"/>
-          <p:cNvSpPr/>
-          <p:nvPr/>
-        </p:nvSpPr>
-        <p:spPr>
-          <a:xfrm>
-            <a:off x="685800" y="1463040"/>
-            <a:ext cx="54864" cy="2377440"/>
-          </a:xfrm>
-          <a:prstGeom prst="rect">
-            <a:avLst/>
-          </a:prstGeom>
-          <a:solidFill>
-            <a:srgbClr val="2563EB"/>
-          </a:solidFill>
-          <a:ln/>
-        </p:spPr>
-      </p:sp>
-      <p:sp>
-        <p:nvSpPr>
-          <p:cNvPr id="10" name="Text 7"/>
-          <p:cNvSpPr/>
-          <p:nvPr/>
-        </p:nvSpPr>
-        <p:spPr>
-          <a:xfrm>
-            <a:off x="1005840" y="1600200"/>
-            <a:ext cx="5486400" cy="2011680"/>
-          </a:xfrm>
-          <a:prstGeom prst="rect">
-            <a:avLst/>
-          </a:prstGeom>
-          <a:noFill/>
-          <a:ln/>
-        </p:spPr>
-        <p:txBody>
-          <a:bodyPr wrap="square" rtlCol="0" anchor="t"/>
-          <a:lstStyle/>
-          <a:p>
-            <a:pPr marL="342900" indent="-342900">
-              <a:spcAft>
-                <a:spcPts val="800"/>
-              </a:spcAft>
-              <a:buSzPct val="100000"/>
-              <a:buChar char="•"/>
-            </a:pPr>
-            <a:r>
-              <a:rPr lang="en-US" sz="1400" dirty="0">
-                <a:solidFill>
-                  <a:srgbClr val="1E293B"/>
-                </a:solidFill>
-                <a:latin typeface="Meiryo" pitchFamily="34" charset="0"/>
-                <a:ea typeface="Meiryo" pitchFamily="34" charset="-122"/>
-                <a:cs typeface="Meiryo" pitchFamily="34" charset="-120"/>
-              </a:rPr>
-              <a:t>従来の見積もりは、コードを書く時間が工数の6〜7割を占めていた</a:t>
-            </a:r>
-            <a:endParaRPr lang="en-US" sz="1400" dirty="0"/>
-          </a:p>
-          <a:p>
-            <a:pPr marL="342900" indent="-342900">
-              <a:spcAft>
-                <a:spcPts val="800"/>
-              </a:spcAft>
-              <a:buSzPct val="100000"/>
-              <a:buChar char="•"/>
-            </a:pPr>
-            <a:r>
-              <a:rPr lang="en-US" sz="1400" dirty="0">
-                <a:solidFill>
-                  <a:srgbClr val="1E293B"/>
-                </a:solidFill>
-                <a:latin typeface="Meiryo" pitchFamily="34" charset="0"/>
-                <a:ea typeface="Meiryo" pitchFamily="34" charset="-122"/>
-                <a:cs typeface="Meiryo" pitchFamily="34" charset="-120"/>
-              </a:rPr>
-              <a:t>AIがコーディングを担うことで、その時間はほぼゼロに近づいた</a:t>
-            </a:r>
-            <a:endParaRPr lang="en-US" sz="1400" dirty="0"/>
-          </a:p>
-          <a:p>
-            <a:pPr marL="342900" indent="-342900">
-              <a:spcAft>
-                <a:spcPts val="800"/>
-              </a:spcAft>
-              <a:buSzPct val="100000"/>
-              <a:buChar char="•"/>
-            </a:pPr>
-            <a:r>
-              <a:rPr lang="en-US" sz="1400" dirty="0">
-                <a:solidFill>
-                  <a:srgbClr val="1E293B"/>
-                </a:solidFill>
-                <a:latin typeface="Meiryo" pitchFamily="34" charset="0"/>
-                <a:ea typeface="Meiryo" pitchFamily="34" charset="-122"/>
-                <a:cs typeface="Meiryo" pitchFamily="34" charset="-120"/>
-              </a:rPr>
-              <a:t>一方で設計・検証・環境設定の重要性は、むしろ高まっている</a:t>
-            </a:r>
-            <a:endParaRPr lang="en-US" sz="1400" dirty="0"/>
-          </a:p>
-          <a:p>
-            <a:pPr marL="342900" indent="-342900">
-              <a:spcAft>
-                <a:spcPts val="800"/>
-              </a:spcAft>
-              <a:buSzPct val="100000"/>
-              <a:buChar char="•"/>
-            </a:pPr>
-            <a:r>
-              <a:rPr lang="en-US" sz="1400" dirty="0">
-                <a:solidFill>
-                  <a:srgbClr val="1E293B"/>
-                </a:solidFill>
-                <a:latin typeface="Meiryo" pitchFamily="34" charset="0"/>
-                <a:ea typeface="Meiryo" pitchFamily="34" charset="-122"/>
-                <a:cs typeface="Meiryo" pitchFamily="34" charset="-120"/>
-              </a:rPr>
-              <a:t>人が担うのは「正しく動かすための判断と確認」へとシフトした</a:t>
-            </a:r>
-            <a:endParaRPr lang="en-US" sz="1400" dirty="0"/>
-          </a:p>
-        </p:txBody>
-      </p:sp>
-      <p:sp>
-        <p:nvSpPr>
-          <p:cNvPr id="11" name="Text 8"/>
-          <p:cNvSpPr/>
-          <p:nvPr/>
-        </p:nvSpPr>
-        <p:spPr>
-          <a:xfrm>
-            <a:off x="1005840" y="3246120"/>
-            <a:ext cx="5486400" cy="457200"/>
-          </a:xfrm>
-          <a:prstGeom prst="rect">
-            <a:avLst/>
-          </a:prstGeom>
-          <a:noFill/>
-          <a:ln/>
-        </p:spPr>
-        <p:txBody>
-          <a:bodyPr wrap="square" lIns="0" tIns="0" rIns="0" bIns="0" rtlCol="0" anchor="ctr"/>
-          <a:lstStyle/>
-          <a:p>
-            <a:pPr indent="0" marL="0">
-              <a:buNone/>
-            </a:pPr>
-            <a:r>
-              <a:rPr lang="en-US" sz="1400" b="1" dirty="0">
-                <a:solidFill>
-                  <a:srgbClr val="1B2A4A"/>
-                </a:solidFill>
-                <a:latin typeface="Meiryo" pitchFamily="34" charset="0"/>
-                <a:ea typeface="Meiryo" pitchFamily="34" charset="-122"/>
-                <a:cs typeface="Meiryo" pitchFamily="34" charset="-120"/>
-              </a:rPr>
-              <a:t>→ エンジニアの価値は実装量ではなく、判断・検証・設計の質へ移行している</a:t>
-            </a:r>
-            <a:endParaRPr lang="en-US" sz="1400" dirty="0"/>
-          </a:p>
-        </p:txBody>
-      </p:sp>
-      <p:sp>
-        <p:nvSpPr>
-          <p:cNvPr id="12" name="Shape 9"/>
-          <p:cNvSpPr/>
-          <p:nvPr/>
-        </p:nvSpPr>
-        <p:spPr>
-          <a:xfrm>
-            <a:off x="457200" y="3977640"/>
-            <a:ext cx="8229600" cy="347472"/>
-          </a:xfrm>
-          <a:prstGeom prst="rect">
-            <a:avLst/>
-          </a:prstGeom>
-          <a:solidFill>
-            <a:srgbClr val="F1F5F9"/>
-          </a:solidFill>
-          <a:ln/>
-        </p:spPr>
-      </p:sp>
-      <p:sp>
-        <p:nvSpPr>
-          <p:cNvPr id="13" name="Text 10"/>
-          <p:cNvSpPr/>
-          <p:nvPr/>
-        </p:nvSpPr>
-        <p:spPr>
-          <a:xfrm>
-            <a:off x="640080" y="3977640"/>
-            <a:ext cx="7863840" cy="347472"/>
-          </a:xfrm>
-          <a:prstGeom prst="rect">
-            <a:avLst/>
-          </a:prstGeom>
-          <a:noFill/>
-          <a:ln/>
-        </p:spPr>
-        <p:txBody>
-          <a:bodyPr wrap="square" rtlCol="0" anchor="ctr"/>
-          <a:lstStyle/>
-          <a:p>
-            <a:pPr indent="0" marL="0">
-              <a:buNone/>
-            </a:pPr>
-            <a:endParaRPr lang="en-US" sz="1000" dirty="0"/>
-          </a:p>
-        </p:txBody>
-      </p:sp>
-      <p:sp>
-        <p:nvSpPr>
-          <p:cNvPr id="14" name="Text 11"/>
-          <p:cNvSpPr/>
-          <p:nvPr/>
-        </p:nvSpPr>
-        <p:spPr>
-          <a:xfrm>
-            <a:off x="457200" y="4754880"/>
-            <a:ext cx="8229600" cy="274320"/>
-          </a:xfrm>
-          <a:prstGeom prst="rect">
-            <a:avLst/>
-          </a:prstGeom>
-          <a:noFill/>
-          <a:ln/>
-        </p:spPr>
-        <p:txBody>
-          <a:bodyPr wrap="square" rtlCol="0" anchor="ctr"/>
-          <a:lstStyle/>
-          <a:p>
-            <a:pPr algn="r" indent="0" marL="0">
-              <a:buNone/>
-            </a:pPr>
-            <a:r>
-              <a:rPr lang="en-US" sz="800" dirty="0">
-                <a:solidFill>
-                  <a:srgbClr val="CBD5E1"/>
-                </a:solidFill>
-                <a:latin typeface="Arial" pitchFamily="34" charset="0"/>
-                <a:ea typeface="Arial" pitchFamily="34" charset="-122"/>
-                <a:cs typeface="Arial" pitchFamily="34" charset="-120"/>
-              </a:rPr>
-              <a:t>AI活用開発 見積もりの考え方 | 4</a:t>
-            </a:r>
-            <a:endParaRPr lang="en-US" sz="800" dirty="0"/>
+              <a:t>工数の捉え方とフェーズ分解</a:t>
+            </a:r>
+            <a:endParaRPr lang="en-US" sz="1600" dirty="0"/>
           </a:p>
         </p:txBody>
       </p:sp>
@@ -5812,14 +5791,15 @@
 </p:sld>
 </file>
 
-<file path=ppt/slides/slide5.xml><?xml version="1.0" encoding="utf-8"?>
+<file path=ppt/slides/slide6.xml><?xml version="1.0" encoding="utf-8"?>
 <p:sld xmlns:a="http://schemas.openxmlformats.org/drawingml/2006/main" xmlns:r="http://schemas.openxmlformats.org/officeDocument/2006/relationships" xmlns:p="http://schemas.openxmlformats.org/presentationml/2006/main">
-  <p:cSld name="Slide 5">
+  <p:cSld name="Slide 6">
     <p:bg>
       <p:bgPr>
         <a:solidFill>
           <a:srgbClr val="FFFFFF"/>
         </a:solidFill>
+        <a:effectLst/>
       </p:bgPr>
     </p:bg>
     <p:spTree>
@@ -5844,8 +5824,8 @@
         </p:nvSpPr>
         <p:spPr>
           <a:xfrm>
-            <a:off x="0" y="0"/>
-            <a:ext cx="3474720" cy="5143500"/>
+            <a:off x="457200" y="320040"/>
+            <a:ext cx="54864" cy="457200"/>
           </a:xfrm>
           <a:prstGeom prst="rect">
             <a:avLst/>
@@ -5855,6 +5835,13 @@
           </a:solidFill>
           <a:ln/>
         </p:spPr>
+        <p:txBody>
+          <a:bodyPr/>
+          <a:lstStyle/>
+          <a:p>
+            <a:endParaRPr lang="ja-JP" altLang="en-US"/>
+          </a:p>
+        </p:txBody>
       </p:sp>
       <p:sp>
         <p:nvSpPr>
@@ -5864,8 +5851,74 @@
         </p:nvSpPr>
         <p:spPr>
           <a:xfrm>
-            <a:off x="0" y="1828800"/>
-            <a:ext cx="3474720" cy="457200"/>
+            <a:off x="685800" y="228600"/>
+            <a:ext cx="7772400" cy="594360"/>
+          </a:xfrm>
+          <a:prstGeom prst="rect">
+            <a:avLst/>
+          </a:prstGeom>
+          <a:noFill/>
+          <a:ln/>
+        </p:spPr>
+        <p:txBody>
+          <a:bodyPr wrap="square" lIns="0" tIns="0" rIns="0" bIns="0" rtlCol="0" anchor="ctr"/>
+          <a:lstStyle/>
+          <a:p>
+            <a:pPr marL="0" indent="0">
+              <a:buNone/>
+            </a:pPr>
+            <a:r>
+              <a:rPr lang="en-US" sz="2200" b="1" dirty="0">
+                <a:solidFill>
+                  <a:srgbClr val="1E293B"/>
+                </a:solidFill>
+                <a:latin typeface="Meiryo" pitchFamily="34" charset="0"/>
+                <a:ea typeface="Meiryo" pitchFamily="34" charset="-122"/>
+                <a:cs typeface="Meiryo" pitchFamily="34" charset="-120"/>
+              </a:rPr>
+              <a:t>2. 人が担う作業は「設定・確認・判断」の3つ</a:t>
+            </a:r>
+            <a:endParaRPr lang="en-US" sz="2200" dirty="0"/>
+          </a:p>
+        </p:txBody>
+      </p:sp>
+      <p:sp>
+        <p:nvSpPr>
+          <p:cNvPr id="4" name="Shape 2"/>
+          <p:cNvSpPr/>
+          <p:nvPr/>
+        </p:nvSpPr>
+        <p:spPr>
+          <a:xfrm>
+            <a:off x="685800" y="914400"/>
+            <a:ext cx="1975104" cy="320040"/>
+          </a:xfrm>
+          <a:prstGeom prst="rect">
+            <a:avLst/>
+          </a:prstGeom>
+          <a:solidFill>
+            <a:srgbClr val="1B2A4A"/>
+          </a:solidFill>
+          <a:ln/>
+        </p:spPr>
+        <p:txBody>
+          <a:bodyPr/>
+          <a:lstStyle/>
+          <a:p>
+            <a:endParaRPr lang="ja-JP" altLang="en-US"/>
+          </a:p>
+        </p:txBody>
+      </p:sp>
+      <p:sp>
+        <p:nvSpPr>
+          <p:cNvPr id="5" name="Text 3"/>
+          <p:cNvSpPr/>
+          <p:nvPr/>
+        </p:nvSpPr>
+        <p:spPr>
+          <a:xfrm>
+            <a:off x="685800" y="914400"/>
+            <a:ext cx="1975104" cy="320040"/>
           </a:xfrm>
           <a:prstGeom prst="rect">
             <a:avLst/>
@@ -5877,240 +5930,345 @@
           <a:bodyPr wrap="square" rtlCol="0" anchor="ctr"/>
           <a:lstStyle/>
           <a:p>
-            <a:pPr algn="ctr" indent="0" marL="0">
+            <a:pPr marL="0" indent="0" algn="ctr">
               <a:buNone/>
             </a:pPr>
             <a:r>
-              <a:rPr lang="en-US" sz="1800" b="1" spc="600" kern="0" dirty="0">
+              <a:rPr lang="en-US" sz="1100" b="1" dirty="0">
                 <a:solidFill>
                   <a:srgbClr val="FFFFFF"/>
+                </a:solidFill>
+                <a:latin typeface="Meiryo" pitchFamily="34" charset="0"/>
+                <a:ea typeface="Meiryo" pitchFamily="34" charset="-122"/>
+                <a:cs typeface="Meiryo" pitchFamily="34" charset="-120"/>
+              </a:rPr>
+              <a:t>見積もりの考え方</a:t>
+            </a:r>
+            <a:endParaRPr lang="en-US" sz="1100" dirty="0"/>
+          </a:p>
+        </p:txBody>
+      </p:sp>
+      <p:sp>
+        <p:nvSpPr>
+          <p:cNvPr id="6" name="Shape 4"/>
+          <p:cNvSpPr/>
+          <p:nvPr/>
+        </p:nvSpPr>
+        <p:spPr>
+          <a:xfrm>
+            <a:off x="7132320" y="822960"/>
+            <a:ext cx="1188720" cy="1188720"/>
+          </a:xfrm>
+          <a:prstGeom prst="ellipse">
+            <a:avLst/>
+          </a:prstGeom>
+          <a:solidFill>
+            <a:srgbClr val="EBF0FA"/>
+          </a:solidFill>
+          <a:ln/>
+        </p:spPr>
+        <p:txBody>
+          <a:bodyPr/>
+          <a:lstStyle/>
+          <a:p>
+            <a:endParaRPr lang="ja-JP" altLang="en-US"/>
+          </a:p>
+        </p:txBody>
+      </p:sp>
+      <p:pic>
+        <p:nvPicPr>
+          <p:cNvPr id="7" name="Image 0" descr="preencoded.png"/>
+          <p:cNvPicPr>
+            <a:picLocks noChangeAspect="1"/>
+          </p:cNvPicPr>
+          <p:nvPr/>
+        </p:nvPicPr>
+        <p:blipFill>
+          <a:blip r:embed="rId3"/>
+          <a:stretch>
+            <a:fillRect/>
+          </a:stretch>
+        </p:blipFill>
+        <p:spPr>
+          <a:xfrm>
+            <a:off x="7406640" y="1097280"/>
+            <a:ext cx="640080" cy="640080"/>
+          </a:xfrm>
+          <a:prstGeom prst="rect">
+            <a:avLst/>
+          </a:prstGeom>
+        </p:spPr>
+      </p:pic>
+      <p:sp>
+        <p:nvSpPr>
+          <p:cNvPr id="8" name="Shape 5"/>
+          <p:cNvSpPr/>
+          <p:nvPr/>
+        </p:nvSpPr>
+        <p:spPr>
+          <a:xfrm>
+            <a:off x="685800" y="1463040"/>
+            <a:ext cx="6126480" cy="2377440"/>
+          </a:xfrm>
+          <a:prstGeom prst="rect">
+            <a:avLst/>
+          </a:prstGeom>
+          <a:solidFill>
+            <a:srgbClr val="EBF0FA"/>
+          </a:solidFill>
+          <a:ln/>
+          <a:effectLst>
+            <a:outerShdw blurRad="50800" dist="12700" dir="8100000" algn="bl" rotWithShape="0">
+              <a:srgbClr val="000000">
+                <a:alpha val="8000"/>
+              </a:srgbClr>
+            </a:outerShdw>
+          </a:effectLst>
+        </p:spPr>
+        <p:txBody>
+          <a:bodyPr/>
+          <a:lstStyle/>
+          <a:p>
+            <a:endParaRPr lang="ja-JP" altLang="en-US"/>
+          </a:p>
+        </p:txBody>
+      </p:sp>
+      <p:sp>
+        <p:nvSpPr>
+          <p:cNvPr id="9" name="Shape 6"/>
+          <p:cNvSpPr/>
+          <p:nvPr/>
+        </p:nvSpPr>
+        <p:spPr>
+          <a:xfrm>
+            <a:off x="685800" y="1463040"/>
+            <a:ext cx="54864" cy="2377440"/>
+          </a:xfrm>
+          <a:prstGeom prst="rect">
+            <a:avLst/>
+          </a:prstGeom>
+          <a:solidFill>
+            <a:srgbClr val="2563EB"/>
+          </a:solidFill>
+          <a:ln/>
+        </p:spPr>
+        <p:txBody>
+          <a:bodyPr/>
+          <a:lstStyle/>
+          <a:p>
+            <a:endParaRPr lang="ja-JP" altLang="en-US"/>
+          </a:p>
+        </p:txBody>
+      </p:sp>
+      <p:sp>
+        <p:nvSpPr>
+          <p:cNvPr id="10" name="Text 7"/>
+          <p:cNvSpPr/>
+          <p:nvPr/>
+        </p:nvSpPr>
+        <p:spPr>
+          <a:xfrm>
+            <a:off x="1005840" y="1600200"/>
+            <a:ext cx="5486400" cy="2011680"/>
+          </a:xfrm>
+          <a:prstGeom prst="rect">
+            <a:avLst/>
+          </a:prstGeom>
+          <a:noFill/>
+          <a:ln/>
+        </p:spPr>
+        <p:txBody>
+          <a:bodyPr wrap="square" rtlCol="0" anchor="t"/>
+          <a:lstStyle/>
+          <a:p>
+            <a:pPr marL="342900" indent="-342900">
+              <a:spcAft>
+                <a:spcPts val="800"/>
+              </a:spcAft>
+              <a:buSzPct val="100000"/>
+              <a:buChar char="•"/>
+            </a:pPr>
+            <a:r>
+              <a:rPr lang="en-US" sz="1400" dirty="0">
+                <a:solidFill>
+                  <a:srgbClr val="1E293B"/>
+                </a:solidFill>
+                <a:latin typeface="Meiryo" pitchFamily="34" charset="0"/>
+                <a:ea typeface="Meiryo" pitchFamily="34" charset="-122"/>
+                <a:cs typeface="Meiryo" pitchFamily="34" charset="-120"/>
+              </a:rPr>
+              <a:t>設定作業：管理画面の操作・環境変数・デプロイ設定など、AIでは代替できない領域</a:t>
+            </a:r>
+            <a:endParaRPr lang="en-US" sz="1400" dirty="0"/>
+          </a:p>
+          <a:p>
+            <a:pPr marL="342900" indent="-342900">
+              <a:spcAft>
+                <a:spcPts val="800"/>
+              </a:spcAft>
+              <a:buSzPct val="100000"/>
+              <a:buChar char="•"/>
+            </a:pPr>
+            <a:r>
+              <a:rPr lang="en-US" sz="1400" dirty="0">
+                <a:solidFill>
+                  <a:srgbClr val="1E293B"/>
+                </a:solidFill>
+                <a:latin typeface="Meiryo" pitchFamily="34" charset="0"/>
+                <a:ea typeface="Meiryo" pitchFamily="34" charset="-122"/>
+                <a:cs typeface="Meiryo" pitchFamily="34" charset="-120"/>
+              </a:rPr>
+              <a:t>確認作業：AIが書いたコードを実際に動かし、正しく動くかを検証する作業</a:t>
+            </a:r>
+            <a:endParaRPr lang="en-US" sz="1400" dirty="0"/>
+          </a:p>
+          <a:p>
+            <a:pPr marL="342900" indent="-342900">
+              <a:spcAft>
+                <a:spcPts val="800"/>
+              </a:spcAft>
+              <a:buSzPct val="100000"/>
+              <a:buChar char="•"/>
+            </a:pPr>
+            <a:r>
+              <a:rPr lang="en-US" sz="1400" dirty="0">
+                <a:solidFill>
+                  <a:srgbClr val="1E293B"/>
+                </a:solidFill>
+                <a:latin typeface="Meiryo" pitchFamily="34" charset="0"/>
+                <a:ea typeface="Meiryo" pitchFamily="34" charset="-122"/>
+                <a:cs typeface="Meiryo" pitchFamily="34" charset="-120"/>
+              </a:rPr>
+              <a:t>判断作業：設計の選択・仕様のトレードオフ・AIへの指示内容の決定</a:t>
+            </a:r>
+            <a:endParaRPr lang="en-US" sz="1400" dirty="0"/>
+          </a:p>
+          <a:p>
+            <a:pPr marL="342900" indent="-342900">
+              <a:spcAft>
+                <a:spcPts val="800"/>
+              </a:spcAft>
+              <a:buSzPct val="100000"/>
+              <a:buChar char="•"/>
+            </a:pPr>
+            <a:r>
+              <a:rPr lang="en-US" sz="1400" dirty="0">
+                <a:solidFill>
+                  <a:srgbClr val="1E293B"/>
+                </a:solidFill>
+                <a:latin typeface="Meiryo" pitchFamily="34" charset="0"/>
+                <a:ea typeface="Meiryo" pitchFamily="34" charset="-122"/>
+                <a:cs typeface="Meiryo" pitchFamily="34" charset="-120"/>
+              </a:rPr>
+              <a:t>見積もりは、この3つの作業に要する人の時間を積み上げて算出する</a:t>
+            </a:r>
+            <a:endParaRPr lang="en-US" sz="1400" dirty="0"/>
+          </a:p>
+        </p:txBody>
+      </p:sp>
+      <p:sp>
+        <p:nvSpPr>
+          <p:cNvPr id="11" name="Text 8"/>
+          <p:cNvSpPr/>
+          <p:nvPr/>
+        </p:nvSpPr>
+        <p:spPr>
+          <a:xfrm>
+            <a:off x="1005840" y="4023360"/>
+            <a:ext cx="5486400" cy="457200"/>
+          </a:xfrm>
+          <a:prstGeom prst="rect">
+            <a:avLst/>
+          </a:prstGeom>
+          <a:noFill/>
+          <a:ln/>
+        </p:spPr>
+        <p:txBody>
+          <a:bodyPr wrap="square" lIns="0" tIns="0" rIns="0" bIns="0" rtlCol="0" anchor="ctr"/>
+          <a:lstStyle/>
+          <a:p>
+            <a:pPr marL="0" indent="0">
+              <a:buNone/>
+            </a:pPr>
+            <a:r>
+              <a:rPr lang="en-US" sz="1400" b="1" dirty="0">
+                <a:solidFill>
+                  <a:srgbClr val="1B2A4A"/>
+                </a:solidFill>
+                <a:latin typeface="Meiryo" pitchFamily="34" charset="0"/>
+                <a:ea typeface="Meiryo" pitchFamily="34" charset="-122"/>
+                <a:cs typeface="Meiryo" pitchFamily="34" charset="-120"/>
+              </a:rPr>
+              <a:t>→ 見積もり額は「コードの量」ではなく、人の判断・確認・設定の工数で決まる</a:t>
+            </a:r>
+            <a:endParaRPr lang="en-US" sz="1400" dirty="0"/>
+          </a:p>
+        </p:txBody>
+      </p:sp>
+      <p:sp>
+        <p:nvSpPr>
+          <p:cNvPr id="13" name="Text 10"/>
+          <p:cNvSpPr/>
+          <p:nvPr/>
+        </p:nvSpPr>
+        <p:spPr>
+          <a:xfrm>
+            <a:off x="640080" y="3977640"/>
+            <a:ext cx="7863840" cy="347472"/>
+          </a:xfrm>
+          <a:prstGeom prst="rect">
+            <a:avLst/>
+          </a:prstGeom>
+          <a:noFill/>
+          <a:ln/>
+        </p:spPr>
+        <p:txBody>
+          <a:bodyPr wrap="square" rtlCol="0" anchor="ctr"/>
+          <a:lstStyle/>
+          <a:p>
+            <a:pPr marL="0" indent="0">
+              <a:buNone/>
+            </a:pPr>
+            <a:endParaRPr lang="en-US" sz="1000" dirty="0"/>
+          </a:p>
+        </p:txBody>
+      </p:sp>
+      <p:sp>
+        <p:nvSpPr>
+          <p:cNvPr id="14" name="Text 11"/>
+          <p:cNvSpPr/>
+          <p:nvPr/>
+        </p:nvSpPr>
+        <p:spPr>
+          <a:xfrm>
+            <a:off x="457200" y="4754880"/>
+            <a:ext cx="8229600" cy="274320"/>
+          </a:xfrm>
+          <a:prstGeom prst="rect">
+            <a:avLst/>
+          </a:prstGeom>
+          <a:noFill/>
+          <a:ln/>
+        </p:spPr>
+        <p:txBody>
+          <a:bodyPr wrap="square" rtlCol="0" anchor="ctr"/>
+          <a:lstStyle/>
+          <a:p>
+            <a:pPr marL="0" indent="0" algn="r">
+              <a:buNone/>
+            </a:pPr>
+            <a:r>
+              <a:rPr lang="en-US" sz="800" dirty="0">
+                <a:solidFill>
+                  <a:srgbClr val="CBD5E1"/>
                 </a:solidFill>
                 <a:latin typeface="Arial" pitchFamily="34" charset="0"/>
                 <a:ea typeface="Arial" pitchFamily="34" charset="-122"/>
                 <a:cs typeface="Arial" pitchFamily="34" charset="-120"/>
               </a:rPr>
-              <a:t>PART</a:t>
-            </a:r>
-            <a:endParaRPr lang="en-US" sz="1800" dirty="0"/>
-          </a:p>
-        </p:txBody>
-      </p:sp>
-      <p:sp>
-        <p:nvSpPr>
-          <p:cNvPr id="4" name="Text 2"/>
-          <p:cNvSpPr/>
-          <p:nvPr/>
-        </p:nvSpPr>
-        <p:spPr>
-          <a:xfrm>
-            <a:off x="0" y="2240280"/>
-            <a:ext cx="3474720" cy="548640"/>
-          </a:xfrm>
-          <a:prstGeom prst="rect">
-            <a:avLst/>
-          </a:prstGeom>
-          <a:noFill/>
-          <a:ln/>
-        </p:spPr>
-        <p:txBody>
-          <a:bodyPr wrap="square" rtlCol="0" anchor="ctr"/>
-          <a:lstStyle/>
-          <a:p>
-            <a:pPr algn="ctr" indent="0" marL="0">
-              <a:buNone/>
-            </a:pPr>
-            <a:r>
-              <a:rPr lang="en-US" sz="3200" b="1" dirty="0">
-                <a:solidFill>
-                  <a:srgbClr val="FFFFFF"/>
-                </a:solidFill>
-                <a:latin typeface="Arial" pitchFamily="34" charset="0"/>
-                <a:ea typeface="Arial" pitchFamily="34" charset="-122"/>
-                <a:cs typeface="Arial" pitchFamily="34" charset="-120"/>
-              </a:rPr>
-              <a:t>02</a:t>
-            </a:r>
-            <a:endParaRPr lang="en-US" sz="3200" dirty="0"/>
-          </a:p>
-        </p:txBody>
-      </p:sp>
-      <p:sp>
-        <p:nvSpPr>
-          <p:cNvPr id="5" name="Shape 3"/>
-          <p:cNvSpPr/>
-          <p:nvPr/>
-        </p:nvSpPr>
-        <p:spPr>
-          <a:xfrm>
-            <a:off x="1371600" y="2880360"/>
-            <a:ext cx="731520" cy="0"/>
-          </a:xfrm>
-          <a:prstGeom prst="line">
-            <a:avLst/>
-          </a:prstGeom>
-          <a:noFill/>
-          <a:ln w="38100">
-            <a:solidFill>
-              <a:srgbClr val="FFFFFF"/>
-            </a:solidFill>
-            <a:prstDash val="solid"/>
-          </a:ln>
-        </p:spPr>
-      </p:sp>
-      <p:sp>
-        <p:nvSpPr>
-          <p:cNvPr id="6" name="Shape 4"/>
-          <p:cNvSpPr/>
-          <p:nvPr/>
-        </p:nvSpPr>
-        <p:spPr>
-          <a:xfrm>
-            <a:off x="4206240" y="1371600"/>
-            <a:ext cx="3200400" cy="320040"/>
-          </a:xfrm>
-          <a:prstGeom prst="rect">
-            <a:avLst/>
-          </a:prstGeom>
-          <a:solidFill>
-            <a:srgbClr val="F1F5F9"/>
-          </a:solidFill>
-          <a:ln/>
-        </p:spPr>
-      </p:sp>
-      <p:sp>
-        <p:nvSpPr>
-          <p:cNvPr id="7" name="Text 5"/>
-          <p:cNvSpPr/>
-          <p:nvPr/>
-        </p:nvSpPr>
-        <p:spPr>
-          <a:xfrm>
-            <a:off x="4206240" y="1371600"/>
-            <a:ext cx="3200400" cy="320040"/>
-          </a:xfrm>
-          <a:prstGeom prst="rect">
-            <a:avLst/>
-          </a:prstGeom>
-          <a:noFill/>
-          <a:ln/>
-        </p:spPr>
-        <p:txBody>
-          <a:bodyPr wrap="square" rtlCol="0" anchor="ctr"/>
-          <a:lstStyle/>
-          <a:p>
-            <a:pPr algn="ctr" indent="0" marL="0">
-              <a:buNone/>
-            </a:pPr>
-            <a:r>
-              <a:rPr lang="en-US" sz="900" spc="200" kern="0" dirty="0">
-                <a:solidFill>
-                  <a:srgbClr val="475569"/>
-                </a:solidFill>
-                <a:latin typeface="Arial" pitchFamily="34" charset="0"/>
-                <a:ea typeface="Arial" pitchFamily="34" charset="-122"/>
-                <a:cs typeface="Arial" pitchFamily="34" charset="-120"/>
-              </a:rPr>
-              <a:t>SECTION 2</a:t>
-            </a:r>
-            <a:endParaRPr lang="en-US" sz="900" dirty="0"/>
-          </a:p>
-        </p:txBody>
-      </p:sp>
-      <p:sp>
-        <p:nvSpPr>
-          <p:cNvPr id="8" name="Text 6"/>
-          <p:cNvSpPr/>
-          <p:nvPr/>
-        </p:nvSpPr>
-        <p:spPr>
-          <a:xfrm>
-            <a:off x="4114800" y="1920240"/>
-            <a:ext cx="4572000" cy="822960"/>
-          </a:xfrm>
-          <a:prstGeom prst="rect">
-            <a:avLst/>
-          </a:prstGeom>
-          <a:noFill/>
-          <a:ln/>
-        </p:spPr>
-        <p:txBody>
-          <a:bodyPr wrap="square" lIns="0" tIns="0" rIns="0" bIns="0" rtlCol="0" anchor="ctr"/>
-          <a:lstStyle/>
-          <a:p>
-            <a:pPr indent="0" marL="0">
-              <a:buNone/>
-            </a:pPr>
-            <a:r>
-              <a:rPr lang="en-US" sz="3800" b="1" dirty="0">
-                <a:solidFill>
-                  <a:srgbClr val="1E293B"/>
-                </a:solidFill>
-                <a:latin typeface="Meiryo" pitchFamily="34" charset="0"/>
-                <a:ea typeface="Meiryo" pitchFamily="34" charset="-122"/>
-                <a:cs typeface="Meiryo" pitchFamily="34" charset="-120"/>
-              </a:rPr>
-              <a:t>見積もりの考え方</a:t>
-            </a:r>
-            <a:endParaRPr lang="en-US" sz="3800" dirty="0"/>
-          </a:p>
-        </p:txBody>
-      </p:sp>
-      <p:sp>
-        <p:nvSpPr>
-          <p:cNvPr id="9" name="Shape 7"/>
-          <p:cNvSpPr/>
-          <p:nvPr/>
-        </p:nvSpPr>
-        <p:spPr>
-          <a:xfrm>
-            <a:off x="4114800" y="2926080"/>
-            <a:ext cx="54864" cy="822960"/>
-          </a:xfrm>
-          <a:prstGeom prst="rect">
-            <a:avLst/>
-          </a:prstGeom>
-          <a:solidFill>
-            <a:srgbClr val="1B2A4A"/>
-          </a:solidFill>
-          <a:ln/>
-        </p:spPr>
-      </p:sp>
-      <p:sp>
-        <p:nvSpPr>
-          <p:cNvPr id="10" name="Text 8"/>
-          <p:cNvSpPr/>
-          <p:nvPr/>
-        </p:nvSpPr>
-        <p:spPr>
-          <a:xfrm>
-            <a:off x="4389120" y="2926080"/>
-            <a:ext cx="4114800" cy="822960"/>
-          </a:xfrm>
-          <a:prstGeom prst="rect">
-            <a:avLst/>
-          </a:prstGeom>
-          <a:noFill/>
-          <a:ln/>
-        </p:spPr>
-        <p:txBody>
-          <a:bodyPr wrap="square" lIns="0" tIns="0" rIns="0" bIns="0" rtlCol="0" anchor="ctr"/>
-          <a:lstStyle/>
-          <a:p>
-            <a:pPr indent="0" marL="0">
-              <a:buNone/>
-            </a:pPr>
-            <a:r>
-              <a:rPr lang="en-US" sz="1600" dirty="0">
-                <a:solidFill>
-                  <a:srgbClr val="475569"/>
-                </a:solidFill>
-                <a:latin typeface="Meiryo" pitchFamily="34" charset="0"/>
-                <a:ea typeface="Meiryo" pitchFamily="34" charset="-122"/>
-                <a:cs typeface="Meiryo" pitchFamily="34" charset="-120"/>
-              </a:rPr>
-              <a:t>工数の捉え方とフェーズ分解</a:t>
-            </a:r>
-            <a:endParaRPr lang="en-US" sz="1600" dirty="0"/>
+              <a:t>AI活用開発 見積もりの考え方 | 6</a:t>
+            </a:r>
+            <a:endParaRPr lang="en-US" sz="800" dirty="0"/>
           </a:p>
         </p:txBody>
       </p:sp>
@@ -6122,14 +6280,15 @@
 </p:sld>
 </file>
 
-<file path=ppt/slides/slide6.xml><?xml version="1.0" encoding="utf-8"?>
+<file path=ppt/slides/slide7.xml><?xml version="1.0" encoding="utf-8"?>
 <p:sld xmlns:a="http://schemas.openxmlformats.org/drawingml/2006/main" xmlns:r="http://schemas.openxmlformats.org/officeDocument/2006/relationships" xmlns:p="http://schemas.openxmlformats.org/presentationml/2006/main">
-  <p:cSld name="Slide 6">
+  <p:cSld name="Slide 7">
     <p:bg>
       <p:bgPr>
         <a:solidFill>
           <a:srgbClr val="FFFFFF"/>
         </a:solidFill>
+        <a:effectLst/>
       </p:bgPr>
     </p:bg>
     <p:spTree>
@@ -6165,6 +6324,13 @@
           </a:solidFill>
           <a:ln/>
         </p:spPr>
+        <p:txBody>
+          <a:bodyPr/>
+          <a:lstStyle/>
+          <a:p>
+            <a:endParaRPr lang="ja-JP" altLang="en-US"/>
+          </a:p>
+        </p:txBody>
       </p:sp>
       <p:sp>
         <p:nvSpPr>
@@ -6187,7 +6353,7 @@
           <a:bodyPr wrap="square" lIns="0" tIns="0" rIns="0" bIns="0" rtlCol="0" anchor="ctr"/>
           <a:lstStyle/>
           <a:p>
-            <a:pPr indent="0" marL="0">
+            <a:pPr marL="0" indent="0">
               <a:buNone/>
             </a:pPr>
             <a:r>
@@ -6199,7 +6365,7 @@
                 <a:ea typeface="Meiryo" pitchFamily="34" charset="-122"/>
                 <a:cs typeface="Meiryo" pitchFamily="34" charset="-120"/>
               </a:rPr>
-              <a:t>2. 人が担う作業は「設定・確認・判断」の3つ</a:t>
+              <a:t>3. 見積もりの構成：工数 × 単価 ＋ バッファ</a:t>
             </a:r>
             <a:endParaRPr lang="en-US" sz="2200" dirty="0"/>
           </a:p>
@@ -6224,6 +6390,13 @@
           </a:solidFill>
           <a:ln/>
         </p:spPr>
+        <p:txBody>
+          <a:bodyPr/>
+          <a:lstStyle/>
+          <a:p>
+            <a:endParaRPr lang="ja-JP" altLang="en-US"/>
+          </a:p>
+        </p:txBody>
       </p:sp>
       <p:sp>
         <p:nvSpPr>
@@ -6246,7 +6419,7 @@
           <a:bodyPr wrap="square" rtlCol="0" anchor="ctr"/>
           <a:lstStyle/>
           <a:p>
-            <a:pPr algn="ctr" indent="0" marL="0">
+            <a:pPr marL="0" indent="0" algn="ctr">
               <a:buNone/>
             </a:pPr>
             <a:r>
@@ -6283,17 +6456,24 @@
           </a:solidFill>
           <a:ln/>
         </p:spPr>
+        <p:txBody>
+          <a:bodyPr/>
+          <a:lstStyle/>
+          <a:p>
+            <a:endParaRPr lang="ja-JP" altLang="en-US"/>
+          </a:p>
+        </p:txBody>
       </p:sp>
       <p:pic>
         <p:nvPicPr>
-          <p:cNvPr id="7" name="Image 0" descr="preencoded.png">    </p:cNvPr>
+          <p:cNvPr id="7" name="Image 0" descr="preencoded.png"/>
           <p:cNvPicPr>
             <a:picLocks noChangeAspect="1"/>
           </p:cNvPicPr>
           <p:nvPr/>
         </p:nvPicPr>
         <p:blipFill>
-          <a:blip r:embed="rId1"/>
+          <a:blip r:embed="rId3"/>
           <a:stretch>
             <a:fillRect/>
           </a:stretch>
@@ -6327,13 +6507,20 @@
           </a:solidFill>
           <a:ln/>
           <a:effectLst>
-            <a:outerShdw sx="100000" sy="100000" kx="0" ky="0" algn="bl" rotWithShape="0" blurRad="50800" dist="12700" dir="8100000">
+            <a:outerShdw blurRad="50800" dist="12700" dir="8100000" algn="bl" rotWithShape="0">
               <a:srgbClr val="000000">
                 <a:alpha val="8000"/>
               </a:srgbClr>
             </a:outerShdw>
           </a:effectLst>
         </p:spPr>
+        <p:txBody>
+          <a:bodyPr/>
+          <a:lstStyle/>
+          <a:p>
+            <a:endParaRPr lang="ja-JP" altLang="en-US"/>
+          </a:p>
+        </p:txBody>
       </p:sp>
       <p:sp>
         <p:nvSpPr>
@@ -6354,6 +6541,13 @@
           </a:solidFill>
           <a:ln/>
         </p:spPr>
+        <p:txBody>
+          <a:bodyPr/>
+          <a:lstStyle/>
+          <a:p>
+            <a:endParaRPr lang="ja-JP" altLang="en-US"/>
+          </a:p>
+        </p:txBody>
       </p:sp>
       <p:sp>
         <p:nvSpPr>
@@ -6392,7 +6586,7 @@
                 <a:ea typeface="Meiryo" pitchFamily="34" charset="-122"/>
                 <a:cs typeface="Meiryo" pitchFamily="34" charset="-120"/>
               </a:rPr>
-              <a:t>設定作業：管理画面の操作・環境変数・デプロイ設定など、AIでは代替できない領域</a:t>
+              <a:t>開発費小計 ＝ 人の工数（時間）× 単価</a:t>
             </a:r>
             <a:endParaRPr lang="en-US" sz="1400" dirty="0"/>
           </a:p>
@@ -6413,7 +6607,7 @@
                 <a:ea typeface="Meiryo" pitchFamily="34" charset="-122"/>
                 <a:cs typeface="Meiryo" pitchFamily="34" charset="-120"/>
               </a:rPr>
-              <a:t>確認作業：AIが書いたコードを実際に動かし、正しく動くかを検証する作業</a:t>
+              <a:t>そこに、案件の不確実性に応じたバッファを加算する</a:t>
             </a:r>
             <a:endParaRPr lang="en-US" sz="1400" dirty="0"/>
           </a:p>
@@ -6434,7 +6628,7 @@
                 <a:ea typeface="Meiryo" pitchFamily="34" charset="-122"/>
                 <a:cs typeface="Meiryo" pitchFamily="34" charset="-120"/>
               </a:rPr>
-              <a:t>判断作業：設計の選択・仕様のトレードオフ・AIへの指示内容の決定</a:t>
+              <a:t>最後に消費税を加えて、税込合計をご提示する</a:t>
             </a:r>
             <a:endParaRPr lang="en-US" sz="1400" dirty="0"/>
           </a:p>
@@ -6455,7 +6649,7 @@
                 <a:ea typeface="Meiryo" pitchFamily="34" charset="-122"/>
                 <a:cs typeface="Meiryo" pitchFamily="34" charset="-120"/>
               </a:rPr>
-              <a:t>見積もりは、この3つの作業に要する人の時間を積み上げて算出する</a:t>
+              <a:t>インフラ費用（後述）は開発費とは別枠として明示する</a:t>
             </a:r>
             <a:endParaRPr lang="en-US" sz="1400" dirty="0"/>
           </a:p>
@@ -6482,7 +6676,7 @@
           <a:bodyPr wrap="square" lIns="0" tIns="0" rIns="0" bIns="0" rtlCol="0" anchor="ctr"/>
           <a:lstStyle/>
           <a:p>
-            <a:pPr indent="0" marL="0">
+            <a:pPr marL="0" indent="0">
               <a:buNone/>
             </a:pPr>
             <a:r>
@@ -6494,31 +6688,11 @@
                 <a:ea typeface="Meiryo" pitchFamily="34" charset="-122"/>
                 <a:cs typeface="Meiryo" pitchFamily="34" charset="-120"/>
               </a:rPr>
-              <a:t>→ 見積もり額は「コードの量」ではなく、人の判断・確認・設定の工数で決まる</a:t>
+              <a:t>→ 「コードを書く費用」ではなく「正しく動かす費用」として構成している</a:t>
             </a:r>
             <a:endParaRPr lang="en-US" sz="1400" dirty="0"/>
           </a:p>
         </p:txBody>
-      </p:sp>
-      <p:sp>
-        <p:nvSpPr>
-          <p:cNvPr id="12" name="Shape 9"/>
-          <p:cNvSpPr/>
-          <p:nvPr/>
-        </p:nvSpPr>
-        <p:spPr>
-          <a:xfrm>
-            <a:off x="457200" y="3977640"/>
-            <a:ext cx="8229600" cy="347472"/>
-          </a:xfrm>
-          <a:prstGeom prst="rect">
-            <a:avLst/>
-          </a:prstGeom>
-          <a:solidFill>
-            <a:srgbClr val="F1F5F9"/>
-          </a:solidFill>
-          <a:ln/>
-        </p:spPr>
       </p:sp>
       <p:sp>
         <p:nvSpPr>
@@ -6541,7 +6715,7 @@
           <a:bodyPr wrap="square" rtlCol="0" anchor="ctr"/>
           <a:lstStyle/>
           <a:p>
-            <a:pPr indent="0" marL="0">
+            <a:pPr marL="0" indent="0">
               <a:buNone/>
             </a:pPr>
             <a:endParaRPr lang="en-US" sz="1000" dirty="0"/>
@@ -6569,7 +6743,7 @@
           <a:bodyPr wrap="square" rtlCol="0" anchor="ctr"/>
           <a:lstStyle/>
           <a:p>
-            <a:pPr algn="r" indent="0" marL="0">
+            <a:pPr marL="0" indent="0" algn="r">
               <a:buNone/>
             </a:pPr>
             <a:r>
@@ -6581,7 +6755,7 @@
                 <a:ea typeface="Arial" pitchFamily="34" charset="-122"/>
                 <a:cs typeface="Arial" pitchFamily="34" charset="-120"/>
               </a:rPr>
-              <a:t>AI活用開発 見積もりの考え方 | 6</a:t>
+              <a:t>AI活用開発 見積もりの考え方 | 7</a:t>
             </a:r>
             <a:endParaRPr lang="en-US" sz="800" dirty="0"/>
           </a:p>
@@ -6595,14 +6769,15 @@
 </p:sld>
 </file>
 
-<file path=ppt/slides/slide7.xml><?xml version="1.0" encoding="utf-8"?>
+<file path=ppt/slides/slide8.xml><?xml version="1.0" encoding="utf-8"?>
 <p:sld xmlns:a="http://schemas.openxmlformats.org/drawingml/2006/main" xmlns:r="http://schemas.openxmlformats.org/officeDocument/2006/relationships" xmlns:p="http://schemas.openxmlformats.org/presentationml/2006/main">
-  <p:cSld name="Slide 7">
+  <p:cSld name="Slide 8">
     <p:bg>
       <p:bgPr>
         <a:solidFill>
           <a:srgbClr val="FFFFFF"/>
         </a:solidFill>
+        <a:effectLst/>
       </p:bgPr>
     </p:bg>
     <p:spTree>
@@ -6638,6 +6813,13 @@
           </a:solidFill>
           <a:ln/>
         </p:spPr>
+        <p:txBody>
+          <a:bodyPr/>
+          <a:lstStyle/>
+          <a:p>
+            <a:endParaRPr lang="ja-JP" altLang="en-US"/>
+          </a:p>
+        </p:txBody>
       </p:sp>
       <p:sp>
         <p:nvSpPr>
@@ -6660,7 +6842,7 @@
           <a:bodyPr wrap="square" lIns="0" tIns="0" rIns="0" bIns="0" rtlCol="0" anchor="ctr"/>
           <a:lstStyle/>
           <a:p>
-            <a:pPr indent="0" marL="0">
+            <a:pPr marL="0" indent="0">
               <a:buNone/>
             </a:pPr>
             <a:r>
@@ -6672,7 +6854,7 @@
                 <a:ea typeface="Meiryo" pitchFamily="34" charset="-122"/>
                 <a:cs typeface="Meiryo" pitchFamily="34" charset="-120"/>
               </a:rPr>
-              <a:t>3. 見積もりの構成：工数 × 単価 ＋ バッファ</a:t>
+              <a:t>4. 工数はフェーズに分解して根拠を示す</a:t>
             </a:r>
             <a:endParaRPr lang="en-US" sz="2200" dirty="0"/>
           </a:p>
@@ -6697,6 +6879,13 @@
           </a:solidFill>
           <a:ln/>
         </p:spPr>
+        <p:txBody>
+          <a:bodyPr/>
+          <a:lstStyle/>
+          <a:p>
+            <a:endParaRPr lang="ja-JP" altLang="en-US"/>
+          </a:p>
+        </p:txBody>
       </p:sp>
       <p:sp>
         <p:nvSpPr>
@@ -6719,7 +6908,7 @@
           <a:bodyPr wrap="square" rtlCol="0" anchor="ctr"/>
           <a:lstStyle/>
           <a:p>
-            <a:pPr algn="ctr" indent="0" marL="0">
+            <a:pPr marL="0" indent="0" algn="ctr">
               <a:buNone/>
             </a:pPr>
             <a:r>
@@ -6756,17 +6945,24 @@
           </a:solidFill>
           <a:ln/>
         </p:spPr>
+        <p:txBody>
+          <a:bodyPr/>
+          <a:lstStyle/>
+          <a:p>
+            <a:endParaRPr lang="ja-JP" altLang="en-US"/>
+          </a:p>
+        </p:txBody>
       </p:sp>
       <p:pic>
         <p:nvPicPr>
-          <p:cNvPr id="7" name="Image 0" descr="preencoded.png">    </p:cNvPr>
+          <p:cNvPr id="7" name="Image 0" descr="preencoded.png"/>
           <p:cNvPicPr>
             <a:picLocks noChangeAspect="1"/>
           </p:cNvPicPr>
           <p:nvPr/>
         </p:nvPicPr>
         <p:blipFill>
-          <a:blip r:embed="rId1"/>
+          <a:blip r:embed="rId3"/>
           <a:stretch>
             <a:fillRect/>
           </a:stretch>
@@ -6800,13 +6996,20 @@
           </a:solidFill>
           <a:ln/>
           <a:effectLst>
-            <a:outerShdw sx="100000" sy="100000" kx="0" ky="0" algn="bl" rotWithShape="0" blurRad="50800" dist="12700" dir="8100000">
+            <a:outerShdw blurRad="50800" dist="12700" dir="8100000" algn="bl" rotWithShape="0">
               <a:srgbClr val="000000">
                 <a:alpha val="8000"/>
               </a:srgbClr>
             </a:outerShdw>
           </a:effectLst>
         </p:spPr>
+        <p:txBody>
+          <a:bodyPr/>
+          <a:lstStyle/>
+          <a:p>
+            <a:endParaRPr lang="ja-JP" altLang="en-US"/>
+          </a:p>
+        </p:txBody>
       </p:sp>
       <p:sp>
         <p:nvSpPr>
@@ -6827,6 +7030,13 @@
           </a:solidFill>
           <a:ln/>
         </p:spPr>
+        <p:txBody>
+          <a:bodyPr/>
+          <a:lstStyle/>
+          <a:p>
+            <a:endParaRPr lang="ja-JP" altLang="en-US"/>
+          </a:p>
+        </p:txBody>
       </p:sp>
       <p:sp>
         <p:nvSpPr>
@@ -6865,7 +7075,7 @@
                 <a:ea typeface="Meiryo" pitchFamily="34" charset="-122"/>
                 <a:cs typeface="Meiryo" pitchFamily="34" charset="-120"/>
               </a:rPr>
-              <a:t>開発費小計 ＝ 人の工数（時間）× 単価</a:t>
+              <a:t>フェーズ1 基盤構築・疎通確認：認証やDBの基本接続を動かす</a:t>
             </a:r>
             <a:endParaRPr lang="en-US" sz="1400" dirty="0"/>
           </a:p>
@@ -6886,7 +7096,7 @@
                 <a:ea typeface="Meiryo" pitchFamily="34" charset="-122"/>
                 <a:cs typeface="Meiryo" pitchFamily="34" charset="-120"/>
               </a:rPr>
-              <a:t>そこに、案件の不確実性に応じたバッファを加算する</a:t>
+              <a:t>フェーズ2 DB構築・アクセス制御：テーブル作成・権限設定・型生成</a:t>
             </a:r>
             <a:endParaRPr lang="en-US" sz="1400" dirty="0"/>
           </a:p>
@@ -6907,7 +7117,7 @@
                 <a:ea typeface="Meiryo" pitchFamily="34" charset="-122"/>
                 <a:cs typeface="Meiryo" pitchFamily="34" charset="-120"/>
               </a:rPr>
-              <a:t>最後に消費税を加えて、税込合計をご提示する</a:t>
+              <a:t>フェーズ3 機能動作確認：各機能をブラウザで操作して検証（機能数に比例）</a:t>
             </a:r>
             <a:endParaRPr lang="en-US" sz="1400" dirty="0"/>
           </a:p>
@@ -6928,7 +7138,7 @@
                 <a:ea typeface="Meiryo" pitchFamily="34" charset="-122"/>
                 <a:cs typeface="Meiryo" pitchFamily="34" charset="-120"/>
               </a:rPr>
-              <a:t>インフラ費用（後述）は開発費とは別枠として明示する</a:t>
+              <a:t>フェーズ4 デプロイ・最終確認：本番環境での通し確認</a:t>
             </a:r>
             <a:endParaRPr lang="en-US" sz="1400" dirty="0"/>
           </a:p>
@@ -6942,7 +7152,7 @@
         </p:nvSpPr>
         <p:spPr>
           <a:xfrm>
-            <a:off x="1005840" y="3246120"/>
+            <a:off x="1005840" y="4000500"/>
             <a:ext cx="5486400" cy="457200"/>
           </a:xfrm>
           <a:prstGeom prst="rect">
@@ -6955,7 +7165,7 @@
           <a:bodyPr wrap="square" lIns="0" tIns="0" rIns="0" bIns="0" rtlCol="0" anchor="ctr"/>
           <a:lstStyle/>
           <a:p>
-            <a:pPr indent="0" marL="0">
+            <a:pPr marL="0" indent="0">
               <a:buNone/>
             </a:pPr>
             <a:r>
@@ -6967,31 +7177,11 @@
                 <a:ea typeface="Meiryo" pitchFamily="34" charset="-122"/>
                 <a:cs typeface="Meiryo" pitchFamily="34" charset="-120"/>
               </a:rPr>
-              <a:t>→ 「コードを書く費用」ではなく「正しく動かす費用」として構成している</a:t>
+              <a:t>→ フェーズ × 作業項目に分解することで、工数の根拠を明確に説明できる</a:t>
             </a:r>
             <a:endParaRPr lang="en-US" sz="1400" dirty="0"/>
           </a:p>
         </p:txBody>
-      </p:sp>
-      <p:sp>
-        <p:nvSpPr>
-          <p:cNvPr id="12" name="Shape 9"/>
-          <p:cNvSpPr/>
-          <p:nvPr/>
-        </p:nvSpPr>
-        <p:spPr>
-          <a:xfrm>
-            <a:off x="457200" y="3977640"/>
-            <a:ext cx="8229600" cy="347472"/>
-          </a:xfrm>
-          <a:prstGeom prst="rect">
-            <a:avLst/>
-          </a:prstGeom>
-          <a:solidFill>
-            <a:srgbClr val="F1F5F9"/>
-          </a:solidFill>
-          <a:ln/>
-        </p:spPr>
       </p:sp>
       <p:sp>
         <p:nvSpPr>
@@ -7014,7 +7204,7 @@
           <a:bodyPr wrap="square" rtlCol="0" anchor="ctr"/>
           <a:lstStyle/>
           <a:p>
-            <a:pPr indent="0" marL="0">
+            <a:pPr marL="0" indent="0">
               <a:buNone/>
             </a:pPr>
             <a:endParaRPr lang="en-US" sz="1000" dirty="0"/>
@@ -7042,7 +7232,7 @@
           <a:bodyPr wrap="square" rtlCol="0" anchor="ctr"/>
           <a:lstStyle/>
           <a:p>
-            <a:pPr algn="r" indent="0" marL="0">
+            <a:pPr marL="0" indent="0" algn="r">
               <a:buNone/>
             </a:pPr>
             <a:r>
@@ -7054,7 +7244,7 @@
                 <a:ea typeface="Arial" pitchFamily="34" charset="-122"/>
                 <a:cs typeface="Arial" pitchFamily="34" charset="-120"/>
               </a:rPr>
-              <a:t>AI活用開発 見積もりの考え方 | 7</a:t>
+              <a:t>AI活用開発 見積もりの考え方 | 8</a:t>
             </a:r>
             <a:endParaRPr lang="en-US" sz="800" dirty="0"/>
           </a:p>
@@ -7068,14 +7258,15 @@
 </p:sld>
 </file>
 
-<file path=ppt/slides/slide8.xml><?xml version="1.0" encoding="utf-8"?>
+<file path=ppt/slides/slide9.xml><?xml version="1.0" encoding="utf-8"?>
 <p:sld xmlns:a="http://schemas.openxmlformats.org/drawingml/2006/main" xmlns:r="http://schemas.openxmlformats.org/officeDocument/2006/relationships" xmlns:p="http://schemas.openxmlformats.org/presentationml/2006/main">
-  <p:cSld name="Slide 8">
+  <p:cSld name="Slide 9">
     <p:bg>
       <p:bgPr>
         <a:solidFill>
           <a:srgbClr val="FFFFFF"/>
         </a:solidFill>
+        <a:effectLst/>
       </p:bgPr>
     </p:bg>
     <p:spTree>
@@ -7111,6 +7302,13 @@
           </a:solidFill>
           <a:ln/>
         </p:spPr>
+        <p:txBody>
+          <a:bodyPr/>
+          <a:lstStyle/>
+          <a:p>
+            <a:endParaRPr lang="ja-JP" altLang="en-US"/>
+          </a:p>
+        </p:txBody>
       </p:sp>
       <p:sp>
         <p:nvSpPr>
@@ -7133,7 +7331,7 @@
           <a:bodyPr wrap="square" lIns="0" tIns="0" rIns="0" bIns="0" rtlCol="0" anchor="ctr"/>
           <a:lstStyle/>
           <a:p>
-            <a:pPr indent="0" marL="0">
+            <a:pPr marL="0" indent="0">
               <a:buNone/>
             </a:pPr>
             <a:r>
@@ -7145,7 +7343,7 @@
                 <a:ea typeface="Meiryo" pitchFamily="34" charset="-122"/>
                 <a:cs typeface="Meiryo" pitchFamily="34" charset="-120"/>
               </a:rPr>
-              <a:t>4. 工数はフェーズに分解して根拠を示す</a:t>
+              <a:t>5. バッファは「不確定要素」を根拠に設定する</a:t>
             </a:r>
             <a:endParaRPr lang="en-US" sz="2200" dirty="0"/>
           </a:p>
@@ -7170,6 +7368,13 @@
           </a:solidFill>
           <a:ln/>
         </p:spPr>
+        <p:txBody>
+          <a:bodyPr/>
+          <a:lstStyle/>
+          <a:p>
+            <a:endParaRPr lang="ja-JP" altLang="en-US"/>
+          </a:p>
+        </p:txBody>
       </p:sp>
       <p:sp>
         <p:nvSpPr>
@@ -7192,7 +7397,7 @@
           <a:bodyPr wrap="square" rtlCol="0" anchor="ctr"/>
           <a:lstStyle/>
           <a:p>
-            <a:pPr algn="ctr" indent="0" marL="0">
+            <a:pPr marL="0" indent="0" algn="ctr">
               <a:buNone/>
             </a:pPr>
             <a:r>
@@ -7229,17 +7434,24 @@
           </a:solidFill>
           <a:ln/>
         </p:spPr>
+        <p:txBody>
+          <a:bodyPr/>
+          <a:lstStyle/>
+          <a:p>
+            <a:endParaRPr lang="ja-JP" altLang="en-US"/>
+          </a:p>
+        </p:txBody>
       </p:sp>
       <p:pic>
         <p:nvPicPr>
-          <p:cNvPr id="7" name="Image 0" descr="preencoded.png">    </p:cNvPr>
+          <p:cNvPr id="7" name="Image 0" descr="preencoded.png"/>
           <p:cNvPicPr>
             <a:picLocks noChangeAspect="1"/>
           </p:cNvPicPr>
           <p:nvPr/>
         </p:nvPicPr>
         <p:blipFill>
-          <a:blip r:embed="rId1"/>
+          <a:blip r:embed="rId3"/>
           <a:stretch>
             <a:fillRect/>
           </a:stretch>
@@ -7273,13 +7485,20 @@
           </a:solidFill>
           <a:ln/>
           <a:effectLst>
-            <a:outerShdw sx="100000" sy="100000" kx="0" ky="0" algn="bl" rotWithShape="0" blurRad="50800" dist="12700" dir="8100000">
+            <a:outerShdw blurRad="50800" dist="12700" dir="8100000" algn="bl" rotWithShape="0">
               <a:srgbClr val="000000">
                 <a:alpha val="8000"/>
               </a:srgbClr>
             </a:outerShdw>
           </a:effectLst>
         </p:spPr>
+        <p:txBody>
+          <a:bodyPr/>
+          <a:lstStyle/>
+          <a:p>
+            <a:endParaRPr lang="ja-JP" altLang="en-US"/>
+          </a:p>
+        </p:txBody>
       </p:sp>
       <p:sp>
         <p:nvSpPr>
@@ -7300,6 +7519,13 @@
           </a:solidFill>
           <a:ln/>
         </p:spPr>
+        <p:txBody>
+          <a:bodyPr/>
+          <a:lstStyle/>
+          <a:p>
+            <a:endParaRPr lang="ja-JP" altLang="en-US"/>
+          </a:p>
+        </p:txBody>
       </p:sp>
       <p:sp>
         <p:nvSpPr>
@@ -7338,7 +7564,7 @@
                 <a:ea typeface="Meiryo" pitchFamily="34" charset="-122"/>
                 <a:cs typeface="Meiryo" pitchFamily="34" charset="-120"/>
               </a:rPr>
-              <a:t>フェーズ1 基盤構築・疎通確認：認証やDBの基本接続を動かす</a:t>
+              <a:t>初めて使う技術やPoC案件は、想定外が起きやすいためバッファを厚めに設定</a:t>
             </a:r>
             <a:endParaRPr lang="en-US" sz="1400" dirty="0"/>
           </a:p>
@@ -7359,7 +7585,7 @@
                 <a:ea typeface="Meiryo" pitchFamily="34" charset="-122"/>
                 <a:cs typeface="Meiryo" pitchFamily="34" charset="-120"/>
               </a:rPr>
-              <a:t>フェーズ2 DB構築・アクセス制御：テーブル作成・権限設定・型生成</a:t>
+              <a:t>経験のある構成の横展開は、ハマりどころが読めるため薄めに設定</a:t>
             </a:r>
             <a:endParaRPr lang="en-US" sz="1400" dirty="0"/>
           </a:p>
@@ -7380,7 +7606,7 @@
                 <a:ea typeface="Meiryo" pitchFamily="34" charset="-122"/>
                 <a:cs typeface="Meiryo" pitchFamily="34" charset="-120"/>
               </a:rPr>
-              <a:t>フェーズ3 機能動作確認：各機能をブラウザで操作して検証（機能数に比例）</a:t>
+              <a:t>リスクが低い案件は、バッファを最小限に抑える</a:t>
             </a:r>
             <a:endParaRPr lang="en-US" sz="1400" dirty="0"/>
           </a:p>
@@ -7401,7 +7627,7 @@
                 <a:ea typeface="Meiryo" pitchFamily="34" charset="-122"/>
                 <a:cs typeface="Meiryo" pitchFamily="34" charset="-120"/>
               </a:rPr>
-              <a:t>フェーズ4 デプロイ・最終確認：本番環境での通し確認</a:t>
+              <a:t>「なんとなく◯%」ではなく、不確定要素を具体的に挙げて根拠とする</a:t>
             </a:r>
             <a:endParaRPr lang="en-US" sz="1400" dirty="0"/>
           </a:p>
@@ -7415,7 +7641,7 @@
         </p:nvSpPr>
         <p:spPr>
           <a:xfrm>
-            <a:off x="1005840" y="3246120"/>
+            <a:off x="1005840" y="3977640"/>
             <a:ext cx="5486400" cy="457200"/>
           </a:xfrm>
           <a:prstGeom prst="rect">
@@ -7428,7 +7654,7 @@
           <a:bodyPr wrap="square" lIns="0" tIns="0" rIns="0" bIns="0" rtlCol="0" anchor="ctr"/>
           <a:lstStyle/>
           <a:p>
-            <a:pPr indent="0" marL="0">
+            <a:pPr marL="0" indent="0">
               <a:buNone/>
             </a:pPr>
             <a:r>
@@ -7440,31 +7666,11 @@
                 <a:ea typeface="Meiryo" pitchFamily="34" charset="-122"/>
                 <a:cs typeface="Meiryo" pitchFamily="34" charset="-120"/>
               </a:rPr>
-              <a:t>→ フェーズ × 作業項目に分解することで、工数の根拠を明確に説明できる</a:t>
+              <a:t>→ バッファ率は案件の性質ごとに、理由を説明できる形で決めている</a:t>
             </a:r>
             <a:endParaRPr lang="en-US" sz="1400" dirty="0"/>
           </a:p>
         </p:txBody>
-      </p:sp>
-      <p:sp>
-        <p:nvSpPr>
-          <p:cNvPr id="12" name="Shape 9"/>
-          <p:cNvSpPr/>
-          <p:nvPr/>
-        </p:nvSpPr>
-        <p:spPr>
-          <a:xfrm>
-            <a:off x="457200" y="3977640"/>
-            <a:ext cx="8229600" cy="347472"/>
-          </a:xfrm>
-          <a:prstGeom prst="rect">
-            <a:avLst/>
-          </a:prstGeom>
-          <a:solidFill>
-            <a:srgbClr val="F1F5F9"/>
-          </a:solidFill>
-          <a:ln/>
-        </p:spPr>
       </p:sp>
       <p:sp>
         <p:nvSpPr>
@@ -7487,7 +7693,7 @@
           <a:bodyPr wrap="square" rtlCol="0" anchor="ctr"/>
           <a:lstStyle/>
           <a:p>
-            <a:pPr indent="0" marL="0">
+            <a:pPr marL="0" indent="0">
               <a:buNone/>
             </a:pPr>
             <a:endParaRPr lang="en-US" sz="1000" dirty="0"/>
@@ -7515,480 +7721,7 @@
           <a:bodyPr wrap="square" rtlCol="0" anchor="ctr"/>
           <a:lstStyle/>
           <a:p>
-            <a:pPr algn="r" indent="0" marL="0">
-              <a:buNone/>
-            </a:pPr>
-            <a:r>
-              <a:rPr lang="en-US" sz="800" dirty="0">
-                <a:solidFill>
-                  <a:srgbClr val="CBD5E1"/>
-                </a:solidFill>
-                <a:latin typeface="Arial" pitchFamily="34" charset="0"/>
-                <a:ea typeface="Arial" pitchFamily="34" charset="-122"/>
-                <a:cs typeface="Arial" pitchFamily="34" charset="-120"/>
-              </a:rPr>
-              <a:t>AI活用開発 見積もりの考え方 | 8</a:t>
-            </a:r>
-            <a:endParaRPr lang="en-US" sz="800" dirty="0"/>
-          </a:p>
-        </p:txBody>
-      </p:sp>
-    </p:spTree>
-  </p:cSld>
-  <p:clrMapOvr>
-    <a:masterClrMapping/>
-  </p:clrMapOvr>
-</p:sld>
-</file>
-
-<file path=ppt/slides/slide9.xml><?xml version="1.0" encoding="utf-8"?>
-<p:sld xmlns:a="http://schemas.openxmlformats.org/drawingml/2006/main" xmlns:r="http://schemas.openxmlformats.org/officeDocument/2006/relationships" xmlns:p="http://schemas.openxmlformats.org/presentationml/2006/main">
-  <p:cSld name="Slide 9">
-    <p:bg>
-      <p:bgPr>
-        <a:solidFill>
-          <a:srgbClr val="FFFFFF"/>
-        </a:solidFill>
-      </p:bgPr>
-    </p:bg>
-    <p:spTree>
-      <p:nvGrpSpPr>
-        <p:cNvPr id="1" name=""/>
-        <p:cNvGrpSpPr/>
-        <p:nvPr/>
-      </p:nvGrpSpPr>
-      <p:grpSpPr>
-        <a:xfrm>
-          <a:off x="0" y="0"/>
-          <a:ext cx="0" cy="0"/>
-          <a:chOff x="0" y="0"/>
-          <a:chExt cx="0" cy="0"/>
-        </a:xfrm>
-      </p:grpSpPr>
-      <p:sp>
-        <p:nvSpPr>
-          <p:cNvPr id="2" name="Shape 0"/>
-          <p:cNvSpPr/>
-          <p:nvPr/>
-        </p:nvSpPr>
-        <p:spPr>
-          <a:xfrm>
-            <a:off x="457200" y="320040"/>
-            <a:ext cx="54864" cy="457200"/>
-          </a:xfrm>
-          <a:prstGeom prst="rect">
-            <a:avLst/>
-          </a:prstGeom>
-          <a:solidFill>
-            <a:srgbClr val="1B2A4A"/>
-          </a:solidFill>
-          <a:ln/>
-        </p:spPr>
-      </p:sp>
-      <p:sp>
-        <p:nvSpPr>
-          <p:cNvPr id="3" name="Text 1"/>
-          <p:cNvSpPr/>
-          <p:nvPr/>
-        </p:nvSpPr>
-        <p:spPr>
-          <a:xfrm>
-            <a:off x="685800" y="228600"/>
-            <a:ext cx="7772400" cy="594360"/>
-          </a:xfrm>
-          <a:prstGeom prst="rect">
-            <a:avLst/>
-          </a:prstGeom>
-          <a:noFill/>
-          <a:ln/>
-        </p:spPr>
-        <p:txBody>
-          <a:bodyPr wrap="square" lIns="0" tIns="0" rIns="0" bIns="0" rtlCol="0" anchor="ctr"/>
-          <a:lstStyle/>
-          <a:p>
-            <a:pPr indent="0" marL="0">
-              <a:buNone/>
-            </a:pPr>
-            <a:r>
-              <a:rPr lang="en-US" sz="2200" b="1" dirty="0">
-                <a:solidFill>
-                  <a:srgbClr val="1E293B"/>
-                </a:solidFill>
-                <a:latin typeface="Meiryo" pitchFamily="34" charset="0"/>
-                <a:ea typeface="Meiryo" pitchFamily="34" charset="-122"/>
-                <a:cs typeface="Meiryo" pitchFamily="34" charset="-120"/>
-              </a:rPr>
-              <a:t>5. バッファは「不確定要素」を根拠に設定する</a:t>
-            </a:r>
-            <a:endParaRPr lang="en-US" sz="2200" dirty="0"/>
-          </a:p>
-        </p:txBody>
-      </p:sp>
-      <p:sp>
-        <p:nvSpPr>
-          <p:cNvPr id="4" name="Shape 2"/>
-          <p:cNvSpPr/>
-          <p:nvPr/>
-        </p:nvSpPr>
-        <p:spPr>
-          <a:xfrm>
-            <a:off x="685800" y="914400"/>
-            <a:ext cx="1975104" cy="320040"/>
-          </a:xfrm>
-          <a:prstGeom prst="rect">
-            <a:avLst/>
-          </a:prstGeom>
-          <a:solidFill>
-            <a:srgbClr val="1B2A4A"/>
-          </a:solidFill>
-          <a:ln/>
-        </p:spPr>
-      </p:sp>
-      <p:sp>
-        <p:nvSpPr>
-          <p:cNvPr id="5" name="Text 3"/>
-          <p:cNvSpPr/>
-          <p:nvPr/>
-        </p:nvSpPr>
-        <p:spPr>
-          <a:xfrm>
-            <a:off x="685800" y="914400"/>
-            <a:ext cx="1975104" cy="320040"/>
-          </a:xfrm>
-          <a:prstGeom prst="rect">
-            <a:avLst/>
-          </a:prstGeom>
-          <a:noFill/>
-          <a:ln/>
-        </p:spPr>
-        <p:txBody>
-          <a:bodyPr wrap="square" rtlCol="0" anchor="ctr"/>
-          <a:lstStyle/>
-          <a:p>
-            <a:pPr algn="ctr" indent="0" marL="0">
-              <a:buNone/>
-            </a:pPr>
-            <a:r>
-              <a:rPr lang="en-US" sz="1100" b="1" dirty="0">
-                <a:solidFill>
-                  <a:srgbClr val="FFFFFF"/>
-                </a:solidFill>
-                <a:latin typeface="Meiryo" pitchFamily="34" charset="0"/>
-                <a:ea typeface="Meiryo" pitchFamily="34" charset="-122"/>
-                <a:cs typeface="Meiryo" pitchFamily="34" charset="-120"/>
-              </a:rPr>
-              <a:t>見積もりの考え方</a:t>
-            </a:r>
-            <a:endParaRPr lang="en-US" sz="1100" dirty="0"/>
-          </a:p>
-        </p:txBody>
-      </p:sp>
-      <p:sp>
-        <p:nvSpPr>
-          <p:cNvPr id="6" name="Shape 4"/>
-          <p:cNvSpPr/>
-          <p:nvPr/>
-        </p:nvSpPr>
-        <p:spPr>
-          <a:xfrm>
-            <a:off x="7132320" y="822960"/>
-            <a:ext cx="1188720" cy="1188720"/>
-          </a:xfrm>
-          <a:prstGeom prst="ellipse">
-            <a:avLst/>
-          </a:prstGeom>
-          <a:solidFill>
-            <a:srgbClr val="EBF0FA"/>
-          </a:solidFill>
-          <a:ln/>
-        </p:spPr>
-      </p:sp>
-      <p:pic>
-        <p:nvPicPr>
-          <p:cNvPr id="7" name="Image 0" descr="preencoded.png">    </p:cNvPr>
-          <p:cNvPicPr>
-            <a:picLocks noChangeAspect="1"/>
-          </p:cNvPicPr>
-          <p:nvPr/>
-        </p:nvPicPr>
-        <p:blipFill>
-          <a:blip r:embed="rId1"/>
-          <a:stretch>
-            <a:fillRect/>
-          </a:stretch>
-        </p:blipFill>
-        <p:spPr>
-          <a:xfrm>
-            <a:off x="7406640" y="1097280"/>
-            <a:ext cx="640080" cy="640080"/>
-          </a:xfrm>
-          <a:prstGeom prst="rect">
-            <a:avLst/>
-          </a:prstGeom>
-        </p:spPr>
-      </p:pic>
-      <p:sp>
-        <p:nvSpPr>
-          <p:cNvPr id="8" name="Shape 5"/>
-          <p:cNvSpPr/>
-          <p:nvPr/>
-        </p:nvSpPr>
-        <p:spPr>
-          <a:xfrm>
-            <a:off x="685800" y="1463040"/>
-            <a:ext cx="6126480" cy="2377440"/>
-          </a:xfrm>
-          <a:prstGeom prst="rect">
-            <a:avLst/>
-          </a:prstGeom>
-          <a:solidFill>
-            <a:srgbClr val="EBF0FA"/>
-          </a:solidFill>
-          <a:ln/>
-          <a:effectLst>
-            <a:outerShdw sx="100000" sy="100000" kx="0" ky="0" algn="bl" rotWithShape="0" blurRad="50800" dist="12700" dir="8100000">
-              <a:srgbClr val="000000">
-                <a:alpha val="8000"/>
-              </a:srgbClr>
-            </a:outerShdw>
-          </a:effectLst>
-        </p:spPr>
-      </p:sp>
-      <p:sp>
-        <p:nvSpPr>
-          <p:cNvPr id="9" name="Shape 6"/>
-          <p:cNvSpPr/>
-          <p:nvPr/>
-        </p:nvSpPr>
-        <p:spPr>
-          <a:xfrm>
-            <a:off x="685800" y="1463040"/>
-            <a:ext cx="54864" cy="2377440"/>
-          </a:xfrm>
-          <a:prstGeom prst="rect">
-            <a:avLst/>
-          </a:prstGeom>
-          <a:solidFill>
-            <a:srgbClr val="2563EB"/>
-          </a:solidFill>
-          <a:ln/>
-        </p:spPr>
-      </p:sp>
-      <p:sp>
-        <p:nvSpPr>
-          <p:cNvPr id="10" name="Text 7"/>
-          <p:cNvSpPr/>
-          <p:nvPr/>
-        </p:nvSpPr>
-        <p:spPr>
-          <a:xfrm>
-            <a:off x="1005840" y="1600200"/>
-            <a:ext cx="5486400" cy="2011680"/>
-          </a:xfrm>
-          <a:prstGeom prst="rect">
-            <a:avLst/>
-          </a:prstGeom>
-          <a:noFill/>
-          <a:ln/>
-        </p:spPr>
-        <p:txBody>
-          <a:bodyPr wrap="square" rtlCol="0" anchor="t"/>
-          <a:lstStyle/>
-          <a:p>
-            <a:pPr marL="342900" indent="-342900">
-              <a:spcAft>
-                <a:spcPts val="800"/>
-              </a:spcAft>
-              <a:buSzPct val="100000"/>
-              <a:buChar char="•"/>
-            </a:pPr>
-            <a:r>
-              <a:rPr lang="en-US" sz="1400" dirty="0">
-                <a:solidFill>
-                  <a:srgbClr val="1E293B"/>
-                </a:solidFill>
-                <a:latin typeface="Meiryo" pitchFamily="34" charset="0"/>
-                <a:ea typeface="Meiryo" pitchFamily="34" charset="-122"/>
-                <a:cs typeface="Meiryo" pitchFamily="34" charset="-120"/>
-              </a:rPr>
-              <a:t>初めて使う技術やPoC案件は、想定外が起きやすいためバッファを厚めに設定</a:t>
-            </a:r>
-            <a:endParaRPr lang="en-US" sz="1400" dirty="0"/>
-          </a:p>
-          <a:p>
-            <a:pPr marL="342900" indent="-342900">
-              <a:spcAft>
-                <a:spcPts val="800"/>
-              </a:spcAft>
-              <a:buSzPct val="100000"/>
-              <a:buChar char="•"/>
-            </a:pPr>
-            <a:r>
-              <a:rPr lang="en-US" sz="1400" dirty="0">
-                <a:solidFill>
-                  <a:srgbClr val="1E293B"/>
-                </a:solidFill>
-                <a:latin typeface="Meiryo" pitchFamily="34" charset="0"/>
-                <a:ea typeface="Meiryo" pitchFamily="34" charset="-122"/>
-                <a:cs typeface="Meiryo" pitchFamily="34" charset="-120"/>
-              </a:rPr>
-              <a:t>経験のある構成の横展開は、ハマりどころが読めるため薄めに設定</a:t>
-            </a:r>
-            <a:endParaRPr lang="en-US" sz="1400" dirty="0"/>
-          </a:p>
-          <a:p>
-            <a:pPr marL="342900" indent="-342900">
-              <a:spcAft>
-                <a:spcPts val="800"/>
-              </a:spcAft>
-              <a:buSzPct val="100000"/>
-              <a:buChar char="•"/>
-            </a:pPr>
-            <a:r>
-              <a:rPr lang="en-US" sz="1400" dirty="0">
-                <a:solidFill>
-                  <a:srgbClr val="1E293B"/>
-                </a:solidFill>
-                <a:latin typeface="Meiryo" pitchFamily="34" charset="0"/>
-                <a:ea typeface="Meiryo" pitchFamily="34" charset="-122"/>
-                <a:cs typeface="Meiryo" pitchFamily="34" charset="-120"/>
-              </a:rPr>
-              <a:t>リスクが低い案件は、バッファを最小限に抑える</a:t>
-            </a:r>
-            <a:endParaRPr lang="en-US" sz="1400" dirty="0"/>
-          </a:p>
-          <a:p>
-            <a:pPr marL="342900" indent="-342900">
-              <a:spcAft>
-                <a:spcPts val="800"/>
-              </a:spcAft>
-              <a:buSzPct val="100000"/>
-              <a:buChar char="•"/>
-            </a:pPr>
-            <a:r>
-              <a:rPr lang="en-US" sz="1400" dirty="0">
-                <a:solidFill>
-                  <a:srgbClr val="1E293B"/>
-                </a:solidFill>
-                <a:latin typeface="Meiryo" pitchFamily="34" charset="0"/>
-                <a:ea typeface="Meiryo" pitchFamily="34" charset="-122"/>
-                <a:cs typeface="Meiryo" pitchFamily="34" charset="-120"/>
-              </a:rPr>
-              <a:t>「なんとなく◯%」ではなく、不確定要素を具体的に挙げて根拠とする</a:t>
-            </a:r>
-            <a:endParaRPr lang="en-US" sz="1400" dirty="0"/>
-          </a:p>
-        </p:txBody>
-      </p:sp>
-      <p:sp>
-        <p:nvSpPr>
-          <p:cNvPr id="11" name="Text 8"/>
-          <p:cNvSpPr/>
-          <p:nvPr/>
-        </p:nvSpPr>
-        <p:spPr>
-          <a:xfrm>
-            <a:off x="1005840" y="3246120"/>
-            <a:ext cx="5486400" cy="457200"/>
-          </a:xfrm>
-          <a:prstGeom prst="rect">
-            <a:avLst/>
-          </a:prstGeom>
-          <a:noFill/>
-          <a:ln/>
-        </p:spPr>
-        <p:txBody>
-          <a:bodyPr wrap="square" lIns="0" tIns="0" rIns="0" bIns="0" rtlCol="0" anchor="ctr"/>
-          <a:lstStyle/>
-          <a:p>
-            <a:pPr indent="0" marL="0">
-              <a:buNone/>
-            </a:pPr>
-            <a:r>
-              <a:rPr lang="en-US" sz="1400" b="1" dirty="0">
-                <a:solidFill>
-                  <a:srgbClr val="1B2A4A"/>
-                </a:solidFill>
-                <a:latin typeface="Meiryo" pitchFamily="34" charset="0"/>
-                <a:ea typeface="Meiryo" pitchFamily="34" charset="-122"/>
-                <a:cs typeface="Meiryo" pitchFamily="34" charset="-120"/>
-              </a:rPr>
-              <a:t>→ バッファ率は案件の性質ごとに、理由を説明できる形で決めている</a:t>
-            </a:r>
-            <a:endParaRPr lang="en-US" sz="1400" dirty="0"/>
-          </a:p>
-        </p:txBody>
-      </p:sp>
-      <p:sp>
-        <p:nvSpPr>
-          <p:cNvPr id="12" name="Shape 9"/>
-          <p:cNvSpPr/>
-          <p:nvPr/>
-        </p:nvSpPr>
-        <p:spPr>
-          <a:xfrm>
-            <a:off x="457200" y="3977640"/>
-            <a:ext cx="8229600" cy="347472"/>
-          </a:xfrm>
-          <a:prstGeom prst="rect">
-            <a:avLst/>
-          </a:prstGeom>
-          <a:solidFill>
-            <a:srgbClr val="F1F5F9"/>
-          </a:solidFill>
-          <a:ln/>
-        </p:spPr>
-      </p:sp>
-      <p:sp>
-        <p:nvSpPr>
-          <p:cNvPr id="13" name="Text 10"/>
-          <p:cNvSpPr/>
-          <p:nvPr/>
-        </p:nvSpPr>
-        <p:spPr>
-          <a:xfrm>
-            <a:off x="640080" y="3977640"/>
-            <a:ext cx="7863840" cy="347472"/>
-          </a:xfrm>
-          <a:prstGeom prst="rect">
-            <a:avLst/>
-          </a:prstGeom>
-          <a:noFill/>
-          <a:ln/>
-        </p:spPr>
-        <p:txBody>
-          <a:bodyPr wrap="square" rtlCol="0" anchor="ctr"/>
-          <a:lstStyle/>
-          <a:p>
-            <a:pPr indent="0" marL="0">
-              <a:buNone/>
-            </a:pPr>
-            <a:endParaRPr lang="en-US" sz="1000" dirty="0"/>
-          </a:p>
-        </p:txBody>
-      </p:sp>
-      <p:sp>
-        <p:nvSpPr>
-          <p:cNvPr id="14" name="Text 11"/>
-          <p:cNvSpPr/>
-          <p:nvPr/>
-        </p:nvSpPr>
-        <p:spPr>
-          <a:xfrm>
-            <a:off x="457200" y="4754880"/>
-            <a:ext cx="8229600" cy="274320"/>
-          </a:xfrm>
-          <a:prstGeom prst="rect">
-            <a:avLst/>
-          </a:prstGeom>
-          <a:noFill/>
-          <a:ln/>
-        </p:spPr>
-        <p:txBody>
-          <a:bodyPr wrap="square" rtlCol="0" anchor="ctr"/>
-          <a:lstStyle/>
-          <a:p>
-            <a:pPr algn="r" indent="0" marL="0">
+            <a:pPr marL="0" indent="0" algn="r">
               <a:buNone/>
             </a:pPr>
             <a:r>
@@ -8307,4 +8040,319 @@
     </a:ext>
   </a:extLst>
 </a:theme>
+</file>
+
+<file path=ppt/theme/theme2.xml><?xml version="1.0" encoding="utf-8"?>
+<a:theme xmlns:a="http://schemas.openxmlformats.org/drawingml/2006/main" name="Office テーマ">
+  <a:themeElements>
+    <a:clrScheme name="Office">
+      <a:dk1>
+        <a:sysClr val="windowText" lastClr="000000"/>
+      </a:dk1>
+      <a:lt1>
+        <a:sysClr val="window" lastClr="FFFFFF"/>
+      </a:lt1>
+      <a:dk2>
+        <a:srgbClr val="0E2841"/>
+      </a:dk2>
+      <a:lt2>
+        <a:srgbClr val="E8E8E8"/>
+      </a:lt2>
+      <a:accent1>
+        <a:srgbClr val="156082"/>
+      </a:accent1>
+      <a:accent2>
+        <a:srgbClr val="E97132"/>
+      </a:accent2>
+      <a:accent3>
+        <a:srgbClr val="196B24"/>
+      </a:accent3>
+      <a:accent4>
+        <a:srgbClr val="0F9ED5"/>
+      </a:accent4>
+      <a:accent5>
+        <a:srgbClr val="A02B93"/>
+      </a:accent5>
+      <a:accent6>
+        <a:srgbClr val="4EA72E"/>
+      </a:accent6>
+      <a:hlink>
+        <a:srgbClr val="467886"/>
+      </a:hlink>
+      <a:folHlink>
+        <a:srgbClr val="96607D"/>
+      </a:folHlink>
+    </a:clrScheme>
+    <a:fontScheme name="Office">
+      <a:majorFont>
+        <a:latin typeface="游ゴシック Light" panose="02110004020202020204"/>
+        <a:ea typeface=""/>
+        <a:cs typeface=""/>
+        <a:font script="Jpan" typeface="游ゴシック Light"/>
+        <a:font script="Hang" typeface="맑은 고딕"/>
+        <a:font script="Hans" typeface="等线 Light"/>
+        <a:font script="Hant" typeface="新細明體"/>
+        <a:font script="Arab" typeface="Times New Roman"/>
+        <a:font script="Hebr" typeface="Times New Roman"/>
+        <a:font script="Thai" typeface="Angsana New"/>
+        <a:font script="Ethi" typeface="Nyala"/>
+        <a:font script="Beng" typeface="Vrinda"/>
+        <a:font script="Gujr" typeface="Shruti"/>
+        <a:font script="Khmr" typeface="MoolBoran"/>
+        <a:font script="Knda" typeface="Tunga"/>
+        <a:font script="Guru" typeface="Raavi"/>
+        <a:font script="Cans" typeface="Euphemia"/>
+        <a:font script="Cher" typeface="Plantagenet Cherokee"/>
+        <a:font script="Yiii" typeface="Microsoft Yi Baiti"/>
+        <a:font script="Tibt" typeface="Microsoft Himalaya"/>
+        <a:font script="Thaa" typeface="MV Boli"/>
+        <a:font script="Deva" typeface="Mangal"/>
+        <a:font script="Telu" typeface="Gautami"/>
+        <a:font script="Taml" typeface="Latha"/>
+        <a:font script="Syrc" typeface="Estrangelo Edessa"/>
+        <a:font script="Orya" typeface="Kalinga"/>
+        <a:font script="Mlym" typeface="Kartika"/>
+        <a:font script="Laoo" typeface="DokChampa"/>
+        <a:font script="Sinh" typeface="Iskoola Pota"/>
+        <a:font script="Mong" typeface="Mongolian Baiti"/>
+        <a:font script="Viet" typeface="Times New Roman"/>
+        <a:font script="Uigh" typeface="Microsoft Uighur"/>
+        <a:font script="Geor" typeface="Sylfaen"/>
+        <a:font script="Armn" typeface="Arial"/>
+        <a:font script="Bugi" typeface="Leelawadee UI"/>
+        <a:font script="Bopo" typeface="Microsoft JhengHei"/>
+        <a:font script="Java" typeface="Javanese Text"/>
+        <a:font script="Lisu" typeface="Segoe UI"/>
+        <a:font script="Mymr" typeface="Myanmar Text"/>
+        <a:font script="Nkoo" typeface="Ebrima"/>
+        <a:font script="Olck" typeface="Nirmala UI"/>
+        <a:font script="Osma" typeface="Ebrima"/>
+        <a:font script="Phag" typeface="Phagspa"/>
+        <a:font script="Syrn" typeface="Estrangelo Edessa"/>
+        <a:font script="Syrj" typeface="Estrangelo Edessa"/>
+        <a:font script="Syre" typeface="Estrangelo Edessa"/>
+        <a:font script="Sora" typeface="Nirmala UI"/>
+        <a:font script="Tale" typeface="Microsoft Tai Le"/>
+        <a:font script="Talu" typeface="Microsoft New Tai Lue"/>
+        <a:font script="Tfng" typeface="Ebrima"/>
+      </a:majorFont>
+      <a:minorFont>
+        <a:latin typeface="游ゴシック" panose="02110004020202020204"/>
+        <a:ea typeface=""/>
+        <a:cs typeface=""/>
+        <a:font script="Jpan" typeface="游ゴシック"/>
+        <a:font script="Hang" typeface="맑은 고딕"/>
+        <a:font script="Hans" typeface="等线"/>
+        <a:font script="Hant" typeface="新細明體"/>
+        <a:font script="Arab" typeface="Arial"/>
+        <a:font script="Hebr" typeface="Arial"/>
+        <a:font script="Thai" typeface="Cordia New"/>
+        <a:font script="Ethi" typeface="Nyala"/>
+        <a:font script="Beng" typeface="Vrinda"/>
+        <a:font script="Gujr" typeface="Shruti"/>
+        <a:font script="Khmr" typeface="DaunPenh"/>
+        <a:font script="Knda" typeface="Tunga"/>
+        <a:font script="Guru" typeface="Raavi"/>
+        <a:font script="Cans" typeface="Euphemia"/>
+        <a:font script="Cher" typeface="Plantagenet Cherokee"/>
+        <a:font script="Yiii" typeface="Microsoft Yi Baiti"/>
+        <a:font script="Tibt" typeface="Microsoft Himalaya"/>
+        <a:font script="Thaa" typeface="MV Boli"/>
+        <a:font script="Deva" typeface="Mangal"/>
+        <a:font script="Telu" typeface="Gautami"/>
+        <a:font script="Taml" typeface="Latha"/>
+        <a:font script="Syrc" typeface="Estrangelo Edessa"/>
+        <a:font script="Orya" typeface="Kalinga"/>
+        <a:font script="Mlym" typeface="Kartika"/>
+        <a:font script="Laoo" typeface="DokChampa"/>
+        <a:font script="Sinh" typeface="Iskoola Pota"/>
+        <a:font script="Mong" typeface="Mongolian Baiti"/>
+        <a:font script="Viet" typeface="Arial"/>
+        <a:font script="Uigh" typeface="Microsoft Uighur"/>
+        <a:font script="Geor" typeface="Sylfaen"/>
+        <a:font script="Armn" typeface="Arial"/>
+        <a:font script="Bugi" typeface="Leelawadee UI"/>
+        <a:font script="Bopo" typeface="Microsoft JhengHei"/>
+        <a:font script="Java" typeface="Javanese Text"/>
+        <a:font script="Lisu" typeface="Segoe UI"/>
+        <a:font script="Mymr" typeface="Myanmar Text"/>
+        <a:font script="Nkoo" typeface="Ebrima"/>
+        <a:font script="Olck" typeface="Nirmala UI"/>
+        <a:font script="Osma" typeface="Ebrima"/>
+        <a:font script="Phag" typeface="Phagspa"/>
+        <a:font script="Syrn" typeface="Estrangelo Edessa"/>
+        <a:font script="Syrj" typeface="Estrangelo Edessa"/>
+        <a:font script="Syre" typeface="Estrangelo Edessa"/>
+        <a:font script="Sora" typeface="Nirmala UI"/>
+        <a:font script="Tale" typeface="Microsoft Tai Le"/>
+        <a:font script="Talu" typeface="Microsoft New Tai Lue"/>
+        <a:font script="Tfng" typeface="Ebrima"/>
+      </a:minorFont>
+    </a:fontScheme>
+    <a:fmtScheme name="Office">
+      <a:fillStyleLst>
+        <a:solidFill>
+          <a:schemeClr val="phClr"/>
+        </a:solidFill>
+        <a:gradFill rotWithShape="1">
+          <a:gsLst>
+            <a:gs pos="0">
+              <a:schemeClr val="phClr">
+                <a:lumMod val="110000"/>
+                <a:satMod val="105000"/>
+                <a:tint val="67000"/>
+              </a:schemeClr>
+            </a:gs>
+            <a:gs pos="50000">
+              <a:schemeClr val="phClr">
+                <a:lumMod val="105000"/>
+                <a:satMod val="103000"/>
+                <a:tint val="73000"/>
+              </a:schemeClr>
+            </a:gs>
+            <a:gs pos="100000">
+              <a:schemeClr val="phClr">
+                <a:lumMod val="105000"/>
+                <a:satMod val="109000"/>
+                <a:tint val="81000"/>
+              </a:schemeClr>
+            </a:gs>
+          </a:gsLst>
+          <a:lin ang="5400000" scaled="0"/>
+        </a:gradFill>
+        <a:gradFill rotWithShape="1">
+          <a:gsLst>
+            <a:gs pos="0">
+              <a:schemeClr val="phClr">
+                <a:satMod val="103000"/>
+                <a:lumMod val="102000"/>
+                <a:tint val="94000"/>
+              </a:schemeClr>
+            </a:gs>
+            <a:gs pos="50000">
+              <a:schemeClr val="phClr">
+                <a:satMod val="110000"/>
+                <a:lumMod val="100000"/>
+                <a:shade val="100000"/>
+              </a:schemeClr>
+            </a:gs>
+            <a:gs pos="100000">
+              <a:schemeClr val="phClr">
+                <a:lumMod val="99000"/>
+                <a:satMod val="120000"/>
+                <a:shade val="78000"/>
+              </a:schemeClr>
+            </a:gs>
+          </a:gsLst>
+          <a:lin ang="5400000" scaled="0"/>
+        </a:gradFill>
+      </a:fillStyleLst>
+      <a:lnStyleLst>
+        <a:ln w="12700" cap="flat" cmpd="sng" algn="ctr">
+          <a:solidFill>
+            <a:schemeClr val="phClr"/>
+          </a:solidFill>
+          <a:prstDash val="solid"/>
+          <a:miter lim="800000"/>
+        </a:ln>
+        <a:ln w="19050" cap="flat" cmpd="sng" algn="ctr">
+          <a:solidFill>
+            <a:schemeClr val="phClr"/>
+          </a:solidFill>
+          <a:prstDash val="solid"/>
+          <a:miter lim="800000"/>
+        </a:ln>
+        <a:ln w="25400" cap="flat" cmpd="sng" algn="ctr">
+          <a:solidFill>
+            <a:schemeClr val="phClr"/>
+          </a:solidFill>
+          <a:prstDash val="solid"/>
+          <a:miter lim="800000"/>
+        </a:ln>
+      </a:lnStyleLst>
+      <a:effectStyleLst>
+        <a:effectStyle>
+          <a:effectLst/>
+        </a:effectStyle>
+        <a:effectStyle>
+          <a:effectLst/>
+        </a:effectStyle>
+        <a:effectStyle>
+          <a:effectLst>
+            <a:outerShdw blurRad="57150" dist="19050" dir="5400000" algn="ctr" rotWithShape="0">
+              <a:srgbClr val="000000">
+                <a:alpha val="63000"/>
+              </a:srgbClr>
+            </a:outerShdw>
+          </a:effectLst>
+        </a:effectStyle>
+      </a:effectStyleLst>
+      <a:bgFillStyleLst>
+        <a:solidFill>
+          <a:schemeClr val="phClr"/>
+        </a:solidFill>
+        <a:solidFill>
+          <a:schemeClr val="phClr">
+            <a:tint val="95000"/>
+            <a:satMod val="170000"/>
+          </a:schemeClr>
+        </a:solidFill>
+        <a:gradFill rotWithShape="1">
+          <a:gsLst>
+            <a:gs pos="0">
+              <a:schemeClr val="phClr">
+                <a:tint val="93000"/>
+                <a:satMod val="150000"/>
+                <a:shade val="98000"/>
+                <a:lumMod val="102000"/>
+              </a:schemeClr>
+            </a:gs>
+            <a:gs pos="50000">
+              <a:schemeClr val="phClr">
+                <a:tint val="98000"/>
+                <a:satMod val="130000"/>
+                <a:shade val="90000"/>
+                <a:lumMod val="103000"/>
+              </a:schemeClr>
+            </a:gs>
+            <a:gs pos="100000">
+              <a:schemeClr val="phClr">
+                <a:shade val="63000"/>
+                <a:satMod val="120000"/>
+              </a:schemeClr>
+            </a:gs>
+          </a:gsLst>
+          <a:lin ang="5400000" scaled="0"/>
+        </a:gradFill>
+      </a:bgFillStyleLst>
+    </a:fmtScheme>
+  </a:themeElements>
+  <a:objectDefaults>
+    <a:lnDef>
+      <a:spPr/>
+      <a:bodyPr/>
+      <a:lstStyle/>
+      <a:style>
+        <a:lnRef idx="2">
+          <a:schemeClr val="accent1"/>
+        </a:lnRef>
+        <a:fillRef idx="0">
+          <a:schemeClr val="accent1"/>
+        </a:fillRef>
+        <a:effectRef idx="1">
+          <a:schemeClr val="accent1"/>
+        </a:effectRef>
+        <a:fontRef idx="minor">
+          <a:schemeClr val="tx1"/>
+        </a:fontRef>
+      </a:style>
+    </a:lnDef>
+  </a:objectDefaults>
+  <a:extraClrSchemeLst/>
+  <a:extLst>
+    <a:ext uri="{05A4C25C-085E-4340-85A3-A5531E510DB2}">
+      <thm15:themeFamily xmlns:thm15="http://schemas.microsoft.com/office/thememl/2012/main" name="Office Theme" id="{2E142A2C-CD16-42D6-873A-C26D2A0506FA}" vid="{1BDDFF52-6CD6-40A5-AB3C-68EB2F1E4D0A}"/>
+    </a:ext>
+  </a:extLst>
+</a:theme>
 </file>